--- a/21_September_Monday/02_Seeking_for_AI/PaNRAID_Template.pptx
+++ b/21_September_Monday/02_Seeking_for_AI/PaNRAID_Template.pptx
@@ -19,6 +19,11 @@
     <p:sldId id="264" r:id="rId12"/>
     <p:sldId id="265" r:id="rId13"/>
     <p:sldId id="266" r:id="rId14"/>
+    <p:sldId id="267" r:id="rId15"/>
+    <p:sldId id="268" r:id="rId16"/>
+    <p:sldId id="269" r:id="rId17"/>
+    <p:sldId id="270" r:id="rId18"/>
+    <p:sldId id="271" r:id="rId19"/>
   </p:sldIdLst>
   <p:sldSz cx="12192000" cy="6858000"/>
   <p:notesSz cx="6858000" cy="12192000"/>
@@ -44,7 +49,7 @@
       </p:grpSpPr>
       <p:sp>
         <p:nvSpPr>
-          <p:cNvPr id="5" name="PlaceHolder 1"/>
+          <p:cNvPr id="15" name="PlaceHolder 1"/>
           <p:cNvSpPr>
             <a:spLocks noGrp="1"/>
           </p:cNvSpPr>
@@ -72,7 +77,7 @@
           <a:p>
             <a:pPr algn="ctr"/>
             <a:r>
-              <a:rPr b="0" lang="fr-FR" sz="4400" strike="noStrike" u="none">
+              <a:rPr b="0" lang="en-US" sz="4400" strike="noStrike" u="none">
                 <a:solidFill>
                   <a:srgbClr val="000000"/>
                 </a:solidFill>
@@ -80,9 +85,9 @@
                 <a:uFillTx/>
                 <a:latin typeface="Arial"/>
               </a:rPr>
-              <a:t>Cliquez pour déplacer la diapo</a:t>
-            </a:r>
-            <a:endParaRPr b="0" lang="fr-FR" sz="4400" strike="noStrike" u="none">
+              <a:t>Click to move the slide</a:t>
+            </a:r>
+            <a:endParaRPr b="0" lang="en-US" sz="4400" strike="noStrike" u="none">
               <a:solidFill>
                 <a:srgbClr val="000000"/>
               </a:solidFill>
@@ -95,7 +100,7 @@
       </p:sp>
       <p:sp>
         <p:nvSpPr>
-          <p:cNvPr id="6" name="PlaceHolder 2"/>
+          <p:cNvPr id="16" name="PlaceHolder 2"/>
           <p:cNvSpPr>
             <a:spLocks noGrp="1"/>
           </p:cNvSpPr>
@@ -125,7 +130,7 @@
               <a:buNone/>
             </a:pPr>
             <a:r>
-              <a:rPr b="0" lang="fr-FR" sz="2000" strike="noStrike" u="none">
+              <a:rPr b="0" lang="en-US" sz="2000" strike="noStrike" u="none">
                 <a:solidFill>
                   <a:srgbClr val="000000"/>
                 </a:solidFill>
@@ -133,9 +138,9 @@
                 <a:uFillTx/>
                 <a:latin typeface="Arial"/>
               </a:rPr>
-              <a:t>Cliquez pour modifier le format des notes</a:t>
-            </a:r>
-            <a:endParaRPr b="0" lang="fr-FR" sz="2000" strike="noStrike" u="none">
+              <a:t>Click to edit the notes format</a:t>
+            </a:r>
+            <a:endParaRPr b="0" lang="en-US" sz="2000" strike="noStrike" u="none">
               <a:solidFill>
                 <a:srgbClr val="000000"/>
               </a:solidFill>
@@ -148,7 +153,7 @@
       </p:sp>
       <p:sp>
         <p:nvSpPr>
-          <p:cNvPr id="7" name="PlaceHolder 3"/>
+          <p:cNvPr id="17" name="PlaceHolder 3"/>
           <p:cNvSpPr>
             <a:spLocks noGrp="1"/>
           </p:cNvSpPr>
@@ -178,7 +183,7 @@
               <a:buNone/>
             </a:pPr>
             <a:r>
-              <a:rPr b="0" lang="fr-FR" sz="1400" strike="noStrike" u="none">
+              <a:rPr b="0" lang="en-US" sz="1400" strike="noStrike" u="none">
                 <a:solidFill>
                   <a:srgbClr val="000000"/>
                 </a:solidFill>
@@ -186,9 +191,9 @@
                 <a:uFillTx/>
                 <a:latin typeface="Times New Roman"/>
               </a:rPr>
-              <a:t> </a:t>
-            </a:r>
-            <a:endParaRPr b="0" lang="fr-FR" sz="1400" strike="noStrike" u="none">
+              <a:t>&lt;header&gt;</a:t>
+            </a:r>
+            <a:endParaRPr b="0" lang="en-US" sz="1400" strike="noStrike" u="none">
               <a:solidFill>
                 <a:srgbClr val="000000"/>
               </a:solidFill>
@@ -201,7 +206,7 @@
       </p:sp>
       <p:sp>
         <p:nvSpPr>
-          <p:cNvPr id="8" name="PlaceHolder 4"/>
+          <p:cNvPr id="18" name="PlaceHolder 4"/>
           <p:cNvSpPr>
             <a:spLocks noGrp="1"/>
           </p:cNvSpPr>
@@ -229,7 +234,7 @@
           <a:lstStyle>
             <a:lvl1pPr indent="0" algn="r">
               <a:buNone/>
-              <a:defRPr b="0" lang="fr-FR" sz="1400" strike="noStrike" u="none">
+              <a:defRPr b="0" lang="en-US" sz="1400" strike="noStrike" u="none">
                 <a:solidFill>
                   <a:srgbClr val="000000"/>
                 </a:solidFill>
@@ -244,7 +249,7 @@
               <a:buNone/>
             </a:pPr>
             <a:r>
-              <a:rPr b="0" lang="fr-FR" sz="1400" strike="noStrike" u="none">
+              <a:rPr b="0" lang="en-US" sz="1400" strike="noStrike" u="none">
                 <a:solidFill>
                   <a:srgbClr val="000000"/>
                 </a:solidFill>
@@ -252,9 +257,9 @@
                 <a:uFillTx/>
                 <a:latin typeface="Times New Roman"/>
               </a:rPr>
-              <a:t> </a:t>
-            </a:r>
-            <a:endParaRPr b="0" lang="fr-FR" sz="1400" strike="noStrike" u="none">
+              <a:t>&lt;date/time&gt;</a:t>
+            </a:r>
+            <a:endParaRPr b="0" lang="en-US" sz="1400" strike="noStrike" u="none">
               <a:solidFill>
                 <a:srgbClr val="000000"/>
               </a:solidFill>
@@ -267,7 +272,7 @@
       </p:sp>
       <p:sp>
         <p:nvSpPr>
-          <p:cNvPr id="9" name="PlaceHolder 5"/>
+          <p:cNvPr id="19" name="PlaceHolder 5"/>
           <p:cNvSpPr>
             <a:spLocks noGrp="1"/>
           </p:cNvSpPr>
@@ -295,7 +300,7 @@
           <a:lstStyle>
             <a:lvl1pPr indent="0">
               <a:buNone/>
-              <a:defRPr b="0" lang="fr-FR" sz="1400" strike="noStrike" u="none">
+              <a:defRPr b="0" lang="en-US" sz="1400" strike="noStrike" u="none">
                 <a:solidFill>
                   <a:srgbClr val="000000"/>
                 </a:solidFill>
@@ -310,7 +315,7 @@
               <a:buNone/>
             </a:pPr>
             <a:r>
-              <a:rPr b="0" lang="fr-FR" sz="1400" strike="noStrike" u="none">
+              <a:rPr b="0" lang="en-US" sz="1400" strike="noStrike" u="none">
                 <a:solidFill>
                   <a:srgbClr val="000000"/>
                 </a:solidFill>
@@ -318,9 +323,9 @@
                 <a:uFillTx/>
                 <a:latin typeface="Times New Roman"/>
               </a:rPr>
-              <a:t> </a:t>
-            </a:r>
-            <a:endParaRPr b="0" lang="fr-FR" sz="1400" strike="noStrike" u="none">
+              <a:t>&lt;footer&gt;</a:t>
+            </a:r>
+            <a:endParaRPr b="0" lang="en-US" sz="1400" strike="noStrike" u="none">
               <a:solidFill>
                 <a:srgbClr val="000000"/>
               </a:solidFill>
@@ -333,7 +338,7 @@
       </p:sp>
       <p:sp>
         <p:nvSpPr>
-          <p:cNvPr id="10" name="PlaceHolder 6"/>
+          <p:cNvPr id="20" name="PlaceHolder 6"/>
           <p:cNvSpPr>
             <a:spLocks noGrp="1"/>
           </p:cNvSpPr>
@@ -361,7 +366,7 @@
           <a:lstStyle>
             <a:lvl1pPr indent="0" algn="r">
               <a:buNone/>
-              <a:defRPr b="0" lang="fr-FR" sz="1400" strike="noStrike" u="none">
+              <a:defRPr b="0" lang="en-US" sz="1400" strike="noStrike" u="none">
                 <a:solidFill>
                   <a:srgbClr val="000000"/>
                 </a:solidFill>
@@ -375,8 +380,8 @@
             <a:pPr indent="0" algn="r">
               <a:buNone/>
             </a:pPr>
-            <a:fld id="{CA6382AF-C200-4703-8304-F6D235EB1428}" type="slidenum">
-              <a:rPr b="0" lang="fr-FR" sz="1400" strike="noStrike" u="none">
+            <a:fld id="{42F5D849-528E-4EDB-A483-865816AF0A7C}" type="slidenum">
+              <a:rPr b="0" lang="en-US" sz="1400" strike="noStrike" u="none">
                 <a:solidFill>
                   <a:srgbClr val="000000"/>
                 </a:solidFill>
@@ -384,9 +389,9 @@
                 <a:uFillTx/>
                 <a:latin typeface="Times New Roman"/>
               </a:rPr>
-              <a:t>1</a:t>
+              <a:t>&lt;number&gt;</a:t>
             </a:fld>
-            <a:endParaRPr b="0" lang="fr-FR" sz="1400" strike="noStrike" u="none">
+            <a:endParaRPr b="0" lang="en-US" sz="1400" strike="noStrike" u="none">
               <a:solidFill>
                 <a:srgbClr val="000000"/>
               </a:solidFill>
@@ -422,7 +427,7 @@
       </p:grpSpPr>
       <p:sp>
         <p:nvSpPr>
-          <p:cNvPr id="86" name="PlaceHolder 1"/>
+          <p:cNvPr id="120" name="PlaceHolder 1"/>
           <p:cNvSpPr>
             <a:spLocks noGrp="1"/>
           </p:cNvSpPr>
@@ -445,7 +450,7 @@
       </p:sp>
       <p:sp>
         <p:nvSpPr>
-          <p:cNvPr id="87" name="PlaceHolder 2"/>
+          <p:cNvPr id="121" name="PlaceHolder 2"/>
           <p:cNvSpPr>
             <a:spLocks noGrp="1"/>
           </p:cNvSpPr>
@@ -474,7 +479,7 @@
             <a:pPr indent="0">
               <a:buNone/>
             </a:pPr>
-            <a:endParaRPr b="0" lang="fr-FR" sz="1800" strike="noStrike" u="none">
+            <a:endParaRPr b="0" lang="en-US" sz="1800" strike="noStrike" u="none">
               <a:solidFill>
                 <a:srgbClr val="000000"/>
               </a:solidFill>
@@ -487,7 +492,7 @@
       </p:sp>
       <p:sp>
         <p:nvSpPr>
-          <p:cNvPr id="88" name="PlaceHolder 3"/>
+          <p:cNvPr id="122" name="PlaceHolder 3"/>
           <p:cNvSpPr>
             <a:spLocks noGrp="1"/>
           </p:cNvSpPr>
@@ -542,7 +547,7 @@
                 <a:tab algn="l" pos="0"/>
               </a:tabLst>
             </a:pPr>
-            <a:fld id="{8AB0F0DA-6CB9-4A06-901F-EF92BD525825}" type="slidenum">
+            <a:fld id="{B97C9940-2745-4AA6-A221-3469B059659A}" type="slidenum">
               <a:rPr b="0" lang="en-US" sz="1800" strike="noStrike" u="none">
                 <a:solidFill>
                   <a:schemeClr val="dk1"/>
@@ -552,9 +557,9 @@
                 <a:latin typeface="+mn-lt"/>
                 <a:ea typeface="+mn-ea"/>
               </a:rPr>
-              <a:t>1</a:t>
+              <a:t>&lt;number&gt;</a:t>
             </a:fld>
-            <a:endParaRPr b="0" lang="fr-FR" sz="1800" strike="noStrike" u="none">
+            <a:endParaRPr b="0" lang="en-US" sz="1800" strike="noStrike" u="none">
               <a:solidFill>
                 <a:srgbClr val="000000"/>
               </a:solidFill>
@@ -570,7 +575,7 @@
 </p:notes>
 </file>
 
-<file path=ppt/notesSlides/notesSlide11.xml><?xml version="1.0" encoding="utf-8"?>
+<file path=ppt/notesSlides/notesSlide16.xml><?xml version="1.0" encoding="utf-8"?>
 <p:notes xmlns:a="http://schemas.openxmlformats.org/drawingml/2006/main" xmlns:p="http://schemas.openxmlformats.org/presentationml/2006/main" xmlns:r="http://schemas.openxmlformats.org/officeDocument/2006/relationships" xmlns:p14="http://schemas.microsoft.com/office/powerpoint/2010/main" xmlns:p15="http://schemas.microsoft.com/office/powerpoint/2012/main" xmlns:mc="http://schemas.openxmlformats.org/markup-compatibility/2006">
   <p:cSld>
     <p:spTree>
@@ -589,7 +594,7 @@
       </p:grpSpPr>
       <p:sp>
         <p:nvSpPr>
-          <p:cNvPr id="113" name="PlaceHolder 1"/>
+          <p:cNvPr id="147" name="PlaceHolder 1"/>
           <p:cNvSpPr>
             <a:spLocks noGrp="1"/>
           </p:cNvSpPr>
@@ -612,7 +617,7 @@
       </p:sp>
       <p:sp>
         <p:nvSpPr>
-          <p:cNvPr id="114" name="PlaceHolder 2"/>
+          <p:cNvPr id="148" name="PlaceHolder 2"/>
           <p:cNvSpPr>
             <a:spLocks noGrp="1"/>
           </p:cNvSpPr>
@@ -641,7 +646,7 @@
             <a:pPr indent="0">
               <a:buNone/>
             </a:pPr>
-            <a:endParaRPr b="0" lang="fr-FR" sz="1800" strike="noStrike" u="none">
+            <a:endParaRPr b="0" lang="en-US" sz="1800" strike="noStrike" u="none">
               <a:solidFill>
                 <a:srgbClr val="000000"/>
               </a:solidFill>
@@ -654,7 +659,7 @@
       </p:sp>
       <p:sp>
         <p:nvSpPr>
-          <p:cNvPr id="115" name="PlaceHolder 3"/>
+          <p:cNvPr id="149" name="PlaceHolder 3"/>
           <p:cNvSpPr>
             <a:spLocks noGrp="1"/>
           </p:cNvSpPr>
@@ -709,7 +714,7 @@
                 <a:tab algn="l" pos="0"/>
               </a:tabLst>
             </a:pPr>
-            <a:fld id="{6196EE6C-78D3-4EA5-BF00-E7F4DE7F9F28}" type="slidenum">
+            <a:fld id="{64636EE3-6E7E-4F20-ADBF-CB8CDC7AD785}" type="slidenum">
               <a:rPr b="0" lang="en-US" sz="1800" strike="noStrike" u="none">
                 <a:solidFill>
                   <a:schemeClr val="dk1"/>
@@ -719,9 +724,9 @@
                 <a:latin typeface="+mn-lt"/>
                 <a:ea typeface="+mn-ea"/>
               </a:rPr>
-              <a:t>&lt;numéro&gt;</a:t>
+              <a:t>&lt;number&gt;</a:t>
             </a:fld>
-            <a:endParaRPr b="0" lang="fr-FR" sz="1800" strike="noStrike" u="none">
+            <a:endParaRPr b="0" lang="en-US" sz="1800" strike="noStrike" u="none">
               <a:solidFill>
                 <a:srgbClr val="000000"/>
               </a:solidFill>
@@ -756,7 +761,7 @@
       </p:grpSpPr>
       <p:sp>
         <p:nvSpPr>
-          <p:cNvPr id="89" name="PlaceHolder 1"/>
+          <p:cNvPr id="123" name="PlaceHolder 1"/>
           <p:cNvSpPr>
             <a:spLocks noGrp="1"/>
           </p:cNvSpPr>
@@ -779,7 +784,7 @@
       </p:sp>
       <p:sp>
         <p:nvSpPr>
-          <p:cNvPr id="90" name="PlaceHolder 2"/>
+          <p:cNvPr id="124" name="PlaceHolder 2"/>
           <p:cNvSpPr>
             <a:spLocks noGrp="1"/>
           </p:cNvSpPr>
@@ -808,7 +813,7 @@
             <a:pPr indent="0">
               <a:buNone/>
             </a:pPr>
-            <a:endParaRPr b="0" lang="fr-FR" sz="1800" strike="noStrike" u="none">
+            <a:endParaRPr b="0" lang="en-US" sz="1800" strike="noStrike" u="none">
               <a:solidFill>
                 <a:srgbClr val="000000"/>
               </a:solidFill>
@@ -821,7 +826,7 @@
       </p:sp>
       <p:sp>
         <p:nvSpPr>
-          <p:cNvPr id="91" name="PlaceHolder 3"/>
+          <p:cNvPr id="125" name="PlaceHolder 3"/>
           <p:cNvSpPr>
             <a:spLocks noGrp="1"/>
           </p:cNvSpPr>
@@ -876,7 +881,7 @@
                 <a:tab algn="l" pos="0"/>
               </a:tabLst>
             </a:pPr>
-            <a:fld id="{45E02D63-D6EE-4BBE-8EBE-0A5E2FC859EA}" type="slidenum">
+            <a:fld id="{3CD2F56F-8253-4645-BCF2-9020EEBB8A7C}" type="slidenum">
               <a:rPr b="0" lang="en-US" sz="1800" strike="noStrike" u="none">
                 <a:solidFill>
                   <a:schemeClr val="dk1"/>
@@ -886,9 +891,9 @@
                 <a:latin typeface="+mn-lt"/>
                 <a:ea typeface="+mn-ea"/>
               </a:rPr>
-              <a:t>1</a:t>
+              <a:t>&lt;number&gt;</a:t>
             </a:fld>
-            <a:endParaRPr b="0" lang="fr-FR" sz="1800" strike="noStrike" u="none">
+            <a:endParaRPr b="0" lang="en-US" sz="1800" strike="noStrike" u="none">
               <a:solidFill>
                 <a:srgbClr val="000000"/>
               </a:solidFill>
@@ -923,7 +928,7 @@
       </p:grpSpPr>
       <p:sp>
         <p:nvSpPr>
-          <p:cNvPr id="92" name="PlaceHolder 1"/>
+          <p:cNvPr id="126" name="PlaceHolder 1"/>
           <p:cNvSpPr>
             <a:spLocks noGrp="1"/>
           </p:cNvSpPr>
@@ -934,7 +939,7 @@
         <p:spPr>
           <a:xfrm>
             <a:off x="-360" y="-360"/>
-            <a:ext cx="720" cy="720"/>
+            <a:ext cx="0" cy="0"/>
           </a:xfrm>
           <a:prstGeom prst="rect">
             <a:avLst/>
@@ -946,7 +951,7 @@
       </p:sp>
       <p:sp>
         <p:nvSpPr>
-          <p:cNvPr id="93" name="PlaceHolder 2"/>
+          <p:cNvPr id="127" name="PlaceHolder 2"/>
           <p:cNvSpPr>
             <a:spLocks noGrp="1"/>
           </p:cNvSpPr>
@@ -975,7 +980,7 @@
             <a:pPr indent="0">
               <a:buNone/>
             </a:pPr>
-            <a:endParaRPr b="0" lang="fr-FR" sz="1800" strike="noStrike" u="none">
+            <a:endParaRPr b="0" lang="en-US" sz="1800" strike="noStrike" u="none">
               <a:solidFill>
                 <a:srgbClr val="000000"/>
               </a:solidFill>
@@ -988,7 +993,7 @@
       </p:sp>
       <p:sp>
         <p:nvSpPr>
-          <p:cNvPr id="94" name="PlaceHolder 3"/>
+          <p:cNvPr id="128" name="PlaceHolder 3"/>
           <p:cNvSpPr>
             <a:spLocks noGrp="1"/>
           </p:cNvSpPr>
@@ -1043,7 +1048,7 @@
                 <a:tab algn="l" pos="0"/>
               </a:tabLst>
             </a:pPr>
-            <a:fld id="{C7180C88-3C33-4CC1-BC73-15D206D0EF17}" type="slidenum">
+            <a:fld id="{6E2BEE70-0C02-4303-92F7-402861C26F21}" type="slidenum">
               <a:rPr b="0" lang="en-US" sz="1800" strike="noStrike" u="none">
                 <a:solidFill>
                   <a:schemeClr val="dk1"/>
@@ -1053,9 +1058,9 @@
                 <a:latin typeface="+mn-lt"/>
                 <a:ea typeface="+mn-ea"/>
               </a:rPr>
-              <a:t>1</a:t>
+              <a:t>&lt;number&gt;</a:t>
             </a:fld>
-            <a:endParaRPr b="0" lang="fr-FR" sz="1800" strike="noStrike" u="none">
+            <a:endParaRPr b="0" lang="en-US" sz="1800" strike="noStrike" u="none">
               <a:solidFill>
                 <a:srgbClr val="000000"/>
               </a:solidFill>
@@ -1090,7 +1095,7 @@
       </p:grpSpPr>
       <p:sp>
         <p:nvSpPr>
-          <p:cNvPr id="95" name="PlaceHolder 1"/>
+          <p:cNvPr id="129" name="PlaceHolder 1"/>
           <p:cNvSpPr>
             <a:spLocks noGrp="1"/>
           </p:cNvSpPr>
@@ -1101,7 +1106,7 @@
         <p:spPr>
           <a:xfrm>
             <a:off x="-360" y="-360"/>
-            <a:ext cx="720" cy="720"/>
+            <a:ext cx="0" cy="0"/>
           </a:xfrm>
           <a:prstGeom prst="rect">
             <a:avLst/>
@@ -1113,7 +1118,7 @@
       </p:sp>
       <p:sp>
         <p:nvSpPr>
-          <p:cNvPr id="96" name="PlaceHolder 2"/>
+          <p:cNvPr id="130" name="PlaceHolder 2"/>
           <p:cNvSpPr>
             <a:spLocks noGrp="1"/>
           </p:cNvSpPr>
@@ -1142,7 +1147,7 @@
             <a:pPr indent="0">
               <a:buNone/>
             </a:pPr>
-            <a:endParaRPr b="0" lang="fr-FR" sz="1800" strike="noStrike" u="none">
+            <a:endParaRPr b="0" lang="en-US" sz="1800" strike="noStrike" u="none">
               <a:solidFill>
                 <a:srgbClr val="000000"/>
               </a:solidFill>
@@ -1155,7 +1160,7 @@
       </p:sp>
       <p:sp>
         <p:nvSpPr>
-          <p:cNvPr id="97" name="PlaceHolder 3"/>
+          <p:cNvPr id="131" name="PlaceHolder 3"/>
           <p:cNvSpPr>
             <a:spLocks noGrp="1"/>
           </p:cNvSpPr>
@@ -1210,7 +1215,7 @@
                 <a:tab algn="l" pos="0"/>
               </a:tabLst>
             </a:pPr>
-            <a:fld id="{CA4FE262-3ACD-489C-B425-DE3A877030D7}" type="slidenum">
+            <a:fld id="{0CD82108-E693-499C-86C4-7BF74DBD361F}" type="slidenum">
               <a:rPr b="0" lang="en-US" sz="1800" strike="noStrike" u="none">
                 <a:solidFill>
                   <a:schemeClr val="dk1"/>
@@ -1220,9 +1225,9 @@
                 <a:latin typeface="+mn-lt"/>
                 <a:ea typeface="+mn-ea"/>
               </a:rPr>
-              <a:t>1</a:t>
+              <a:t>&lt;number&gt;</a:t>
             </a:fld>
-            <a:endParaRPr b="0" lang="fr-FR" sz="1800" strike="noStrike" u="none">
+            <a:endParaRPr b="0" lang="en-US" sz="1800" strike="noStrike" u="none">
               <a:solidFill>
                 <a:srgbClr val="000000"/>
               </a:solidFill>
@@ -1257,7 +1262,7 @@
       </p:grpSpPr>
       <p:sp>
         <p:nvSpPr>
-          <p:cNvPr id="98" name="PlaceHolder 1"/>
+          <p:cNvPr id="132" name="PlaceHolder 1"/>
           <p:cNvSpPr>
             <a:spLocks noGrp="1"/>
           </p:cNvSpPr>
@@ -1268,7 +1273,7 @@
         <p:spPr>
           <a:xfrm>
             <a:off x="-360" y="-360"/>
-            <a:ext cx="720" cy="720"/>
+            <a:ext cx="0" cy="0"/>
           </a:xfrm>
           <a:prstGeom prst="rect">
             <a:avLst/>
@@ -1280,7 +1285,7 @@
       </p:sp>
       <p:sp>
         <p:nvSpPr>
-          <p:cNvPr id="99" name="PlaceHolder 2"/>
+          <p:cNvPr id="133" name="PlaceHolder 2"/>
           <p:cNvSpPr>
             <a:spLocks noGrp="1"/>
           </p:cNvSpPr>
@@ -1309,7 +1314,7 @@
             <a:pPr indent="0">
               <a:buNone/>
             </a:pPr>
-            <a:endParaRPr b="0" lang="fr-FR" sz="1800" strike="noStrike" u="none">
+            <a:endParaRPr b="0" lang="en-US" sz="1800" strike="noStrike" u="none">
               <a:solidFill>
                 <a:srgbClr val="000000"/>
               </a:solidFill>
@@ -1322,7 +1327,7 @@
       </p:sp>
       <p:sp>
         <p:nvSpPr>
-          <p:cNvPr id="100" name="PlaceHolder 3"/>
+          <p:cNvPr id="134" name="PlaceHolder 3"/>
           <p:cNvSpPr>
             <a:spLocks noGrp="1"/>
           </p:cNvSpPr>
@@ -1377,7 +1382,7 @@
                 <a:tab algn="l" pos="0"/>
               </a:tabLst>
             </a:pPr>
-            <a:fld id="{D34EEE29-BFEF-4A43-920D-F100A5E4135D}" type="slidenum">
+            <a:fld id="{FC5F8EE8-D20D-4505-9C18-C05B4EAEC7BA}" type="slidenum">
               <a:rPr b="0" lang="en-US" sz="1800" strike="noStrike" u="none">
                 <a:solidFill>
                   <a:schemeClr val="dk1"/>
@@ -1387,9 +1392,9 @@
                 <a:latin typeface="+mn-lt"/>
                 <a:ea typeface="+mn-ea"/>
               </a:rPr>
-              <a:t>1</a:t>
+              <a:t>&lt;number&gt;</a:t>
             </a:fld>
-            <a:endParaRPr b="0" lang="fr-FR" sz="1800" strike="noStrike" u="none">
+            <a:endParaRPr b="0" lang="en-US" sz="1800" strike="noStrike" u="none">
               <a:solidFill>
                 <a:srgbClr val="000000"/>
               </a:solidFill>
@@ -1424,7 +1429,7 @@
       </p:grpSpPr>
       <p:sp>
         <p:nvSpPr>
-          <p:cNvPr id="101" name="PlaceHolder 1"/>
+          <p:cNvPr id="135" name="PlaceHolder 1"/>
           <p:cNvSpPr>
             <a:spLocks noGrp="1"/>
           </p:cNvSpPr>
@@ -1435,7 +1440,7 @@
         <p:spPr>
           <a:xfrm>
             <a:off x="-360" y="-360"/>
-            <a:ext cx="720" cy="720"/>
+            <a:ext cx="0" cy="0"/>
           </a:xfrm>
           <a:prstGeom prst="rect">
             <a:avLst/>
@@ -1447,7 +1452,7 @@
       </p:sp>
       <p:sp>
         <p:nvSpPr>
-          <p:cNvPr id="102" name="PlaceHolder 2"/>
+          <p:cNvPr id="136" name="PlaceHolder 2"/>
           <p:cNvSpPr>
             <a:spLocks noGrp="1"/>
           </p:cNvSpPr>
@@ -1476,7 +1481,7 @@
             <a:pPr indent="0">
               <a:buNone/>
             </a:pPr>
-            <a:endParaRPr b="0" lang="fr-FR" sz="1800" strike="noStrike" u="none">
+            <a:endParaRPr b="0" lang="en-US" sz="1800" strike="noStrike" u="none">
               <a:solidFill>
                 <a:srgbClr val="000000"/>
               </a:solidFill>
@@ -1489,7 +1494,7 @@
       </p:sp>
       <p:sp>
         <p:nvSpPr>
-          <p:cNvPr id="103" name="PlaceHolder 3"/>
+          <p:cNvPr id="137" name="PlaceHolder 3"/>
           <p:cNvSpPr>
             <a:spLocks noGrp="1"/>
           </p:cNvSpPr>
@@ -1544,7 +1549,7 @@
                 <a:tab algn="l" pos="0"/>
               </a:tabLst>
             </a:pPr>
-            <a:fld id="{B1C082BE-0895-41C2-BE70-0299A7F22874}" type="slidenum">
+            <a:fld id="{3096EACA-C2C9-48AE-8AD0-4F251B3C806E}" type="slidenum">
               <a:rPr b="0" lang="en-US" sz="1800" strike="noStrike" u="none">
                 <a:solidFill>
                   <a:schemeClr val="dk1"/>
@@ -1554,9 +1559,9 @@
                 <a:latin typeface="+mn-lt"/>
                 <a:ea typeface="+mn-ea"/>
               </a:rPr>
-              <a:t>1</a:t>
+              <a:t>&lt;number&gt;</a:t>
             </a:fld>
-            <a:endParaRPr b="0" lang="fr-FR" sz="1800" strike="noStrike" u="none">
+            <a:endParaRPr b="0" lang="en-US" sz="1800" strike="noStrike" u="none">
               <a:solidFill>
                 <a:srgbClr val="000000"/>
               </a:solidFill>
@@ -1591,7 +1596,7 @@
       </p:grpSpPr>
       <p:sp>
         <p:nvSpPr>
-          <p:cNvPr id="104" name="PlaceHolder 1"/>
+          <p:cNvPr id="138" name="PlaceHolder 1"/>
           <p:cNvSpPr>
             <a:spLocks noGrp="1"/>
           </p:cNvSpPr>
@@ -1602,7 +1607,7 @@
         <p:spPr>
           <a:xfrm>
             <a:off x="-360" y="-360"/>
-            <a:ext cx="720" cy="720"/>
+            <a:ext cx="0" cy="0"/>
           </a:xfrm>
           <a:prstGeom prst="rect">
             <a:avLst/>
@@ -1614,7 +1619,7 @@
       </p:sp>
       <p:sp>
         <p:nvSpPr>
-          <p:cNvPr id="105" name="PlaceHolder 2"/>
+          <p:cNvPr id="139" name="PlaceHolder 2"/>
           <p:cNvSpPr>
             <a:spLocks noGrp="1"/>
           </p:cNvSpPr>
@@ -1643,7 +1648,7 @@
             <a:pPr indent="0">
               <a:buNone/>
             </a:pPr>
-            <a:endParaRPr b="0" lang="fr-FR" sz="1800" strike="noStrike" u="none">
+            <a:endParaRPr b="0" lang="en-US" sz="1800" strike="noStrike" u="none">
               <a:solidFill>
                 <a:srgbClr val="000000"/>
               </a:solidFill>
@@ -1656,7 +1661,7 @@
       </p:sp>
       <p:sp>
         <p:nvSpPr>
-          <p:cNvPr id="106" name="PlaceHolder 3"/>
+          <p:cNvPr id="140" name="PlaceHolder 3"/>
           <p:cNvSpPr>
             <a:spLocks noGrp="1"/>
           </p:cNvSpPr>
@@ -1711,7 +1716,7 @@
                 <a:tab algn="l" pos="0"/>
               </a:tabLst>
             </a:pPr>
-            <a:fld id="{2213A2BD-7145-431A-B144-86C832ED4078}" type="slidenum">
+            <a:fld id="{888C9D67-2ACD-46F0-AE14-1CA2834F3AEA}" type="slidenum">
               <a:rPr b="0" lang="en-US" sz="1800" strike="noStrike" u="none">
                 <a:solidFill>
                   <a:schemeClr val="dk1"/>
@@ -1721,9 +1726,9 @@
                 <a:latin typeface="+mn-lt"/>
                 <a:ea typeface="+mn-ea"/>
               </a:rPr>
-              <a:t>1</a:t>
+              <a:t>&lt;number&gt;</a:t>
             </a:fld>
-            <a:endParaRPr b="0" lang="fr-FR" sz="1800" strike="noStrike" u="none">
+            <a:endParaRPr b="0" lang="en-US" sz="1800" strike="noStrike" u="none">
               <a:solidFill>
                 <a:srgbClr val="000000"/>
               </a:solidFill>
@@ -1758,7 +1763,7 @@
       </p:grpSpPr>
       <p:sp>
         <p:nvSpPr>
-          <p:cNvPr id="107" name="PlaceHolder 1"/>
+          <p:cNvPr id="141" name="PlaceHolder 1"/>
           <p:cNvSpPr>
             <a:spLocks noGrp="1"/>
           </p:cNvSpPr>
@@ -1769,7 +1774,7 @@
         <p:spPr>
           <a:xfrm>
             <a:off x="-360" y="-360"/>
-            <a:ext cx="720" cy="720"/>
+            <a:ext cx="0" cy="0"/>
           </a:xfrm>
           <a:prstGeom prst="rect">
             <a:avLst/>
@@ -1781,7 +1786,7 @@
       </p:sp>
       <p:sp>
         <p:nvSpPr>
-          <p:cNvPr id="108" name="PlaceHolder 2"/>
+          <p:cNvPr id="142" name="PlaceHolder 2"/>
           <p:cNvSpPr>
             <a:spLocks noGrp="1"/>
           </p:cNvSpPr>
@@ -1810,7 +1815,7 @@
             <a:pPr indent="0">
               <a:buNone/>
             </a:pPr>
-            <a:endParaRPr b="0" lang="fr-FR" sz="1800" strike="noStrike" u="none">
+            <a:endParaRPr b="0" lang="en-US" sz="1800" strike="noStrike" u="none">
               <a:solidFill>
                 <a:srgbClr val="000000"/>
               </a:solidFill>
@@ -1823,7 +1828,7 @@
       </p:sp>
       <p:sp>
         <p:nvSpPr>
-          <p:cNvPr id="109" name="PlaceHolder 3"/>
+          <p:cNvPr id="143" name="PlaceHolder 3"/>
           <p:cNvSpPr>
             <a:spLocks noGrp="1"/>
           </p:cNvSpPr>
@@ -1878,7 +1883,7 @@
                 <a:tab algn="l" pos="0"/>
               </a:tabLst>
             </a:pPr>
-            <a:fld id="{DF86D252-406F-44F4-94DA-5F082544BFA7}" type="slidenum">
+            <a:fld id="{B4795EC0-7053-4B42-A96E-39DFF0BC8121}" type="slidenum">
               <a:rPr b="0" lang="en-US" sz="1800" strike="noStrike" u="none">
                 <a:solidFill>
                   <a:schemeClr val="dk1"/>
@@ -1888,9 +1893,9 @@
                 <a:latin typeface="+mn-lt"/>
                 <a:ea typeface="+mn-ea"/>
               </a:rPr>
-              <a:t>1</a:t>
+              <a:t>&lt;number&gt;</a:t>
             </a:fld>
-            <a:endParaRPr b="0" lang="fr-FR" sz="1800" strike="noStrike" u="none">
+            <a:endParaRPr b="0" lang="en-US" sz="1800" strike="noStrike" u="none">
               <a:solidFill>
                 <a:srgbClr val="000000"/>
               </a:solidFill>
@@ -1925,7 +1930,7 @@
       </p:grpSpPr>
       <p:sp>
         <p:nvSpPr>
-          <p:cNvPr id="110" name="PlaceHolder 1"/>
+          <p:cNvPr id="144" name="PlaceHolder 1"/>
           <p:cNvSpPr>
             <a:spLocks noGrp="1"/>
           </p:cNvSpPr>
@@ -1936,7 +1941,7 @@
         <p:spPr>
           <a:xfrm>
             <a:off x="-360" y="-360"/>
-            <a:ext cx="720" cy="720"/>
+            <a:ext cx="0" cy="0"/>
           </a:xfrm>
           <a:prstGeom prst="rect">
             <a:avLst/>
@@ -1948,7 +1953,7 @@
       </p:sp>
       <p:sp>
         <p:nvSpPr>
-          <p:cNvPr id="111" name="PlaceHolder 2"/>
+          <p:cNvPr id="145" name="PlaceHolder 2"/>
           <p:cNvSpPr>
             <a:spLocks noGrp="1"/>
           </p:cNvSpPr>
@@ -1977,7 +1982,7 @@
             <a:pPr indent="0">
               <a:buNone/>
             </a:pPr>
-            <a:endParaRPr b="0" lang="fr-FR" sz="1800" strike="noStrike" u="none">
+            <a:endParaRPr b="0" lang="en-US" sz="1800" strike="noStrike" u="none">
               <a:solidFill>
                 <a:srgbClr val="000000"/>
               </a:solidFill>
@@ -1990,7 +1995,7 @@
       </p:sp>
       <p:sp>
         <p:nvSpPr>
-          <p:cNvPr id="112" name="PlaceHolder 3"/>
+          <p:cNvPr id="146" name="PlaceHolder 3"/>
           <p:cNvSpPr>
             <a:spLocks noGrp="1"/>
           </p:cNvSpPr>
@@ -2045,7 +2050,7 @@
                 <a:tab algn="l" pos="0"/>
               </a:tabLst>
             </a:pPr>
-            <a:fld id="{C9726F98-89C6-4AE7-9C75-56A166F0109B}" type="slidenum">
+            <a:fld id="{6682C3A2-88B0-460F-9D4C-A14BC7D95A8F}" type="slidenum">
               <a:rPr b="0" lang="en-US" sz="1800" strike="noStrike" u="none">
                 <a:solidFill>
                   <a:schemeClr val="dk1"/>
@@ -2055,9 +2060,9 @@
                 <a:latin typeface="+mn-lt"/>
                 <a:ea typeface="+mn-ea"/>
               </a:rPr>
-              <a:t>1</a:t>
+              <a:t>&lt;number&gt;</a:t>
             </a:fld>
-            <a:endParaRPr b="0" lang="fr-FR" sz="1800" strike="noStrike" u="none">
+            <a:endParaRPr b="0" lang="en-US" sz="1800" strike="noStrike" u="none">
               <a:solidFill>
                 <a:srgbClr val="000000"/>
               </a:solidFill>
@@ -2076,28 +2081,6 @@
 <file path=ppt/slideLayouts/slideLayout1.xml><?xml version="1.0" encoding="utf-8"?>
 <p:sldLayout xmlns:a="http://schemas.openxmlformats.org/drawingml/2006/main" xmlns:p="http://schemas.openxmlformats.org/presentationml/2006/main" xmlns:r="http://schemas.openxmlformats.org/officeDocument/2006/relationships" xmlns:p14="http://schemas.microsoft.com/office/powerpoint/2010/main" xmlns:p15="http://schemas.microsoft.com/office/powerpoint/2012/main" xmlns:mc="http://schemas.openxmlformats.org/markup-compatibility/2006" type="blank" preserve="1">
   <p:cSld name="DEFAULT">
-    <p:spTree>
-      <p:nvGrpSpPr>
-        <p:cNvPr id="1" name=""/>
-        <p:cNvGrpSpPr/>
-        <p:nvPr/>
-      </p:nvGrpSpPr>
-      <p:grpSpPr>
-        <a:xfrm>
-          <a:off x="0" y="0"/>
-          <a:ext cx="0" cy="0"/>
-          <a:chOff x="0" y="0"/>
-          <a:chExt cx="0" cy="0"/>
-        </a:xfrm>
-      </p:grpSpPr>
-    </p:spTree>
-  </p:cSld>
-</p:sldLayout>
-</file>
-
-<file path=ppt/slideMasters/slideMaster1.xml><?xml version="1.0" encoding="utf-8"?>
-<p:sldMaster xmlns:a="http://schemas.openxmlformats.org/drawingml/2006/main" xmlns:p="http://schemas.openxmlformats.org/presentationml/2006/main" xmlns:r="http://schemas.openxmlformats.org/officeDocument/2006/relationships" xmlns:p14="http://schemas.microsoft.com/office/powerpoint/2010/main" xmlns:p15="http://schemas.microsoft.com/office/powerpoint/2012/main" xmlns:mc="http://schemas.openxmlformats.org/markup-compatibility/2006">
-  <p:cSld>
     <p:bg>
       <p:bgPr>
         <a:solidFill>
@@ -2121,320 +2104,14 @@
       </p:grpSpPr>
       <p:sp>
         <p:nvSpPr>
-          <p:cNvPr id="0" name="PlaceHolder 1"/>
-          <p:cNvSpPr>
-            <a:spLocks noGrp="1"/>
-          </p:cNvSpPr>
-          <p:nvPr>
-            <p:ph type="title"/>
-          </p:nvPr>
-        </p:nvSpPr>
-        <p:spPr>
-          <a:xfrm>
-            <a:off x="609480" y="273600"/>
-            <a:ext cx="10972440" cy="1144800"/>
-          </a:xfrm>
-          <a:prstGeom prst="rect">
-            <a:avLst/>
-          </a:prstGeom>
-          <a:noFill/>
-          <a:ln w="0">
-            <a:noFill/>
-          </a:ln>
-        </p:spPr>
-        <p:txBody>
-          <a:bodyPr lIns="0" rIns="0" tIns="0" bIns="0" anchor="ctr">
-            <a:noAutofit/>
-          </a:bodyPr>
-          <a:p>
-            <a:pPr indent="0" algn="ctr">
-              <a:buNone/>
-            </a:pPr>
-            <a:r>
-              <a:rPr b="0" lang="fr-FR" sz="4400" strike="noStrike" u="none">
-                <a:solidFill>
-                  <a:srgbClr val="000000"/>
-                </a:solidFill>
-                <a:effectLst/>
-                <a:uFillTx/>
-                <a:latin typeface="Arial"/>
-              </a:rPr>
-              <a:t>Cliquez pour éditer le format du texte-titre</a:t>
-            </a:r>
-            <a:endParaRPr b="0" lang="fr-FR" sz="4400" strike="noStrike" u="none">
-              <a:solidFill>
-                <a:srgbClr val="000000"/>
-              </a:solidFill>
-              <a:effectLst/>
-              <a:uFillTx/>
-              <a:latin typeface="Arial"/>
-            </a:endParaRPr>
-          </a:p>
-        </p:txBody>
-      </p:sp>
-      <p:sp>
-        <p:nvSpPr>
-          <p:cNvPr id="1" name="PlaceHolder 2"/>
-          <p:cNvSpPr>
-            <a:spLocks noGrp="1"/>
-          </p:cNvSpPr>
-          <p:nvPr>
-            <p:ph type="body"/>
-          </p:nvPr>
-        </p:nvSpPr>
-        <p:spPr>
-          <a:xfrm>
-            <a:off x="609480" y="1604520"/>
-            <a:ext cx="10972440" cy="3977280"/>
-          </a:xfrm>
-          <a:prstGeom prst="rect">
-            <a:avLst/>
-          </a:prstGeom>
-          <a:noFill/>
-          <a:ln w="0">
-            <a:noFill/>
-          </a:ln>
-        </p:spPr>
-        <p:txBody>
-          <a:bodyPr lIns="0" rIns="0" tIns="0" bIns="0" anchor="t">
-            <a:normAutofit/>
-          </a:bodyPr>
-          <a:p>
-            <a:pPr marL="432000" indent="-324000">
-              <a:spcBef>
-                <a:spcPts val="1417"/>
-              </a:spcBef>
-              <a:buClr>
-                <a:srgbClr val="000000"/>
-              </a:buClr>
-              <a:buSzPct val="45000"/>
-              <a:buFont typeface="Wingdings" charset="2"/>
-              <a:buChar char=""/>
-            </a:pPr>
-            <a:r>
-              <a:rPr b="0" lang="fr-FR" sz="3200" strike="noStrike" u="none">
-                <a:solidFill>
-                  <a:srgbClr val="000000"/>
-                </a:solidFill>
-                <a:effectLst/>
-                <a:uFillTx/>
-                <a:latin typeface="Arial"/>
-              </a:rPr>
-              <a:t>Cliquez pour éditer le format du plan de texte</a:t>
-            </a:r>
-            <a:endParaRPr b="0" lang="fr-FR" sz="3200" strike="noStrike" u="none">
-              <a:solidFill>
-                <a:srgbClr val="000000"/>
-              </a:solidFill>
-              <a:effectLst/>
-              <a:uFillTx/>
-              <a:latin typeface="Arial"/>
-            </a:endParaRPr>
-          </a:p>
-          <a:p>
-            <a:pPr lvl="1" marL="864000" indent="-324000">
-              <a:spcBef>
-                <a:spcPts val="1134"/>
-              </a:spcBef>
-              <a:buClr>
-                <a:srgbClr val="000000"/>
-              </a:buClr>
-              <a:buSzPct val="75000"/>
-              <a:buFont typeface="Symbol" charset="2"/>
-              <a:buChar char=""/>
-            </a:pPr>
-            <a:r>
-              <a:rPr b="0" lang="fr-FR" sz="2800" strike="noStrike" u="none">
-                <a:solidFill>
-                  <a:srgbClr val="000000"/>
-                </a:solidFill>
-                <a:effectLst/>
-                <a:uFillTx/>
-                <a:latin typeface="Arial"/>
-              </a:rPr>
-              <a:t>Second niveau de plan</a:t>
-            </a:r>
-            <a:endParaRPr b="0" lang="fr-FR" sz="2800" strike="noStrike" u="none">
-              <a:solidFill>
-                <a:srgbClr val="000000"/>
-              </a:solidFill>
-              <a:effectLst/>
-              <a:uFillTx/>
-              <a:latin typeface="Arial"/>
-            </a:endParaRPr>
-          </a:p>
-          <a:p>
-            <a:pPr lvl="2" marL="1296000" indent="-288000">
-              <a:spcBef>
-                <a:spcPts val="850"/>
-              </a:spcBef>
-              <a:buClr>
-                <a:srgbClr val="000000"/>
-              </a:buClr>
-              <a:buSzPct val="45000"/>
-              <a:buFont typeface="Wingdings" charset="2"/>
-              <a:buChar char=""/>
-            </a:pPr>
-            <a:r>
-              <a:rPr b="0" lang="fr-FR" sz="2400" strike="noStrike" u="none">
-                <a:solidFill>
-                  <a:srgbClr val="000000"/>
-                </a:solidFill>
-                <a:effectLst/>
-                <a:uFillTx/>
-                <a:latin typeface="Arial"/>
-              </a:rPr>
-              <a:t>Troisième niveau de plan</a:t>
-            </a:r>
-            <a:endParaRPr b="0" lang="fr-FR" sz="2400" strike="noStrike" u="none">
-              <a:solidFill>
-                <a:srgbClr val="000000"/>
-              </a:solidFill>
-              <a:effectLst/>
-              <a:uFillTx/>
-              <a:latin typeface="Arial"/>
-            </a:endParaRPr>
-          </a:p>
-          <a:p>
-            <a:pPr lvl="3" marL="1728000" indent="-216000">
-              <a:spcBef>
-                <a:spcPts val="567"/>
-              </a:spcBef>
-              <a:buClr>
-                <a:srgbClr val="000000"/>
-              </a:buClr>
-              <a:buSzPct val="75000"/>
-              <a:buFont typeface="Symbol" charset="2"/>
-              <a:buChar char=""/>
-            </a:pPr>
-            <a:r>
-              <a:rPr b="0" lang="fr-FR" sz="2000" strike="noStrike" u="none">
-                <a:solidFill>
-                  <a:srgbClr val="000000"/>
-                </a:solidFill>
-                <a:effectLst/>
-                <a:uFillTx/>
-                <a:latin typeface="Arial"/>
-              </a:rPr>
-              <a:t>Quatrième niveau de plan</a:t>
-            </a:r>
-            <a:endParaRPr b="0" lang="fr-FR" sz="2000" strike="noStrike" u="none">
-              <a:solidFill>
-                <a:srgbClr val="000000"/>
-              </a:solidFill>
-              <a:effectLst/>
-              <a:uFillTx/>
-              <a:latin typeface="Arial"/>
-            </a:endParaRPr>
-          </a:p>
-          <a:p>
-            <a:pPr lvl="4" marL="2160000" indent="-216000">
-              <a:spcBef>
-                <a:spcPts val="283"/>
-              </a:spcBef>
-              <a:buClr>
-                <a:srgbClr val="000000"/>
-              </a:buClr>
-              <a:buSzPct val="45000"/>
-              <a:buFont typeface="Wingdings" charset="2"/>
-              <a:buChar char=""/>
-            </a:pPr>
-            <a:r>
-              <a:rPr b="0" lang="fr-FR" sz="2000" strike="noStrike" u="none">
-                <a:solidFill>
-                  <a:srgbClr val="000000"/>
-                </a:solidFill>
-                <a:effectLst/>
-                <a:uFillTx/>
-                <a:latin typeface="Arial"/>
-              </a:rPr>
-              <a:t>Cinquième niveau de plan</a:t>
-            </a:r>
-            <a:endParaRPr b="0" lang="fr-FR" sz="2000" strike="noStrike" u="none">
-              <a:solidFill>
-                <a:srgbClr val="000000"/>
-              </a:solidFill>
-              <a:effectLst/>
-              <a:uFillTx/>
-              <a:latin typeface="Arial"/>
-            </a:endParaRPr>
-          </a:p>
-          <a:p>
-            <a:pPr lvl="5" marL="2592000" indent="-216000">
-              <a:spcBef>
-                <a:spcPts val="283"/>
-              </a:spcBef>
-              <a:buClr>
-                <a:srgbClr val="000000"/>
-              </a:buClr>
-              <a:buSzPct val="45000"/>
-              <a:buFont typeface="Wingdings" charset="2"/>
-              <a:buChar char=""/>
-            </a:pPr>
-            <a:r>
-              <a:rPr b="0" lang="fr-FR" sz="2000" strike="noStrike" u="none">
-                <a:solidFill>
-                  <a:srgbClr val="000000"/>
-                </a:solidFill>
-                <a:effectLst/>
-                <a:uFillTx/>
-                <a:latin typeface="Arial"/>
-              </a:rPr>
-              <a:t>Sixième niveau de plan</a:t>
-            </a:r>
-            <a:endParaRPr b="0" lang="fr-FR" sz="2000" strike="noStrike" u="none">
-              <a:solidFill>
-                <a:srgbClr val="000000"/>
-              </a:solidFill>
-              <a:effectLst/>
-              <a:uFillTx/>
-              <a:latin typeface="Arial"/>
-            </a:endParaRPr>
-          </a:p>
-          <a:p>
-            <a:pPr lvl="6" marL="3024000" indent="-216000">
-              <a:spcBef>
-                <a:spcPts val="283"/>
-              </a:spcBef>
-              <a:buClr>
-                <a:srgbClr val="000000"/>
-              </a:buClr>
-              <a:buSzPct val="45000"/>
-              <a:buFont typeface="Wingdings" charset="2"/>
-              <a:buChar char=""/>
-            </a:pPr>
-            <a:r>
-              <a:rPr b="0" lang="fr-FR" sz="2000" strike="noStrike" u="none">
-                <a:solidFill>
-                  <a:srgbClr val="000000"/>
-                </a:solidFill>
-                <a:effectLst/>
-                <a:uFillTx/>
-                <a:latin typeface="Arial"/>
-              </a:rPr>
-              <a:t>Septième niveau de plan</a:t>
-            </a:r>
-            <a:endParaRPr b="0" lang="fr-FR" sz="2000" strike="noStrike" u="none">
-              <a:solidFill>
-                <a:srgbClr val="000000"/>
-              </a:solidFill>
-              <a:effectLst/>
-              <a:uFillTx/>
-              <a:latin typeface="Arial"/>
-            </a:endParaRPr>
-          </a:p>
-        </p:txBody>
-      </p:sp>
-      <p:sp>
-        <p:nvSpPr>
-          <p:cNvPr id="2" name="Text 14"/>
+          <p:cNvPr id="0" name="Text 14"/>
           <p:cNvSpPr/>
           <p:nvPr/>
         </p:nvSpPr>
         <p:spPr>
           <a:xfrm>
             <a:off x="548640" y="6446880"/>
-            <a:ext cx="6400080" cy="273600"/>
+            <a:ext cx="6399360" cy="272880"/>
           </a:xfrm>
           <a:prstGeom prst="rect">
             <a:avLst/>
@@ -2473,9 +2150,9 @@
                 <a:latin typeface="Calibri"/>
                 <a:ea typeface="Calibri"/>
               </a:rPr>
-              <a:t>{presentation title</a:t>
-            </a:r>
-            <a:endParaRPr b="0" lang="fr-FR" sz="900" strike="noStrike" u="none">
+              <a:t>Seeking for AI</a:t>
+            </a:r>
+            <a:endParaRPr b="0" lang="en-US" sz="900" strike="noStrike" u="none">
               <a:solidFill>
                 <a:srgbClr val="000000"/>
               </a:solidFill>
@@ -2488,14 +2165,14 @@
       </p:sp>
       <p:sp>
         <p:nvSpPr>
-          <p:cNvPr id="3" name="Text 15"/>
+          <p:cNvPr id="1" name="Text 15"/>
           <p:cNvSpPr/>
           <p:nvPr/>
         </p:nvSpPr>
         <p:spPr>
           <a:xfrm>
             <a:off x="11185920" y="6446880"/>
-            <a:ext cx="456480" cy="273600"/>
+            <a:ext cx="455760" cy="272880"/>
           </a:xfrm>
           <a:prstGeom prst="rect">
             <a:avLst/>
@@ -2536,7 +2213,7 @@
               </a:rPr>
               <a:t>2</a:t>
             </a:r>
-            <a:endParaRPr b="0" lang="fr-FR" sz="900" strike="noStrike" u="none">
+            <a:endParaRPr b="0" lang="en-US" sz="900" strike="noStrike" u="none">
               <a:solidFill>
                 <a:srgbClr val="000000"/>
               </a:solidFill>
@@ -2549,7 +2226,7 @@
       </p:sp>
       <p:pic>
         <p:nvPicPr>
-          <p:cNvPr id="4" name="Copied Picture 1" descr=""/>
+          <p:cNvPr id="2" name="Copied Picture 1" descr=""/>
           <p:cNvPicPr/>
           <p:nvPr/>
         </p:nvPicPr>
@@ -2561,7 +2238,7 @@
         <p:spPr>
           <a:xfrm>
             <a:off x="10375920" y="356040"/>
-            <a:ext cx="1269360" cy="650880"/>
+            <a:ext cx="1268640" cy="650160"/>
           </a:xfrm>
           <a:prstGeom prst="rect">
             <a:avLst/>
@@ -2572,11 +2249,1386 @@
           </a:ln>
         </p:spPr>
       </p:pic>
+      <p:sp>
+        <p:nvSpPr>
+          <p:cNvPr id="3" name="PlaceHolder 1"/>
+          <p:cNvSpPr>
+            <a:spLocks noGrp="1"/>
+          </p:cNvSpPr>
+          <p:nvPr>
+            <p:ph type="title"/>
+          </p:nvPr>
+        </p:nvSpPr>
+        <p:spPr>
+          <a:xfrm>
+            <a:off x="609480" y="273600"/>
+            <a:ext cx="10972080" cy="1144440"/>
+          </a:xfrm>
+          <a:prstGeom prst="rect">
+            <a:avLst/>
+          </a:prstGeom>
+          <a:noFill/>
+          <a:ln w="0">
+            <a:noFill/>
+          </a:ln>
+        </p:spPr>
+        <p:txBody>
+          <a:bodyPr lIns="0" rIns="0" tIns="0" bIns="0" anchor="ctr">
+            <a:noAutofit/>
+          </a:bodyPr>
+          <a:p>
+            <a:pPr indent="0" algn="ctr">
+              <a:lnSpc>
+                <a:spcPct val="100000"/>
+              </a:lnSpc>
+              <a:buNone/>
+              <a:tabLst>
+                <a:tab algn="l" pos="0"/>
+              </a:tabLst>
+            </a:pPr>
+            <a:r>
+              <a:rPr b="0" lang="en-US" sz="4400" strike="noStrike" u="none">
+                <a:solidFill>
+                  <a:srgbClr val="000000"/>
+                </a:solidFill>
+                <a:effectLst/>
+                <a:uFillTx/>
+                <a:latin typeface="Arial"/>
+              </a:rPr>
+              <a:t>Click to edit the title text format</a:t>
+            </a:r>
+            <a:endParaRPr b="0" lang="en-US" sz="4400" strike="noStrike" u="none">
+              <a:solidFill>
+                <a:srgbClr val="000000"/>
+              </a:solidFill>
+              <a:effectLst/>
+              <a:uFillTx/>
+              <a:latin typeface="Arial"/>
+            </a:endParaRPr>
+          </a:p>
+        </p:txBody>
+      </p:sp>
+      <p:sp>
+        <p:nvSpPr>
+          <p:cNvPr id="4" name="PlaceHolder 2"/>
+          <p:cNvSpPr>
+            <a:spLocks noGrp="1"/>
+          </p:cNvSpPr>
+          <p:nvPr>
+            <p:ph type="body"/>
+          </p:nvPr>
+        </p:nvSpPr>
+        <p:spPr>
+          <a:xfrm>
+            <a:off x="609480" y="1604520"/>
+            <a:ext cx="10972080" cy="3976920"/>
+          </a:xfrm>
+          <a:prstGeom prst="rect">
+            <a:avLst/>
+          </a:prstGeom>
+          <a:noFill/>
+          <a:ln w="0">
+            <a:noFill/>
+          </a:ln>
+        </p:spPr>
+        <p:txBody>
+          <a:bodyPr lIns="0" rIns="0" tIns="0" bIns="0" anchor="t">
+            <a:normAutofit/>
+          </a:bodyPr>
+          <a:p>
+            <a:pPr marL="432000" indent="-324000">
+              <a:lnSpc>
+                <a:spcPct val="100000"/>
+              </a:lnSpc>
+              <a:spcBef>
+                <a:spcPts val="1417"/>
+              </a:spcBef>
+              <a:buClr>
+                <a:srgbClr val="000000"/>
+              </a:buClr>
+              <a:buSzPct val="45000"/>
+              <a:buFont typeface="Wingdings" charset="2"/>
+              <a:buChar char=""/>
+            </a:pPr>
+            <a:r>
+              <a:rPr b="0" lang="en-US" sz="3200" strike="noStrike" u="none">
+                <a:solidFill>
+                  <a:srgbClr val="000000"/>
+                </a:solidFill>
+                <a:effectLst/>
+                <a:uFillTx/>
+                <a:latin typeface="Arial"/>
+              </a:rPr>
+              <a:t>Click to edit the outline text format</a:t>
+            </a:r>
+            <a:endParaRPr b="0" lang="en-US" sz="3200" strike="noStrike" u="none">
+              <a:solidFill>
+                <a:srgbClr val="000000"/>
+              </a:solidFill>
+              <a:effectLst/>
+              <a:uFillTx/>
+              <a:latin typeface="Arial"/>
+            </a:endParaRPr>
+          </a:p>
+          <a:p>
+            <a:pPr lvl="1" marL="864000" indent="-324000">
+              <a:lnSpc>
+                <a:spcPct val="100000"/>
+              </a:lnSpc>
+              <a:spcBef>
+                <a:spcPts val="1134"/>
+              </a:spcBef>
+              <a:buClr>
+                <a:srgbClr val="000000"/>
+              </a:buClr>
+              <a:buSzPct val="75000"/>
+              <a:buFont typeface="Symbol" charset="2"/>
+              <a:buChar char=""/>
+            </a:pPr>
+            <a:r>
+              <a:rPr b="0" lang="en-US" sz="2800" strike="noStrike" u="none">
+                <a:solidFill>
+                  <a:srgbClr val="000000"/>
+                </a:solidFill>
+                <a:effectLst/>
+                <a:uFillTx/>
+                <a:latin typeface="Arial"/>
+              </a:rPr>
+              <a:t>Second Outline Level</a:t>
+            </a:r>
+            <a:endParaRPr b="0" lang="en-US" sz="2800" strike="noStrike" u="none">
+              <a:solidFill>
+                <a:srgbClr val="000000"/>
+              </a:solidFill>
+              <a:effectLst/>
+              <a:uFillTx/>
+              <a:latin typeface="Arial"/>
+            </a:endParaRPr>
+          </a:p>
+          <a:p>
+            <a:pPr lvl="2" marL="1296000" indent="-288000">
+              <a:lnSpc>
+                <a:spcPct val="100000"/>
+              </a:lnSpc>
+              <a:spcBef>
+                <a:spcPts val="850"/>
+              </a:spcBef>
+              <a:buClr>
+                <a:srgbClr val="000000"/>
+              </a:buClr>
+              <a:buSzPct val="45000"/>
+              <a:buFont typeface="Wingdings" charset="2"/>
+              <a:buChar char=""/>
+            </a:pPr>
+            <a:r>
+              <a:rPr b="0" lang="en-US" sz="2400" strike="noStrike" u="none">
+                <a:solidFill>
+                  <a:srgbClr val="000000"/>
+                </a:solidFill>
+                <a:effectLst/>
+                <a:uFillTx/>
+                <a:latin typeface="Arial"/>
+              </a:rPr>
+              <a:t>Third Outline Level</a:t>
+            </a:r>
+            <a:endParaRPr b="0" lang="en-US" sz="2400" strike="noStrike" u="none">
+              <a:solidFill>
+                <a:srgbClr val="000000"/>
+              </a:solidFill>
+              <a:effectLst/>
+              <a:uFillTx/>
+              <a:latin typeface="Arial"/>
+            </a:endParaRPr>
+          </a:p>
+          <a:p>
+            <a:pPr lvl="3" marL="1728000" indent="-216000">
+              <a:lnSpc>
+                <a:spcPct val="100000"/>
+              </a:lnSpc>
+              <a:spcBef>
+                <a:spcPts val="567"/>
+              </a:spcBef>
+              <a:buClr>
+                <a:srgbClr val="000000"/>
+              </a:buClr>
+              <a:buSzPct val="75000"/>
+              <a:buFont typeface="Symbol" charset="2"/>
+              <a:buChar char=""/>
+            </a:pPr>
+            <a:r>
+              <a:rPr b="0" lang="en-US" sz="2000" strike="noStrike" u="none">
+                <a:solidFill>
+                  <a:srgbClr val="000000"/>
+                </a:solidFill>
+                <a:effectLst/>
+                <a:uFillTx/>
+                <a:latin typeface="Arial"/>
+              </a:rPr>
+              <a:t>Fourth Outline Level</a:t>
+            </a:r>
+            <a:endParaRPr b="0" lang="en-US" sz="2000" strike="noStrike" u="none">
+              <a:solidFill>
+                <a:srgbClr val="000000"/>
+              </a:solidFill>
+              <a:effectLst/>
+              <a:uFillTx/>
+              <a:latin typeface="Arial"/>
+            </a:endParaRPr>
+          </a:p>
+          <a:p>
+            <a:pPr lvl="4" marL="2160000" indent="-216000">
+              <a:lnSpc>
+                <a:spcPct val="100000"/>
+              </a:lnSpc>
+              <a:spcBef>
+                <a:spcPts val="283"/>
+              </a:spcBef>
+              <a:buClr>
+                <a:srgbClr val="000000"/>
+              </a:buClr>
+              <a:buSzPct val="45000"/>
+              <a:buFont typeface="Wingdings" charset="2"/>
+              <a:buChar char=""/>
+            </a:pPr>
+            <a:r>
+              <a:rPr b="0" lang="en-US" sz="2000" strike="noStrike" u="none">
+                <a:solidFill>
+                  <a:srgbClr val="000000"/>
+                </a:solidFill>
+                <a:effectLst/>
+                <a:uFillTx/>
+                <a:latin typeface="Arial"/>
+              </a:rPr>
+              <a:t>Fifth Outline Level</a:t>
+            </a:r>
+            <a:endParaRPr b="0" lang="en-US" sz="2000" strike="noStrike" u="none">
+              <a:solidFill>
+                <a:srgbClr val="000000"/>
+              </a:solidFill>
+              <a:effectLst/>
+              <a:uFillTx/>
+              <a:latin typeface="Arial"/>
+            </a:endParaRPr>
+          </a:p>
+          <a:p>
+            <a:pPr lvl="5" marL="2592000" indent="-216000">
+              <a:lnSpc>
+                <a:spcPct val="100000"/>
+              </a:lnSpc>
+              <a:spcBef>
+                <a:spcPts val="283"/>
+              </a:spcBef>
+              <a:buClr>
+                <a:srgbClr val="000000"/>
+              </a:buClr>
+              <a:buSzPct val="45000"/>
+              <a:buFont typeface="Wingdings" charset="2"/>
+              <a:buChar char=""/>
+            </a:pPr>
+            <a:r>
+              <a:rPr b="0" lang="en-US" sz="2000" strike="noStrike" u="none">
+                <a:solidFill>
+                  <a:srgbClr val="000000"/>
+                </a:solidFill>
+                <a:effectLst/>
+                <a:uFillTx/>
+                <a:latin typeface="Arial"/>
+              </a:rPr>
+              <a:t>Sixth Outline Level</a:t>
+            </a:r>
+            <a:endParaRPr b="0" lang="en-US" sz="2000" strike="noStrike" u="none">
+              <a:solidFill>
+                <a:srgbClr val="000000"/>
+              </a:solidFill>
+              <a:effectLst/>
+              <a:uFillTx/>
+              <a:latin typeface="Arial"/>
+            </a:endParaRPr>
+          </a:p>
+          <a:p>
+            <a:pPr lvl="6" marL="3024000" indent="-216000">
+              <a:lnSpc>
+                <a:spcPct val="100000"/>
+              </a:lnSpc>
+              <a:spcBef>
+                <a:spcPts val="283"/>
+              </a:spcBef>
+              <a:buClr>
+                <a:srgbClr val="000000"/>
+              </a:buClr>
+              <a:buSzPct val="45000"/>
+              <a:buFont typeface="Wingdings" charset="2"/>
+              <a:buChar char=""/>
+            </a:pPr>
+            <a:r>
+              <a:rPr b="0" lang="en-US" sz="2000" strike="noStrike" u="none">
+                <a:solidFill>
+                  <a:srgbClr val="000000"/>
+                </a:solidFill>
+                <a:effectLst/>
+                <a:uFillTx/>
+                <a:latin typeface="Arial"/>
+              </a:rPr>
+              <a:t>Seventh Outline Level</a:t>
+            </a:r>
+            <a:endParaRPr b="0" lang="en-US" sz="2000" strike="noStrike" u="none">
+              <a:solidFill>
+                <a:srgbClr val="000000"/>
+              </a:solidFill>
+              <a:effectLst/>
+              <a:uFillTx/>
+              <a:latin typeface="Arial"/>
+            </a:endParaRPr>
+          </a:p>
+        </p:txBody>
+      </p:sp>
+    </p:spTree>
+  </p:cSld>
+</p:sldLayout>
+</file>
+
+<file path=ppt/slideLayouts/slideLayout2.xml><?xml version="1.0" encoding="utf-8"?>
+<p:sldLayout xmlns:a="http://schemas.openxmlformats.org/drawingml/2006/main" xmlns:p="http://schemas.openxmlformats.org/presentationml/2006/main" xmlns:r="http://schemas.openxmlformats.org/officeDocument/2006/relationships" xmlns:p14="http://schemas.microsoft.com/office/powerpoint/2010/main" xmlns:p15="http://schemas.microsoft.com/office/powerpoint/2012/main" xmlns:mc="http://schemas.openxmlformats.org/markup-compatibility/2006" type="blank" preserve="1">
+  <p:cSld name="DEFAULT_">
+    <p:bg>
+      <p:bgPr>
+        <a:solidFill>
+          <a:srgbClr val="ffffff"/>
+        </a:solidFill>
+      </p:bgPr>
+    </p:bg>
+    <p:spTree>
+      <p:nvGrpSpPr>
+        <p:cNvPr id="1" name=""/>
+        <p:cNvGrpSpPr/>
+        <p:nvPr/>
+      </p:nvGrpSpPr>
+      <p:grpSpPr>
+        <a:xfrm>
+          <a:off x="0" y="0"/>
+          <a:ext cx="0" cy="0"/>
+          <a:chOff x="0" y="0"/>
+          <a:chExt cx="0" cy="0"/>
+        </a:xfrm>
+      </p:grpSpPr>
+      <p:sp>
+        <p:nvSpPr>
+          <p:cNvPr id="5" name="Text 14"/>
+          <p:cNvSpPr/>
+          <p:nvPr/>
+        </p:nvSpPr>
+        <p:spPr>
+          <a:xfrm>
+            <a:off x="548640" y="6446880"/>
+            <a:ext cx="6399360" cy="272880"/>
+          </a:xfrm>
+          <a:prstGeom prst="rect">
+            <a:avLst/>
+          </a:prstGeom>
+          <a:noFill/>
+          <a:ln w="0">
+            <a:noFill/>
+          </a:ln>
+        </p:spPr>
+        <p:style>
+          <a:lnRef idx="0"/>
+          <a:fillRef idx="0"/>
+          <a:effectRef idx="0"/>
+          <a:fontRef idx="minor"/>
+        </p:style>
+        <p:txBody>
+          <a:bodyPr lIns="90000" rIns="90000" tIns="45000" bIns="45000" anchor="ctr">
+            <a:noAutofit/>
+          </a:bodyPr>
+          <a:p>
+            <a:pPr defTabSz="914400">
+              <a:lnSpc>
+                <a:spcPct val="100000"/>
+              </a:lnSpc>
+              <a:tabLst>
+                <a:tab algn="l" pos="0"/>
+              </a:tabLst>
+            </a:pPr>
+            <a:r>
+              <a:rPr b="0" lang="en-US" sz="900" strike="noStrike" u="none">
+                <a:solidFill>
+                  <a:srgbClr val="6e7580"/>
+                </a:solidFill>
+                <a:effectLst/>
+                <a:uFillTx/>
+                <a:latin typeface="Calibri"/>
+                <a:ea typeface="Calibri"/>
+              </a:rPr>
+              <a:t>Seeking for AI</a:t>
+            </a:r>
+            <a:endParaRPr b="0" lang="en-US" sz="900" strike="noStrike" u="none">
+              <a:solidFill>
+                <a:srgbClr val="000000"/>
+              </a:solidFill>
+              <a:effectLst/>
+              <a:uFillTx/>
+              <a:latin typeface="Arial"/>
+            </a:endParaRPr>
+          </a:p>
+        </p:txBody>
+      </p:sp>
+      <p:sp>
+        <p:nvSpPr>
+          <p:cNvPr id="6" name="Text 15"/>
+          <p:cNvSpPr/>
+          <p:nvPr/>
+        </p:nvSpPr>
+        <p:spPr>
+          <a:xfrm>
+            <a:off x="11185920" y="6446880"/>
+            <a:ext cx="455760" cy="272880"/>
+          </a:xfrm>
+          <a:prstGeom prst="rect">
+            <a:avLst/>
+          </a:prstGeom>
+          <a:noFill/>
+          <a:ln w="0">
+            <a:noFill/>
+          </a:ln>
+        </p:spPr>
+        <p:style>
+          <a:lnRef idx="0"/>
+          <a:fillRef idx="0"/>
+          <a:effectRef idx="0"/>
+          <a:fontRef idx="minor"/>
+        </p:style>
+        <p:txBody>
+          <a:bodyPr lIns="90000" rIns="90000" tIns="45000" bIns="45000" anchor="ctr">
+            <a:noAutofit/>
+          </a:bodyPr>
+          <a:p>
+            <a:pPr algn="r" defTabSz="914400">
+              <a:lnSpc>
+                <a:spcPct val="100000"/>
+              </a:lnSpc>
+              <a:tabLst>
+                <a:tab algn="l" pos="0"/>
+              </a:tabLst>
+            </a:pPr>
+            <a:r>
+              <a:rPr b="0" lang="en-US" sz="900" strike="noStrike" u="none">
+                <a:solidFill>
+                  <a:srgbClr val="6e7580"/>
+                </a:solidFill>
+                <a:effectLst/>
+                <a:uFillTx/>
+                <a:latin typeface="Calibri"/>
+                <a:ea typeface="Calibri"/>
+              </a:rPr>
+              <a:t>2</a:t>
+            </a:r>
+            <a:endParaRPr b="0" lang="en-US" sz="900" strike="noStrike" u="none">
+              <a:solidFill>
+                <a:srgbClr val="000000"/>
+              </a:solidFill>
+              <a:effectLst/>
+              <a:uFillTx/>
+              <a:latin typeface="Arial"/>
+            </a:endParaRPr>
+          </a:p>
+        </p:txBody>
+      </p:sp>
+      <p:pic>
+        <p:nvPicPr>
+          <p:cNvPr id="7" name="Copied Picture 1" descr=""/>
+          <p:cNvPicPr/>
+          <p:nvPr/>
+        </p:nvPicPr>
+        <p:blipFill>
+          <a:blip r:embed="rId2"/>
+          <a:srcRect l="11719" t="16991" r="0" b="0"/>
+          <a:stretch/>
+        </p:blipFill>
+        <p:spPr>
+          <a:xfrm>
+            <a:off x="10375920" y="356040"/>
+            <a:ext cx="1268640" cy="650160"/>
+          </a:xfrm>
+          <a:prstGeom prst="rect">
+            <a:avLst/>
+          </a:prstGeom>
+          <a:noFill/>
+          <a:ln w="0">
+            <a:noFill/>
+          </a:ln>
+        </p:spPr>
+      </p:pic>
+      <p:sp>
+        <p:nvSpPr>
+          <p:cNvPr id="8" name="PlaceHolder 1"/>
+          <p:cNvSpPr>
+            <a:spLocks noGrp="1"/>
+          </p:cNvSpPr>
+          <p:nvPr>
+            <p:ph type="title"/>
+          </p:nvPr>
+        </p:nvSpPr>
+        <p:spPr>
+          <a:xfrm>
+            <a:off x="609480" y="273600"/>
+            <a:ext cx="10972080" cy="1144440"/>
+          </a:xfrm>
+          <a:prstGeom prst="rect">
+            <a:avLst/>
+          </a:prstGeom>
+          <a:noFill/>
+          <a:ln w="0">
+            <a:noFill/>
+          </a:ln>
+        </p:spPr>
+        <p:txBody>
+          <a:bodyPr lIns="0" rIns="0" tIns="0" bIns="0" anchor="ctr">
+            <a:noAutofit/>
+          </a:bodyPr>
+          <a:p>
+            <a:pPr indent="0" algn="ctr">
+              <a:lnSpc>
+                <a:spcPct val="100000"/>
+              </a:lnSpc>
+              <a:buNone/>
+              <a:tabLst>
+                <a:tab algn="l" pos="0"/>
+              </a:tabLst>
+            </a:pPr>
+            <a:r>
+              <a:rPr b="0" lang="en-US" sz="4400" strike="noStrike" u="none">
+                <a:solidFill>
+                  <a:srgbClr val="000000"/>
+                </a:solidFill>
+                <a:effectLst/>
+                <a:uFillTx/>
+                <a:latin typeface="Arial"/>
+              </a:rPr>
+              <a:t>Click to edit the title text format</a:t>
+            </a:r>
+            <a:endParaRPr b="0" lang="en-US" sz="4400" strike="noStrike" u="none">
+              <a:solidFill>
+                <a:srgbClr val="000000"/>
+              </a:solidFill>
+              <a:effectLst/>
+              <a:uFillTx/>
+              <a:latin typeface="Arial"/>
+            </a:endParaRPr>
+          </a:p>
+        </p:txBody>
+      </p:sp>
+      <p:sp>
+        <p:nvSpPr>
+          <p:cNvPr id="9" name="PlaceHolder 2"/>
+          <p:cNvSpPr>
+            <a:spLocks noGrp="1"/>
+          </p:cNvSpPr>
+          <p:nvPr>
+            <p:ph type="body"/>
+          </p:nvPr>
+        </p:nvSpPr>
+        <p:spPr>
+          <a:xfrm>
+            <a:off x="609480" y="1604520"/>
+            <a:ext cx="10972080" cy="3976920"/>
+          </a:xfrm>
+          <a:prstGeom prst="rect">
+            <a:avLst/>
+          </a:prstGeom>
+          <a:noFill/>
+          <a:ln w="0">
+            <a:noFill/>
+          </a:ln>
+        </p:spPr>
+        <p:txBody>
+          <a:bodyPr lIns="0" rIns="0" tIns="0" bIns="0" anchor="t">
+            <a:normAutofit/>
+          </a:bodyPr>
+          <a:p>
+            <a:pPr marL="432000" indent="-324000">
+              <a:lnSpc>
+                <a:spcPct val="100000"/>
+              </a:lnSpc>
+              <a:spcBef>
+                <a:spcPts val="1417"/>
+              </a:spcBef>
+              <a:buClr>
+                <a:srgbClr val="000000"/>
+              </a:buClr>
+              <a:buSzPct val="45000"/>
+              <a:buFont typeface="Wingdings" charset="2"/>
+              <a:buChar char=""/>
+            </a:pPr>
+            <a:r>
+              <a:rPr b="0" lang="en-US" sz="3200" strike="noStrike" u="none">
+                <a:solidFill>
+                  <a:srgbClr val="000000"/>
+                </a:solidFill>
+                <a:effectLst/>
+                <a:uFillTx/>
+                <a:latin typeface="Arial"/>
+              </a:rPr>
+              <a:t>Click to edit the outline text format</a:t>
+            </a:r>
+            <a:endParaRPr b="0" lang="en-US" sz="3200" strike="noStrike" u="none">
+              <a:solidFill>
+                <a:srgbClr val="000000"/>
+              </a:solidFill>
+              <a:effectLst/>
+              <a:uFillTx/>
+              <a:latin typeface="Arial"/>
+            </a:endParaRPr>
+          </a:p>
+          <a:p>
+            <a:pPr lvl="1" marL="864000" indent="-324000">
+              <a:lnSpc>
+                <a:spcPct val="100000"/>
+              </a:lnSpc>
+              <a:spcBef>
+                <a:spcPts val="1134"/>
+              </a:spcBef>
+              <a:buClr>
+                <a:srgbClr val="000000"/>
+              </a:buClr>
+              <a:buSzPct val="75000"/>
+              <a:buFont typeface="Symbol" charset="2"/>
+              <a:buChar char=""/>
+            </a:pPr>
+            <a:r>
+              <a:rPr b="0" lang="en-US" sz="2800" strike="noStrike" u="none">
+                <a:solidFill>
+                  <a:srgbClr val="000000"/>
+                </a:solidFill>
+                <a:effectLst/>
+                <a:uFillTx/>
+                <a:latin typeface="Arial"/>
+              </a:rPr>
+              <a:t>Second Outline Level</a:t>
+            </a:r>
+            <a:endParaRPr b="0" lang="en-US" sz="2800" strike="noStrike" u="none">
+              <a:solidFill>
+                <a:srgbClr val="000000"/>
+              </a:solidFill>
+              <a:effectLst/>
+              <a:uFillTx/>
+              <a:latin typeface="Arial"/>
+            </a:endParaRPr>
+          </a:p>
+          <a:p>
+            <a:pPr lvl="2" marL="1296000" indent="-288000">
+              <a:lnSpc>
+                <a:spcPct val="100000"/>
+              </a:lnSpc>
+              <a:spcBef>
+                <a:spcPts val="850"/>
+              </a:spcBef>
+              <a:buClr>
+                <a:srgbClr val="000000"/>
+              </a:buClr>
+              <a:buSzPct val="45000"/>
+              <a:buFont typeface="Wingdings" charset="2"/>
+              <a:buChar char=""/>
+            </a:pPr>
+            <a:r>
+              <a:rPr b="0" lang="en-US" sz="2400" strike="noStrike" u="none">
+                <a:solidFill>
+                  <a:srgbClr val="000000"/>
+                </a:solidFill>
+                <a:effectLst/>
+                <a:uFillTx/>
+                <a:latin typeface="Arial"/>
+              </a:rPr>
+              <a:t>Third Outline Level</a:t>
+            </a:r>
+            <a:endParaRPr b="0" lang="en-US" sz="2400" strike="noStrike" u="none">
+              <a:solidFill>
+                <a:srgbClr val="000000"/>
+              </a:solidFill>
+              <a:effectLst/>
+              <a:uFillTx/>
+              <a:latin typeface="Arial"/>
+            </a:endParaRPr>
+          </a:p>
+          <a:p>
+            <a:pPr lvl="3" marL="1728000" indent="-216000">
+              <a:lnSpc>
+                <a:spcPct val="100000"/>
+              </a:lnSpc>
+              <a:spcBef>
+                <a:spcPts val="567"/>
+              </a:spcBef>
+              <a:buClr>
+                <a:srgbClr val="000000"/>
+              </a:buClr>
+              <a:buSzPct val="75000"/>
+              <a:buFont typeface="Symbol" charset="2"/>
+              <a:buChar char=""/>
+            </a:pPr>
+            <a:r>
+              <a:rPr b="0" lang="en-US" sz="2000" strike="noStrike" u="none">
+                <a:solidFill>
+                  <a:srgbClr val="000000"/>
+                </a:solidFill>
+                <a:effectLst/>
+                <a:uFillTx/>
+                <a:latin typeface="Arial"/>
+              </a:rPr>
+              <a:t>Fourth Outline Level</a:t>
+            </a:r>
+            <a:endParaRPr b="0" lang="en-US" sz="2000" strike="noStrike" u="none">
+              <a:solidFill>
+                <a:srgbClr val="000000"/>
+              </a:solidFill>
+              <a:effectLst/>
+              <a:uFillTx/>
+              <a:latin typeface="Arial"/>
+            </a:endParaRPr>
+          </a:p>
+          <a:p>
+            <a:pPr lvl="4" marL="2160000" indent="-216000">
+              <a:lnSpc>
+                <a:spcPct val="100000"/>
+              </a:lnSpc>
+              <a:spcBef>
+                <a:spcPts val="283"/>
+              </a:spcBef>
+              <a:buClr>
+                <a:srgbClr val="000000"/>
+              </a:buClr>
+              <a:buSzPct val="45000"/>
+              <a:buFont typeface="Wingdings" charset="2"/>
+              <a:buChar char=""/>
+            </a:pPr>
+            <a:r>
+              <a:rPr b="0" lang="en-US" sz="2000" strike="noStrike" u="none">
+                <a:solidFill>
+                  <a:srgbClr val="000000"/>
+                </a:solidFill>
+                <a:effectLst/>
+                <a:uFillTx/>
+                <a:latin typeface="Arial"/>
+              </a:rPr>
+              <a:t>Fifth Outline Level</a:t>
+            </a:r>
+            <a:endParaRPr b="0" lang="en-US" sz="2000" strike="noStrike" u="none">
+              <a:solidFill>
+                <a:srgbClr val="000000"/>
+              </a:solidFill>
+              <a:effectLst/>
+              <a:uFillTx/>
+              <a:latin typeface="Arial"/>
+            </a:endParaRPr>
+          </a:p>
+          <a:p>
+            <a:pPr lvl="5" marL="2592000" indent="-216000">
+              <a:lnSpc>
+                <a:spcPct val="100000"/>
+              </a:lnSpc>
+              <a:spcBef>
+                <a:spcPts val="283"/>
+              </a:spcBef>
+              <a:buClr>
+                <a:srgbClr val="000000"/>
+              </a:buClr>
+              <a:buSzPct val="45000"/>
+              <a:buFont typeface="Wingdings" charset="2"/>
+              <a:buChar char=""/>
+            </a:pPr>
+            <a:r>
+              <a:rPr b="0" lang="en-US" sz="2000" strike="noStrike" u="none">
+                <a:solidFill>
+                  <a:srgbClr val="000000"/>
+                </a:solidFill>
+                <a:effectLst/>
+                <a:uFillTx/>
+                <a:latin typeface="Arial"/>
+              </a:rPr>
+              <a:t>Sixth Outline Level</a:t>
+            </a:r>
+            <a:endParaRPr b="0" lang="en-US" sz="2000" strike="noStrike" u="none">
+              <a:solidFill>
+                <a:srgbClr val="000000"/>
+              </a:solidFill>
+              <a:effectLst/>
+              <a:uFillTx/>
+              <a:latin typeface="Arial"/>
+            </a:endParaRPr>
+          </a:p>
+          <a:p>
+            <a:pPr lvl="6" marL="3024000" indent="-216000">
+              <a:lnSpc>
+                <a:spcPct val="100000"/>
+              </a:lnSpc>
+              <a:spcBef>
+                <a:spcPts val="283"/>
+              </a:spcBef>
+              <a:buClr>
+                <a:srgbClr val="000000"/>
+              </a:buClr>
+              <a:buSzPct val="45000"/>
+              <a:buFont typeface="Wingdings" charset="2"/>
+              <a:buChar char=""/>
+            </a:pPr>
+            <a:r>
+              <a:rPr b="0" lang="en-US" sz="2000" strike="noStrike" u="none">
+                <a:solidFill>
+                  <a:srgbClr val="000000"/>
+                </a:solidFill>
+                <a:effectLst/>
+                <a:uFillTx/>
+                <a:latin typeface="Arial"/>
+              </a:rPr>
+              <a:t>Seventh Outline Level</a:t>
+            </a:r>
+            <a:endParaRPr b="0" lang="en-US" sz="2000" strike="noStrike" u="none">
+              <a:solidFill>
+                <a:srgbClr val="000000"/>
+              </a:solidFill>
+              <a:effectLst/>
+              <a:uFillTx/>
+              <a:latin typeface="Arial"/>
+            </a:endParaRPr>
+          </a:p>
+        </p:txBody>
+      </p:sp>
+    </p:spTree>
+  </p:cSld>
+</p:sldLayout>
+</file>
+
+<file path=ppt/slideLayouts/slideLayout3.xml><?xml version="1.0" encoding="utf-8"?>
+<p:sldLayout xmlns:a="http://schemas.openxmlformats.org/drawingml/2006/main" xmlns:p="http://schemas.openxmlformats.org/presentationml/2006/main" xmlns:r="http://schemas.openxmlformats.org/officeDocument/2006/relationships" xmlns:p14="http://schemas.microsoft.com/office/powerpoint/2010/main" xmlns:p15="http://schemas.microsoft.com/office/powerpoint/2012/main" xmlns:mc="http://schemas.openxmlformats.org/markup-compatibility/2006" type="blank" preserve="1">
+  <p:cSld name="DEFAULT__">
+    <p:bg>
+      <p:bgPr>
+        <a:solidFill>
+          <a:srgbClr val="ffffff"/>
+        </a:solidFill>
+      </p:bgPr>
+    </p:bg>
+    <p:spTree>
+      <p:nvGrpSpPr>
+        <p:cNvPr id="1" name=""/>
+        <p:cNvGrpSpPr/>
+        <p:nvPr/>
+      </p:nvGrpSpPr>
+      <p:grpSpPr>
+        <a:xfrm>
+          <a:off x="0" y="0"/>
+          <a:ext cx="0" cy="0"/>
+          <a:chOff x="0" y="0"/>
+          <a:chExt cx="0" cy="0"/>
+        </a:xfrm>
+      </p:grpSpPr>
+      <p:sp>
+        <p:nvSpPr>
+          <p:cNvPr id="10" name="Text 14"/>
+          <p:cNvSpPr/>
+          <p:nvPr/>
+        </p:nvSpPr>
+        <p:spPr>
+          <a:xfrm>
+            <a:off x="548640" y="6446880"/>
+            <a:ext cx="6399360" cy="272880"/>
+          </a:xfrm>
+          <a:prstGeom prst="rect">
+            <a:avLst/>
+          </a:prstGeom>
+          <a:noFill/>
+          <a:ln w="0">
+            <a:noFill/>
+          </a:ln>
+        </p:spPr>
+        <p:style>
+          <a:lnRef idx="0"/>
+          <a:fillRef idx="0"/>
+          <a:effectRef idx="0"/>
+          <a:fontRef idx="minor"/>
+        </p:style>
+        <p:txBody>
+          <a:bodyPr lIns="90000" rIns="90000" tIns="45000" bIns="45000" anchor="ctr">
+            <a:noAutofit/>
+          </a:bodyPr>
+          <a:p>
+            <a:pPr defTabSz="914400">
+              <a:lnSpc>
+                <a:spcPct val="100000"/>
+              </a:lnSpc>
+              <a:tabLst>
+                <a:tab algn="l" pos="0"/>
+              </a:tabLst>
+            </a:pPr>
+            <a:r>
+              <a:rPr b="0" lang="en-US" sz="900" strike="noStrike" u="none">
+                <a:solidFill>
+                  <a:srgbClr val="6e7580"/>
+                </a:solidFill>
+                <a:effectLst/>
+                <a:uFillTx/>
+                <a:latin typeface="Calibri"/>
+                <a:ea typeface="Calibri"/>
+              </a:rPr>
+              <a:t>Seeking for AI</a:t>
+            </a:r>
+            <a:endParaRPr b="0" lang="en-US" sz="900" strike="noStrike" u="none">
+              <a:solidFill>
+                <a:srgbClr val="000000"/>
+              </a:solidFill>
+              <a:effectLst/>
+              <a:uFillTx/>
+              <a:latin typeface="Arial"/>
+            </a:endParaRPr>
+          </a:p>
+        </p:txBody>
+      </p:sp>
+      <p:sp>
+        <p:nvSpPr>
+          <p:cNvPr id="11" name="Text 15"/>
+          <p:cNvSpPr/>
+          <p:nvPr/>
+        </p:nvSpPr>
+        <p:spPr>
+          <a:xfrm>
+            <a:off x="11185920" y="6446880"/>
+            <a:ext cx="455760" cy="272880"/>
+          </a:xfrm>
+          <a:prstGeom prst="rect">
+            <a:avLst/>
+          </a:prstGeom>
+          <a:noFill/>
+          <a:ln w="0">
+            <a:noFill/>
+          </a:ln>
+        </p:spPr>
+        <p:style>
+          <a:lnRef idx="0"/>
+          <a:fillRef idx="0"/>
+          <a:effectRef idx="0"/>
+          <a:fontRef idx="minor"/>
+        </p:style>
+        <p:txBody>
+          <a:bodyPr lIns="90000" rIns="90000" tIns="45000" bIns="45000" anchor="ctr">
+            <a:noAutofit/>
+          </a:bodyPr>
+          <a:p>
+            <a:pPr algn="r" defTabSz="914400">
+              <a:lnSpc>
+                <a:spcPct val="100000"/>
+              </a:lnSpc>
+              <a:tabLst>
+                <a:tab algn="l" pos="0"/>
+              </a:tabLst>
+            </a:pPr>
+            <a:r>
+              <a:rPr b="0" lang="en-US" sz="900" strike="noStrike" u="none">
+                <a:solidFill>
+                  <a:srgbClr val="6e7580"/>
+                </a:solidFill>
+                <a:effectLst/>
+                <a:uFillTx/>
+                <a:latin typeface="Calibri"/>
+                <a:ea typeface="Calibri"/>
+              </a:rPr>
+              <a:t>2</a:t>
+            </a:r>
+            <a:endParaRPr b="0" lang="en-US" sz="900" strike="noStrike" u="none">
+              <a:solidFill>
+                <a:srgbClr val="000000"/>
+              </a:solidFill>
+              <a:effectLst/>
+              <a:uFillTx/>
+              <a:latin typeface="Arial"/>
+            </a:endParaRPr>
+          </a:p>
+        </p:txBody>
+      </p:sp>
+      <p:pic>
+        <p:nvPicPr>
+          <p:cNvPr id="12" name="Copied Picture 1" descr=""/>
+          <p:cNvPicPr/>
+          <p:nvPr/>
+        </p:nvPicPr>
+        <p:blipFill>
+          <a:blip r:embed="rId2"/>
+          <a:srcRect l="11719" t="16991" r="0" b="0"/>
+          <a:stretch/>
+        </p:blipFill>
+        <p:spPr>
+          <a:xfrm>
+            <a:off x="10375920" y="356040"/>
+            <a:ext cx="1268640" cy="650160"/>
+          </a:xfrm>
+          <a:prstGeom prst="rect">
+            <a:avLst/>
+          </a:prstGeom>
+          <a:noFill/>
+          <a:ln w="0">
+            <a:noFill/>
+          </a:ln>
+        </p:spPr>
+      </p:pic>
+      <p:sp>
+        <p:nvSpPr>
+          <p:cNvPr id="13" name="PlaceHolder 1"/>
+          <p:cNvSpPr>
+            <a:spLocks noGrp="1"/>
+          </p:cNvSpPr>
+          <p:nvPr>
+            <p:ph type="title"/>
+          </p:nvPr>
+        </p:nvSpPr>
+        <p:spPr>
+          <a:xfrm>
+            <a:off x="609480" y="273600"/>
+            <a:ext cx="10972080" cy="1144440"/>
+          </a:xfrm>
+          <a:prstGeom prst="rect">
+            <a:avLst/>
+          </a:prstGeom>
+          <a:noFill/>
+          <a:ln w="0">
+            <a:noFill/>
+          </a:ln>
+        </p:spPr>
+        <p:txBody>
+          <a:bodyPr lIns="0" rIns="0" tIns="0" bIns="0" anchor="ctr">
+            <a:noAutofit/>
+          </a:bodyPr>
+          <a:p>
+            <a:pPr indent="0" algn="ctr">
+              <a:lnSpc>
+                <a:spcPct val="100000"/>
+              </a:lnSpc>
+              <a:buNone/>
+              <a:tabLst>
+                <a:tab algn="l" pos="0"/>
+              </a:tabLst>
+            </a:pPr>
+            <a:r>
+              <a:rPr b="0" lang="en-US" sz="4400" strike="noStrike" u="none">
+                <a:solidFill>
+                  <a:srgbClr val="000000"/>
+                </a:solidFill>
+                <a:effectLst/>
+                <a:uFillTx/>
+                <a:latin typeface="Arial"/>
+              </a:rPr>
+              <a:t>Click to edit the title text format</a:t>
+            </a:r>
+            <a:endParaRPr b="0" lang="en-US" sz="4400" strike="noStrike" u="none">
+              <a:solidFill>
+                <a:srgbClr val="000000"/>
+              </a:solidFill>
+              <a:effectLst/>
+              <a:uFillTx/>
+              <a:latin typeface="Arial"/>
+            </a:endParaRPr>
+          </a:p>
+        </p:txBody>
+      </p:sp>
+      <p:sp>
+        <p:nvSpPr>
+          <p:cNvPr id="14" name="PlaceHolder 2"/>
+          <p:cNvSpPr>
+            <a:spLocks noGrp="1"/>
+          </p:cNvSpPr>
+          <p:nvPr>
+            <p:ph type="body"/>
+          </p:nvPr>
+        </p:nvSpPr>
+        <p:spPr>
+          <a:xfrm>
+            <a:off x="609480" y="1604520"/>
+            <a:ext cx="10972080" cy="3976920"/>
+          </a:xfrm>
+          <a:prstGeom prst="rect">
+            <a:avLst/>
+          </a:prstGeom>
+          <a:noFill/>
+          <a:ln w="0">
+            <a:noFill/>
+          </a:ln>
+        </p:spPr>
+        <p:txBody>
+          <a:bodyPr lIns="0" rIns="0" tIns="0" bIns="0" anchor="t">
+            <a:normAutofit/>
+          </a:bodyPr>
+          <a:p>
+            <a:pPr marL="432000" indent="-324000">
+              <a:lnSpc>
+                <a:spcPct val="100000"/>
+              </a:lnSpc>
+              <a:spcBef>
+                <a:spcPts val="1417"/>
+              </a:spcBef>
+              <a:buClr>
+                <a:srgbClr val="000000"/>
+              </a:buClr>
+              <a:buSzPct val="45000"/>
+              <a:buFont typeface="Wingdings" charset="2"/>
+              <a:buChar char=""/>
+            </a:pPr>
+            <a:r>
+              <a:rPr b="0" lang="en-US" sz="3200" strike="noStrike" u="none">
+                <a:solidFill>
+                  <a:srgbClr val="000000"/>
+                </a:solidFill>
+                <a:effectLst/>
+                <a:uFillTx/>
+                <a:latin typeface="Arial"/>
+              </a:rPr>
+              <a:t>Click to edit the outline text format</a:t>
+            </a:r>
+            <a:endParaRPr b="0" lang="en-US" sz="3200" strike="noStrike" u="none">
+              <a:solidFill>
+                <a:srgbClr val="000000"/>
+              </a:solidFill>
+              <a:effectLst/>
+              <a:uFillTx/>
+              <a:latin typeface="Arial"/>
+            </a:endParaRPr>
+          </a:p>
+          <a:p>
+            <a:pPr lvl="1" marL="864000" indent="-324000">
+              <a:lnSpc>
+                <a:spcPct val="100000"/>
+              </a:lnSpc>
+              <a:spcBef>
+                <a:spcPts val="1134"/>
+              </a:spcBef>
+              <a:buClr>
+                <a:srgbClr val="000000"/>
+              </a:buClr>
+              <a:buSzPct val="75000"/>
+              <a:buFont typeface="Symbol" charset="2"/>
+              <a:buChar char=""/>
+            </a:pPr>
+            <a:r>
+              <a:rPr b="0" lang="en-US" sz="2800" strike="noStrike" u="none">
+                <a:solidFill>
+                  <a:srgbClr val="000000"/>
+                </a:solidFill>
+                <a:effectLst/>
+                <a:uFillTx/>
+                <a:latin typeface="Arial"/>
+              </a:rPr>
+              <a:t>Second Outline Level</a:t>
+            </a:r>
+            <a:endParaRPr b="0" lang="en-US" sz="2800" strike="noStrike" u="none">
+              <a:solidFill>
+                <a:srgbClr val="000000"/>
+              </a:solidFill>
+              <a:effectLst/>
+              <a:uFillTx/>
+              <a:latin typeface="Arial"/>
+            </a:endParaRPr>
+          </a:p>
+          <a:p>
+            <a:pPr lvl="2" marL="1296000" indent="-288000">
+              <a:lnSpc>
+                <a:spcPct val="100000"/>
+              </a:lnSpc>
+              <a:spcBef>
+                <a:spcPts val="850"/>
+              </a:spcBef>
+              <a:buClr>
+                <a:srgbClr val="000000"/>
+              </a:buClr>
+              <a:buSzPct val="45000"/>
+              <a:buFont typeface="Wingdings" charset="2"/>
+              <a:buChar char=""/>
+            </a:pPr>
+            <a:r>
+              <a:rPr b="0" lang="en-US" sz="2400" strike="noStrike" u="none">
+                <a:solidFill>
+                  <a:srgbClr val="000000"/>
+                </a:solidFill>
+                <a:effectLst/>
+                <a:uFillTx/>
+                <a:latin typeface="Arial"/>
+              </a:rPr>
+              <a:t>Third Outline Level</a:t>
+            </a:r>
+            <a:endParaRPr b="0" lang="en-US" sz="2400" strike="noStrike" u="none">
+              <a:solidFill>
+                <a:srgbClr val="000000"/>
+              </a:solidFill>
+              <a:effectLst/>
+              <a:uFillTx/>
+              <a:latin typeface="Arial"/>
+            </a:endParaRPr>
+          </a:p>
+          <a:p>
+            <a:pPr lvl="3" marL="1728000" indent="-216000">
+              <a:lnSpc>
+                <a:spcPct val="100000"/>
+              </a:lnSpc>
+              <a:spcBef>
+                <a:spcPts val="567"/>
+              </a:spcBef>
+              <a:buClr>
+                <a:srgbClr val="000000"/>
+              </a:buClr>
+              <a:buSzPct val="75000"/>
+              <a:buFont typeface="Symbol" charset="2"/>
+              <a:buChar char=""/>
+            </a:pPr>
+            <a:r>
+              <a:rPr b="0" lang="en-US" sz="2000" strike="noStrike" u="none">
+                <a:solidFill>
+                  <a:srgbClr val="000000"/>
+                </a:solidFill>
+                <a:effectLst/>
+                <a:uFillTx/>
+                <a:latin typeface="Arial"/>
+              </a:rPr>
+              <a:t>Fourth Outline Level</a:t>
+            </a:r>
+            <a:endParaRPr b="0" lang="en-US" sz="2000" strike="noStrike" u="none">
+              <a:solidFill>
+                <a:srgbClr val="000000"/>
+              </a:solidFill>
+              <a:effectLst/>
+              <a:uFillTx/>
+              <a:latin typeface="Arial"/>
+            </a:endParaRPr>
+          </a:p>
+          <a:p>
+            <a:pPr lvl="4" marL="2160000" indent="-216000">
+              <a:lnSpc>
+                <a:spcPct val="100000"/>
+              </a:lnSpc>
+              <a:spcBef>
+                <a:spcPts val="283"/>
+              </a:spcBef>
+              <a:buClr>
+                <a:srgbClr val="000000"/>
+              </a:buClr>
+              <a:buSzPct val="45000"/>
+              <a:buFont typeface="Wingdings" charset="2"/>
+              <a:buChar char=""/>
+            </a:pPr>
+            <a:r>
+              <a:rPr b="0" lang="en-US" sz="2000" strike="noStrike" u="none">
+                <a:solidFill>
+                  <a:srgbClr val="000000"/>
+                </a:solidFill>
+                <a:effectLst/>
+                <a:uFillTx/>
+                <a:latin typeface="Arial"/>
+              </a:rPr>
+              <a:t>Fifth Outline Level</a:t>
+            </a:r>
+            <a:endParaRPr b="0" lang="en-US" sz="2000" strike="noStrike" u="none">
+              <a:solidFill>
+                <a:srgbClr val="000000"/>
+              </a:solidFill>
+              <a:effectLst/>
+              <a:uFillTx/>
+              <a:latin typeface="Arial"/>
+            </a:endParaRPr>
+          </a:p>
+          <a:p>
+            <a:pPr lvl="5" marL="2592000" indent="-216000">
+              <a:lnSpc>
+                <a:spcPct val="100000"/>
+              </a:lnSpc>
+              <a:spcBef>
+                <a:spcPts val="283"/>
+              </a:spcBef>
+              <a:buClr>
+                <a:srgbClr val="000000"/>
+              </a:buClr>
+              <a:buSzPct val="45000"/>
+              <a:buFont typeface="Wingdings" charset="2"/>
+              <a:buChar char=""/>
+            </a:pPr>
+            <a:r>
+              <a:rPr b="0" lang="en-US" sz="2000" strike="noStrike" u="none">
+                <a:solidFill>
+                  <a:srgbClr val="000000"/>
+                </a:solidFill>
+                <a:effectLst/>
+                <a:uFillTx/>
+                <a:latin typeface="Arial"/>
+              </a:rPr>
+              <a:t>Sixth Outline Level</a:t>
+            </a:r>
+            <a:endParaRPr b="0" lang="en-US" sz="2000" strike="noStrike" u="none">
+              <a:solidFill>
+                <a:srgbClr val="000000"/>
+              </a:solidFill>
+              <a:effectLst/>
+              <a:uFillTx/>
+              <a:latin typeface="Arial"/>
+            </a:endParaRPr>
+          </a:p>
+          <a:p>
+            <a:pPr lvl="6" marL="3024000" indent="-216000">
+              <a:lnSpc>
+                <a:spcPct val="100000"/>
+              </a:lnSpc>
+              <a:spcBef>
+                <a:spcPts val="283"/>
+              </a:spcBef>
+              <a:buClr>
+                <a:srgbClr val="000000"/>
+              </a:buClr>
+              <a:buSzPct val="45000"/>
+              <a:buFont typeface="Wingdings" charset="2"/>
+              <a:buChar char=""/>
+            </a:pPr>
+            <a:r>
+              <a:rPr b="0" lang="en-US" sz="2000" strike="noStrike" u="none">
+                <a:solidFill>
+                  <a:srgbClr val="000000"/>
+                </a:solidFill>
+                <a:effectLst/>
+                <a:uFillTx/>
+                <a:latin typeface="Arial"/>
+              </a:rPr>
+              <a:t>Seventh Outline Level</a:t>
+            </a:r>
+            <a:endParaRPr b="0" lang="en-US" sz="2000" strike="noStrike" u="none">
+              <a:solidFill>
+                <a:srgbClr val="000000"/>
+              </a:solidFill>
+              <a:effectLst/>
+              <a:uFillTx/>
+              <a:latin typeface="Arial"/>
+            </a:endParaRPr>
+          </a:p>
+        </p:txBody>
+      </p:sp>
+    </p:spTree>
+  </p:cSld>
+</p:sldLayout>
+</file>
+
+<file path=ppt/slideMasters/slideMaster1.xml><?xml version="1.0" encoding="utf-8"?>
+<p:sldMaster xmlns:a="http://schemas.openxmlformats.org/drawingml/2006/main" xmlns:p="http://schemas.openxmlformats.org/presentationml/2006/main" xmlns:r="http://schemas.openxmlformats.org/officeDocument/2006/relationships" xmlns:p14="http://schemas.microsoft.com/office/powerpoint/2010/main" xmlns:p15="http://schemas.microsoft.com/office/powerpoint/2012/main" xmlns:mc="http://schemas.openxmlformats.org/markup-compatibility/2006">
+  <p:cSld>
+    <p:spTree>
+      <p:nvGrpSpPr>
+        <p:cNvPr id="1" name=""/>
+        <p:cNvGrpSpPr/>
+        <p:nvPr/>
+      </p:nvGrpSpPr>
+      <p:grpSpPr>
+        <a:xfrm>
+          <a:off x="0" y="0"/>
+          <a:ext cx="0" cy="0"/>
+          <a:chOff x="0" y="0"/>
+          <a:chExt cx="0" cy="0"/>
+        </a:xfrm>
+      </p:grpSpPr>
     </p:spTree>
   </p:cSld>
   <p:clrMap bg1="lt1" tx1="dk1" bg2="lt2" tx2="dk2" accent1="accent1" accent2="accent2" accent3="accent3" accent4="accent4" accent5="accent5" accent6="accent6" hlink="hlink" folHlink="folHlink"/>
   <p:sldLayoutIdLst>
-    <p:sldLayoutId id="2147483649" r:id="rId3"/>
+    <p:sldLayoutId id="2147483649" r:id="rId2"/>
+    <p:sldLayoutId id="2147483650" r:id="rId3"/>
+    <p:sldLayoutId id="2147483651" r:id="rId4"/>
   </p:sldLayoutIdLst>
 </p:sldMaster>
 </file>
@@ -2607,14 +3659,14 @@
       </p:grpSpPr>
       <p:sp>
         <p:nvSpPr>
-          <p:cNvPr id="11" name="Shape 0"/>
+          <p:cNvPr id="21" name="Shape 0"/>
           <p:cNvSpPr/>
           <p:nvPr/>
         </p:nvSpPr>
         <p:spPr>
           <a:xfrm>
             <a:off x="9392760" y="-1425960"/>
-            <a:ext cx="4754160" cy="4754160"/>
+            <a:ext cx="4753440" cy="4753440"/>
           </a:xfrm>
           <a:prstGeom prst="ellipse">
             <a:avLst/>
@@ -2655,14 +3707,14 @@
       </p:sp>
       <p:sp>
         <p:nvSpPr>
-          <p:cNvPr id="12" name="Shape 1"/>
+          <p:cNvPr id="22" name="Shape 1"/>
           <p:cNvSpPr/>
           <p:nvPr/>
         </p:nvSpPr>
         <p:spPr>
           <a:xfrm>
             <a:off x="-1828800" y="4206240"/>
-            <a:ext cx="4205520" cy="4205520"/>
+            <a:ext cx="4204800" cy="4204800"/>
           </a:xfrm>
           <a:prstGeom prst="ellipse">
             <a:avLst/>
@@ -2703,14 +3755,14 @@
       </p:sp>
       <p:sp>
         <p:nvSpPr>
-          <p:cNvPr id="13" name="Text 3"/>
+          <p:cNvPr id="23" name="Text 3"/>
           <p:cNvSpPr/>
           <p:nvPr/>
         </p:nvSpPr>
         <p:spPr>
           <a:xfrm>
             <a:off x="777240" y="1828800"/>
-            <a:ext cx="10514880" cy="1553760"/>
+            <a:ext cx="10514160" cy="1553040"/>
           </a:xfrm>
           <a:prstGeom prst="rect">
             <a:avLst/>
@@ -2749,9 +3801,9 @@
                 <a:latin typeface="Cambria"/>
                 <a:ea typeface="Cambria"/>
               </a:rPr>
-              <a:t>Where AI can help</a:t>
-            </a:r>
-            <a:endParaRPr b="0" lang="fr-FR" sz="5400" strike="noStrike" u="none">
+              <a:t>Seeking for AI</a:t>
+            </a:r>
+            <a:endParaRPr b="0" lang="en-US" sz="5400" strike="noStrike" u="none">
               <a:solidFill>
                 <a:srgbClr val="ffffff"/>
               </a:solidFill>
@@ -2764,14 +3816,14 @@
       </p:sp>
       <p:sp>
         <p:nvSpPr>
-          <p:cNvPr id="14" name="Text 4"/>
+          <p:cNvPr id="24" name="Text 4"/>
           <p:cNvSpPr/>
           <p:nvPr/>
         </p:nvSpPr>
         <p:spPr>
           <a:xfrm>
             <a:off x="822960" y="3246120"/>
-            <a:ext cx="6349320" cy="547920"/>
+            <a:ext cx="6348600" cy="547200"/>
           </a:xfrm>
           <a:prstGeom prst="rect">
             <a:avLst/>
@@ -2818,7 +3870,7 @@
               </a:rPr>
               <a:t>Realistic Datasets for Photons and Neutrons AI methodologies</a:t>
             </a:r>
-            <a:endParaRPr b="0" lang="fr-FR" sz="1900" strike="noStrike" u="none">
+            <a:endParaRPr b="0" lang="en-US" sz="1900" strike="noStrike" u="none">
               <a:solidFill>
                 <a:srgbClr val="ffffff"/>
               </a:solidFill>
@@ -2831,14 +3883,14 @@
       </p:sp>
       <p:sp>
         <p:nvSpPr>
-          <p:cNvPr id="15" name="Shape 5"/>
+          <p:cNvPr id="25" name="Shape 5"/>
           <p:cNvSpPr/>
           <p:nvPr/>
         </p:nvSpPr>
         <p:spPr>
           <a:xfrm>
             <a:off x="822960" y="4160520"/>
-            <a:ext cx="1416600" cy="310320"/>
+            <a:ext cx="1415880" cy="309600"/>
           </a:xfrm>
           <a:prstGeom prst="roundRect">
             <a:avLst>
@@ -2881,14 +3933,14 @@
       </p:sp>
       <p:sp>
         <p:nvSpPr>
-          <p:cNvPr id="16" name="Text 6"/>
+          <p:cNvPr id="26" name="Text 6"/>
           <p:cNvSpPr/>
           <p:nvPr/>
         </p:nvSpPr>
         <p:spPr>
           <a:xfrm>
             <a:off x="822960" y="4160520"/>
-            <a:ext cx="1416600" cy="310320"/>
+            <a:ext cx="1415880" cy="309600"/>
           </a:xfrm>
           <a:prstGeom prst="rect">
             <a:avLst/>
@@ -2929,7 +3981,7 @@
               </a:rPr>
               <a:t>McStas — neutrons</a:t>
             </a:r>
-            <a:endParaRPr b="0" lang="fr-FR" sz="1100" strike="noStrike" u="none">
+            <a:endParaRPr b="0" lang="en-US" sz="1100" strike="noStrike" u="none">
               <a:solidFill>
                 <a:srgbClr val="ffffff"/>
               </a:solidFill>
@@ -2942,14 +3994,14 @@
       </p:sp>
       <p:sp>
         <p:nvSpPr>
-          <p:cNvPr id="17" name="Shape 7"/>
+          <p:cNvPr id="27" name="Shape 7"/>
           <p:cNvSpPr/>
           <p:nvPr/>
         </p:nvSpPr>
         <p:spPr>
           <a:xfrm>
             <a:off x="2377440" y="4160520"/>
-            <a:ext cx="1416600" cy="310320"/>
+            <a:ext cx="1415880" cy="309600"/>
           </a:xfrm>
           <a:prstGeom prst="roundRect">
             <a:avLst>
@@ -2992,14 +4044,14 @@
       </p:sp>
       <p:sp>
         <p:nvSpPr>
-          <p:cNvPr id="18" name="Text 8"/>
+          <p:cNvPr id="28" name="Text 8"/>
           <p:cNvSpPr/>
           <p:nvPr/>
         </p:nvSpPr>
         <p:spPr>
           <a:xfrm>
             <a:off x="2377440" y="4160520"/>
-            <a:ext cx="1416600" cy="310320"/>
+            <a:ext cx="1415880" cy="309600"/>
           </a:xfrm>
           <a:prstGeom prst="rect">
             <a:avLst/>
@@ -3040,7 +4092,7 @@
               </a:rPr>
               <a:t>McXtrace — X-rays</a:t>
             </a:r>
-            <a:endParaRPr b="0" lang="fr-FR" sz="1100" strike="noStrike" u="none">
+            <a:endParaRPr b="0" lang="en-US" sz="1100" strike="noStrike" u="none">
               <a:solidFill>
                 <a:srgbClr val="ffffff"/>
               </a:solidFill>
@@ -3053,7 +4105,7 @@
       </p:sp>
       <p:sp>
         <p:nvSpPr>
-          <p:cNvPr id="19" name="Shape 9"/>
+          <p:cNvPr id="29" name="Shape 9"/>
           <p:cNvSpPr/>
           <p:nvPr/>
         </p:nvSpPr>
@@ -3096,14 +4148,14 @@
       </p:sp>
       <p:sp>
         <p:nvSpPr>
-          <p:cNvPr id="20" name="Text 10"/>
+          <p:cNvPr id="30" name="Text 10"/>
           <p:cNvSpPr/>
           <p:nvPr/>
         </p:nvSpPr>
         <p:spPr>
           <a:xfrm>
             <a:off x="822960" y="5897880"/>
-            <a:ext cx="5485680" cy="319320"/>
+            <a:ext cx="5484960" cy="318600"/>
           </a:xfrm>
           <a:prstGeom prst="rect">
             <a:avLst/>
@@ -3142,9 +4194,9 @@
                 <a:latin typeface="Calibri"/>
                 <a:ea typeface="Calibri"/>
               </a:rPr>
-              <a:t>Emmanuel FARHI   ·   Synchrotron SOLEIL</a:t>
-            </a:r>
-            <a:endParaRPr b="0" lang="fr-FR" sz="1250" strike="noStrike" u="none">
+              <a:t>Emmanuel FARHI   ·   Synchrotron SOLEIL – Sept 2026</a:t>
+            </a:r>
+            <a:endParaRPr b="0" lang="en-US" sz="1250" strike="noStrike" u="none">
               <a:solidFill>
                 <a:srgbClr val="ffffff"/>
               </a:solidFill>
@@ -3157,14 +4209,14 @@
       </p:sp>
       <p:sp>
         <p:nvSpPr>
-          <p:cNvPr id="21" name="LogoCard"/>
+          <p:cNvPr id="31" name="LogoCard"/>
           <p:cNvSpPr/>
           <p:nvPr/>
         </p:nvSpPr>
         <p:spPr>
           <a:xfrm>
             <a:off x="7429680" y="3759120"/>
-            <a:ext cx="3809160" cy="1497960"/>
+            <a:ext cx="3808440" cy="1497240"/>
           </a:xfrm>
           <a:prstGeom prst="roundRect">
             <a:avLst>
@@ -3215,14 +4267,14 @@
       </p:sp>
       <p:sp>
         <p:nvSpPr>
-          <p:cNvPr id="22" name="SchoolCredit"/>
+          <p:cNvPr id="32" name="SchoolCredit"/>
           <p:cNvSpPr/>
           <p:nvPr/>
         </p:nvSpPr>
         <p:spPr>
           <a:xfrm>
             <a:off x="7429680" y="5384880"/>
-            <a:ext cx="3809160" cy="278640"/>
+            <a:ext cx="3808440" cy="277920"/>
           </a:xfrm>
           <a:prstGeom prst="rect">
             <a:avLst/>
@@ -3259,7 +4311,7 @@
               </a:rPr>
               <a:t>PaNRAID School  ·  supported by PEPR DIADEM</a:t>
             </a:r>
-            <a:endParaRPr b="0" lang="fr-FR" sz="1300" strike="noStrike" u="none">
+            <a:endParaRPr b="0" lang="en-US" sz="1300" strike="noStrike" u="none">
               <a:solidFill>
                 <a:srgbClr val="ffffff"/>
               </a:solidFill>
@@ -3272,7 +4324,7 @@
       </p:sp>
       <p:pic>
         <p:nvPicPr>
-          <p:cNvPr id="23" name="Picture 17" descr=""/>
+          <p:cNvPr id="33" name="Picture 17" descr=""/>
           <p:cNvPicPr/>
           <p:nvPr/>
         </p:nvPicPr>
@@ -3284,7 +4336,7 @@
         <p:spPr>
           <a:xfrm>
             <a:off x="825480" y="457200"/>
-            <a:ext cx="1396440" cy="716400"/>
+            <a:ext cx="1395720" cy="715680"/>
           </a:xfrm>
           <a:prstGeom prst="rect">
             <a:avLst/>
@@ -3297,7 +4349,7 @@
       </p:pic>
       <p:pic>
         <p:nvPicPr>
-          <p:cNvPr id="24" name="Picture 15" descr=""/>
+          <p:cNvPr id="34" name="Picture 15" descr=""/>
           <p:cNvPicPr/>
           <p:nvPr/>
         </p:nvPicPr>
@@ -3308,7 +4360,7 @@
         <p:spPr>
           <a:xfrm>
             <a:off x="7429680" y="478800"/>
-            <a:ext cx="4538880" cy="672840"/>
+            <a:ext cx="4538160" cy="672120"/>
           </a:xfrm>
           <a:prstGeom prst="rect">
             <a:avLst/>
@@ -3321,35 +4373,35 @@
       </p:pic>
       <p:grpSp>
         <p:nvGrpSpPr>
-          <p:cNvPr id="25" name="Group 16"/>
+          <p:cNvPr id="35" name="Group 16"/>
           <p:cNvGrpSpPr/>
           <p:nvPr/>
         </p:nvGrpSpPr>
         <p:grpSpPr>
           <a:xfrm>
             <a:off x="7936200" y="3847680"/>
-            <a:ext cx="2795760" cy="1320840"/>
+            <a:ext cx="2795040" cy="1320120"/>
             <a:chOff x="7936200" y="3847680"/>
-            <a:chExt cx="2795760" cy="1320840"/>
+            <a:chExt cx="2795040" cy="1320120"/>
           </a:xfrm>
         </p:grpSpPr>
         <p:grpSp>
           <p:nvGrpSpPr>
-            <p:cNvPr id="26" name="Group 18"/>
+            <p:cNvPr id="36" name="Group 18"/>
             <p:cNvGrpSpPr/>
             <p:nvPr/>
           </p:nvGrpSpPr>
           <p:grpSpPr>
             <a:xfrm>
               <a:off x="9343440" y="3847680"/>
-              <a:ext cx="1388520" cy="1257840"/>
+              <a:ext cx="1387800" cy="1257120"/>
               <a:chOff x="9343440" y="3847680"/>
-              <a:chExt cx="1388520" cy="1257840"/>
+              <a:chExt cx="1387800" cy="1257120"/>
             </a:xfrm>
           </p:grpSpPr>
           <p:pic>
             <p:nvPicPr>
-              <p:cNvPr id="27" name="Picture 20" descr=""/>
+              <p:cNvPr id="37" name="Picture 20" descr=""/>
               <p:cNvPicPr/>
               <p:nvPr/>
             </p:nvPicPr>
@@ -3361,7 +4413,7 @@
             <p:spPr>
               <a:xfrm>
                 <a:off x="9392760" y="3847680"/>
-                <a:ext cx="1293840" cy="775440"/>
+                <a:ext cx="1293120" cy="774720"/>
               </a:xfrm>
               <a:prstGeom prst="rect">
                 <a:avLst/>
@@ -3374,7 +4426,7 @@
           </p:pic>
           <p:pic>
             <p:nvPicPr>
-              <p:cNvPr id="28" name="Picture 21" descr="Synchrotron SOLEIL"/>
+              <p:cNvPr id="38" name="Picture 21" descr="Synchrotron SOLEIL"/>
               <p:cNvPicPr/>
               <p:nvPr/>
             </p:nvPicPr>
@@ -3385,7 +4437,7 @@
             <p:spPr>
               <a:xfrm>
                 <a:off x="9343440" y="4576320"/>
-                <a:ext cx="962640" cy="464760"/>
+                <a:ext cx="961920" cy="464040"/>
               </a:xfrm>
               <a:prstGeom prst="rect">
                 <a:avLst/>
@@ -3398,7 +4450,7 @@
           </p:pic>
           <p:pic>
             <p:nvPicPr>
-              <p:cNvPr id="29" name="Picture 22" descr="DTU Physics"/>
+              <p:cNvPr id="39" name="Picture 22" descr="DTU Physics"/>
               <p:cNvPicPr/>
               <p:nvPr/>
             </p:nvPicPr>
@@ -3409,7 +4461,7 @@
             <p:spPr>
               <a:xfrm>
                 <a:off x="10378800" y="4584960"/>
-                <a:ext cx="353160" cy="520560"/>
+                <a:ext cx="352440" cy="519840"/>
               </a:xfrm>
               <a:prstGeom prst="rect">
                 <a:avLst/>
@@ -3423,7 +4475,7 @@
         </p:grpSp>
         <p:pic>
           <p:nvPicPr>
-            <p:cNvPr id="30" name="Picture 19" descr=""/>
+            <p:cNvPr id="40" name="Picture 19" descr=""/>
             <p:cNvPicPr/>
             <p:nvPr/>
           </p:nvPicPr>
@@ -3434,7 +4486,7 @@
           <p:spPr>
             <a:xfrm>
               <a:off x="7936200" y="3852360"/>
-              <a:ext cx="1293840" cy="1316160"/>
+              <a:ext cx="1293120" cy="1315440"/>
             </a:xfrm>
             <a:prstGeom prst="rect">
               <a:avLst/>
@@ -3476,6 +4528,572 @@
           <a:chExt cx="0" cy="0"/>
         </a:xfrm>
       </p:grpSpPr>
+      <p:sp>
+        <p:nvSpPr>
+          <p:cNvPr id="73" name="Text 34"/>
+          <p:cNvSpPr/>
+          <p:nvPr/>
+        </p:nvSpPr>
+        <p:spPr>
+          <a:xfrm>
+            <a:off x="548640" y="384120"/>
+            <a:ext cx="9142560" cy="291240"/>
+          </a:xfrm>
+          <a:prstGeom prst="rect">
+            <a:avLst/>
+          </a:prstGeom>
+          <a:noFill/>
+          <a:ln w="0">
+            <a:noFill/>
+          </a:ln>
+        </p:spPr>
+        <p:style>
+          <a:lnRef idx="0"/>
+          <a:fillRef idx="0"/>
+          <a:effectRef idx="0"/>
+          <a:fontRef idx="minor"/>
+        </p:style>
+        <p:txBody>
+          <a:bodyPr lIns="90000" rIns="90000" tIns="45000" bIns="45000" anchor="ctr">
+            <a:noAutofit/>
+          </a:bodyPr>
+          <a:p>
+            <a:pPr defTabSz="914400">
+              <a:lnSpc>
+                <a:spcPct val="100000"/>
+              </a:lnSpc>
+              <a:spcBef>
+                <a:spcPts val="1191"/>
+              </a:spcBef>
+              <a:spcAft>
+                <a:spcPts val="992"/>
+              </a:spcAft>
+              <a:tabLst>
+                <a:tab algn="l" pos="0"/>
+              </a:tabLst>
+            </a:pPr>
+            <a:r>
+              <a:rPr b="1" lang="en-GB" sz="1200" spc="201" strike="noStrike" u="none">
+                <a:solidFill>
+                  <a:srgbClr val="1c7293"/>
+                </a:solidFill>
+                <a:effectLst/>
+                <a:uFillTx/>
+                <a:latin typeface="Calibri"/>
+              </a:rPr>
+              <a:t>General AI Methodology</a:t>
+            </a:r>
+            <a:endParaRPr b="0" lang="en-US" sz="1200" strike="noStrike" u="none">
+              <a:solidFill>
+                <a:srgbClr val="000000"/>
+              </a:solidFill>
+              <a:effectLst/>
+              <a:uFillTx/>
+              <a:latin typeface="Arial"/>
+            </a:endParaRPr>
+          </a:p>
+        </p:txBody>
+      </p:sp>
+      <p:sp>
+        <p:nvSpPr>
+          <p:cNvPr id="74" name="Text 35"/>
+          <p:cNvSpPr/>
+          <p:nvPr/>
+        </p:nvSpPr>
+        <p:spPr>
+          <a:xfrm>
+            <a:off x="548640" y="658440"/>
+            <a:ext cx="11062800" cy="821520"/>
+          </a:xfrm>
+          <a:prstGeom prst="rect">
+            <a:avLst/>
+          </a:prstGeom>
+          <a:noFill/>
+          <a:ln w="0">
+            <a:noFill/>
+          </a:ln>
+        </p:spPr>
+        <p:style>
+          <a:lnRef idx="0"/>
+          <a:fillRef idx="0"/>
+          <a:effectRef idx="0"/>
+          <a:fontRef idx="minor"/>
+        </p:style>
+        <p:txBody>
+          <a:bodyPr lIns="90000" rIns="90000" tIns="45000" bIns="45000" anchor="ctr">
+            <a:noAutofit/>
+          </a:bodyPr>
+          <a:p>
+            <a:pPr defTabSz="914400">
+              <a:lnSpc>
+                <a:spcPct val="100000"/>
+              </a:lnSpc>
+              <a:spcBef>
+                <a:spcPts val="1191"/>
+              </a:spcBef>
+              <a:spcAft>
+                <a:spcPts val="992"/>
+              </a:spcAft>
+              <a:tabLst>
+                <a:tab algn="l" pos="0"/>
+              </a:tabLst>
+            </a:pPr>
+            <a:r>
+              <a:rPr b="1" lang="en-GB" sz="3000" strike="noStrike" u="none">
+                <a:solidFill>
+                  <a:srgbClr val="20242b"/>
+                </a:solidFill>
+                <a:effectLst/>
+                <a:uFillTx/>
+                <a:latin typeface="Cambria"/>
+              </a:rPr>
+              <a:t>General AI Methodology</a:t>
+            </a:r>
+            <a:endParaRPr b="0" lang="en-US" sz="3000" strike="noStrike" u="none">
+              <a:solidFill>
+                <a:srgbClr val="000000"/>
+              </a:solidFill>
+              <a:effectLst/>
+              <a:uFillTx/>
+              <a:latin typeface="Arial"/>
+            </a:endParaRPr>
+          </a:p>
+        </p:txBody>
+      </p:sp>
+      <p:sp>
+        <p:nvSpPr>
+          <p:cNvPr id="75" name="Text 36"/>
+          <p:cNvSpPr/>
+          <p:nvPr/>
+        </p:nvSpPr>
+        <p:spPr>
+          <a:xfrm>
+            <a:off x="11185920" y="6446520"/>
+            <a:ext cx="455760" cy="272880"/>
+          </a:xfrm>
+          <a:prstGeom prst="rect">
+            <a:avLst/>
+          </a:prstGeom>
+          <a:noFill/>
+          <a:ln w="0">
+            <a:noFill/>
+          </a:ln>
+        </p:spPr>
+        <p:style>
+          <a:lnRef idx="0"/>
+          <a:fillRef idx="0"/>
+          <a:effectRef idx="0"/>
+          <a:fontRef idx="minor"/>
+        </p:style>
+        <p:txBody>
+          <a:bodyPr lIns="90000" rIns="90000" tIns="45000" bIns="45000" anchor="ctr">
+            <a:noAutofit/>
+          </a:bodyPr>
+          <a:p>
+            <a:pPr algn="r" defTabSz="914400">
+              <a:lnSpc>
+                <a:spcPct val="100000"/>
+              </a:lnSpc>
+              <a:tabLst>
+                <a:tab algn="l" pos="0"/>
+              </a:tabLst>
+            </a:pPr>
+            <a:r>
+              <a:rPr b="0" lang="en-US" sz="900" strike="noStrike" u="none">
+                <a:solidFill>
+                  <a:srgbClr val="6e7580"/>
+                </a:solidFill>
+                <a:effectLst/>
+                <a:uFillTx/>
+                <a:latin typeface="Calibri"/>
+                <a:ea typeface="Calibri"/>
+              </a:rPr>
+              <a:t>2</a:t>
+            </a:r>
+            <a:endParaRPr b="0" lang="en-US" sz="900" strike="noStrike" u="none">
+              <a:solidFill>
+                <a:srgbClr val="000000"/>
+              </a:solidFill>
+              <a:effectLst/>
+              <a:uFillTx/>
+              <a:latin typeface="Arial"/>
+            </a:endParaRPr>
+          </a:p>
+        </p:txBody>
+      </p:sp>
+      <p:sp>
+        <p:nvSpPr>
+          <p:cNvPr id="76" name=""/>
+          <p:cNvSpPr/>
+          <p:nvPr/>
+        </p:nvSpPr>
+        <p:spPr>
+          <a:xfrm>
+            <a:off x="540000" y="1800000"/>
+            <a:ext cx="10979280" cy="4604760"/>
+          </a:xfrm>
+          <a:prstGeom prst="rect">
+            <a:avLst/>
+          </a:prstGeom>
+          <a:noFill/>
+          <a:ln w="0">
+            <a:noFill/>
+          </a:ln>
+        </p:spPr>
+        <p:style>
+          <a:lnRef idx="0"/>
+          <a:fillRef idx="0"/>
+          <a:effectRef idx="0"/>
+          <a:fontRef idx="minor"/>
+        </p:style>
+        <p:txBody>
+          <a:bodyPr lIns="90000" rIns="90000" tIns="45000" bIns="45000" anchor="t">
+            <a:spAutoFit/>
+          </a:bodyPr>
+          <a:p>
+            <a:pPr marL="343080" indent="-343080" defTabSz="343080">
+              <a:lnSpc>
+                <a:spcPct val="100000"/>
+              </a:lnSpc>
+              <a:spcBef>
+                <a:spcPts val="1191"/>
+              </a:spcBef>
+              <a:spcAft>
+                <a:spcPts val="992"/>
+              </a:spcAft>
+              <a:buClr>
+                <a:srgbClr val="000000"/>
+              </a:buClr>
+              <a:buFont typeface="Arial"/>
+              <a:buChar char="•"/>
+              <a:tabLst>
+                <a:tab algn="l" pos="0"/>
+              </a:tabLst>
+            </a:pPr>
+            <a:r>
+              <a:rPr b="1" lang="fr-FR" sz="2400" strike="noStrike" u="none">
+                <a:solidFill>
+                  <a:srgbClr val="0000ff"/>
+                </a:solidFill>
+                <a:effectLst/>
+                <a:uFillTx/>
+                <a:latin typeface="Calibri"/>
+              </a:rPr>
+              <a:t>AI as a Universal Function Approximator</a:t>
+            </a:r>
+            <a:r>
+              <a:rPr b="0" lang="fr-FR" sz="2400" strike="noStrike" u="none">
+                <a:solidFill>
+                  <a:srgbClr val="0000ff"/>
+                </a:solidFill>
+                <a:effectLst/>
+                <a:uFillTx/>
+                <a:latin typeface="Calibri"/>
+              </a:rPr>
+              <a:t>:</a:t>
+            </a:r>
+            <a:endParaRPr b="0" lang="en-US" sz="2400" strike="noStrike" u="none">
+              <a:solidFill>
+                <a:srgbClr val="000000"/>
+              </a:solidFill>
+              <a:effectLst/>
+              <a:uFillTx/>
+              <a:latin typeface="Arial"/>
+            </a:endParaRPr>
+          </a:p>
+          <a:p>
+            <a:pPr marL="343080" indent="-343080" defTabSz="343080">
+              <a:lnSpc>
+                <a:spcPct val="100000"/>
+              </a:lnSpc>
+              <a:buClr>
+                <a:srgbClr val="000000"/>
+              </a:buClr>
+              <a:buFont typeface="Arial"/>
+              <a:buChar char="•"/>
+              <a:tabLst>
+                <a:tab algn="l" pos="0"/>
+              </a:tabLst>
+            </a:pPr>
+            <a:r>
+              <a:rPr b="1" lang="fr-FR" sz="2400" strike="noStrike" u="none">
+                <a:solidFill>
+                  <a:srgbClr val="000000"/>
+                </a:solidFill>
+                <a:effectLst/>
+                <a:uFillTx/>
+                <a:latin typeface="Calibri"/>
+              </a:rPr>
+              <a:t>Black Box Concept:</a:t>
+            </a:r>
+            <a:br>
+              <a:rPr sz="2400"/>
+            </a:br>
+            <a:r>
+              <a:rPr b="1" lang="fr-FR" sz="2400" strike="noStrike" u="none">
+                <a:solidFill>
+                  <a:srgbClr val="000000"/>
+                </a:solidFill>
+                <a:effectLst/>
+                <a:uFillTx/>
+                <a:latin typeface="Calibri"/>
+              </a:rPr>
+              <a:t> </a:t>
+            </a:r>
+            <a:endParaRPr b="0" lang="en-US" sz="2400" strike="noStrike" u="none">
+              <a:solidFill>
+                <a:srgbClr val="000000"/>
+              </a:solidFill>
+              <a:effectLst/>
+              <a:uFillTx/>
+              <a:latin typeface="Arial"/>
+              <a:ea typeface="Unifont"/>
+            </a:endParaRPr>
+          </a:p>
+          <a:p>
+            <a:pPr marL="720000" defTabSz="343080">
+              <a:lnSpc>
+                <a:spcPct val="100000"/>
+              </a:lnSpc>
+              <a:tabLst>
+                <a:tab algn="l" pos="0"/>
+              </a:tabLst>
+            </a:pPr>
+            <a:r>
+              <a:rPr b="1" lang="fr-FR" sz="2400" strike="noStrike" u="none">
+                <a:solidFill>
+                  <a:srgbClr val="ff00ff"/>
+                </a:solidFill>
+                <a:effectLst/>
+                <a:uFillTx/>
+                <a:latin typeface="FreeMono"/>
+              </a:rPr>
+              <a:t>Input → [AI Model] → Output</a:t>
+            </a:r>
+            <a:br>
+              <a:rPr sz="2400"/>
+            </a:br>
+            <a:endParaRPr b="0" lang="en-US" sz="2400" strike="noStrike" u="none">
+              <a:solidFill>
+                <a:srgbClr val="000000"/>
+              </a:solidFill>
+              <a:effectLst/>
+              <a:uFillTx/>
+              <a:latin typeface="Arial"/>
+              <a:ea typeface="Unifont"/>
+            </a:endParaRPr>
+          </a:p>
+          <a:p>
+            <a:pPr marL="343080" indent="-343080" defTabSz="343080">
+              <a:lnSpc>
+                <a:spcPct val="100000"/>
+              </a:lnSpc>
+              <a:buClr>
+                <a:srgbClr val="000000"/>
+              </a:buClr>
+              <a:buFont typeface="Arial"/>
+              <a:buChar char="•"/>
+              <a:tabLst>
+                <a:tab algn="l" pos="0"/>
+              </a:tabLst>
+            </a:pPr>
+            <a:r>
+              <a:rPr b="1" lang="fr-FR" sz="2400" strike="noStrike" u="none">
+                <a:solidFill>
+                  <a:srgbClr val="000000"/>
+                </a:solidFill>
+                <a:effectLst/>
+                <a:uFillTx/>
+                <a:latin typeface="Calibri"/>
+              </a:rPr>
+              <a:t>Universal Approximation Theorem</a:t>
+            </a:r>
+            <a:r>
+              <a:rPr b="0" lang="fr-FR" sz="2400" strike="noStrike" u="none">
+                <a:solidFill>
+                  <a:srgbClr val="000000"/>
+                </a:solidFill>
+                <a:effectLst/>
+                <a:uFillTx/>
+                <a:latin typeface="Calibri"/>
+              </a:rPr>
+              <a:t>: A neural network can </a:t>
+            </a:r>
+            <a:r>
+              <a:rPr b="0" lang="fr-FR" sz="2400" strike="noStrike" u="none">
+                <a:solidFill>
+                  <a:srgbClr val="008000"/>
+                </a:solidFill>
+                <a:effectLst/>
+                <a:uFillTx/>
+                <a:latin typeface="Calibri"/>
+              </a:rPr>
+              <a:t>approximate</a:t>
+            </a:r>
+            <a:r>
+              <a:rPr b="0" lang="fr-FR" sz="2400" strike="noStrike" u="none">
+                <a:solidFill>
+                  <a:srgbClr val="000000"/>
+                </a:solidFill>
+                <a:effectLst/>
+                <a:uFillTx/>
+                <a:latin typeface="Calibri"/>
+              </a:rPr>
+              <a:t> </a:t>
+            </a:r>
+            <a:r>
+              <a:rPr b="0" lang="fr-FR" sz="2400" strike="noStrike" u="none">
+                <a:solidFill>
+                  <a:srgbClr val="008000"/>
+                </a:solidFill>
+                <a:effectLst/>
+                <a:uFillTx/>
+                <a:latin typeface="Calibri"/>
+              </a:rPr>
+              <a:t>any continuous function</a:t>
+            </a:r>
+            <a:r>
+              <a:rPr b="0" lang="fr-FR" sz="2400" strike="noStrike" u="none">
+                <a:solidFill>
+                  <a:srgbClr val="000000"/>
+                </a:solidFill>
+                <a:effectLst/>
+                <a:uFillTx/>
+                <a:latin typeface="Calibri"/>
+              </a:rPr>
+              <a:t> given sufficient data and complexity.</a:t>
+            </a:r>
+            <a:br>
+              <a:rPr sz="2400"/>
+            </a:br>
+            <a:r>
+              <a:rPr b="0" lang="fr-FR" sz="2400" strike="noStrike" u="none">
+                <a:solidFill>
+                  <a:srgbClr val="000000"/>
+                </a:solidFill>
+                <a:effectLst/>
+                <a:uFillTx/>
+                <a:latin typeface="Calibri"/>
+              </a:rPr>
+              <a:t> </a:t>
+            </a:r>
+            <a:endParaRPr b="0" lang="en-US" sz="2400" strike="noStrike" u="none">
+              <a:solidFill>
+                <a:srgbClr val="000000"/>
+              </a:solidFill>
+              <a:effectLst/>
+              <a:uFillTx/>
+              <a:latin typeface="Arial"/>
+              <a:ea typeface="Unifont"/>
+            </a:endParaRPr>
+          </a:p>
+          <a:p>
+            <a:pPr marL="343080" indent="-343080" defTabSz="343080">
+              <a:lnSpc>
+                <a:spcPct val="100000"/>
+              </a:lnSpc>
+              <a:buClr>
+                <a:srgbClr val="000000"/>
+              </a:buClr>
+              <a:buFont typeface="Arial"/>
+              <a:buChar char="•"/>
+              <a:tabLst>
+                <a:tab algn="l" pos="0"/>
+              </a:tabLst>
+            </a:pPr>
+            <a:r>
+              <a:rPr b="1" lang="fr-FR" sz="2400" strike="noStrike" u="none">
+                <a:solidFill>
+                  <a:srgbClr val="000000"/>
+                </a:solidFill>
+                <a:effectLst/>
+                <a:uFillTx/>
+                <a:latin typeface="Calibri"/>
+              </a:rPr>
+              <a:t>General Behavior:</a:t>
+            </a:r>
+            <a:endParaRPr b="0" lang="en-US" sz="2400" strike="noStrike" u="none">
+              <a:solidFill>
+                <a:srgbClr val="000000"/>
+              </a:solidFill>
+              <a:effectLst/>
+              <a:uFillTx/>
+              <a:latin typeface="Arial"/>
+              <a:ea typeface="Unifont"/>
+            </a:endParaRPr>
+          </a:p>
+          <a:p>
+            <a:pPr marL="360000" defTabSz="343080">
+              <a:lnSpc>
+                <a:spcPct val="100000"/>
+              </a:lnSpc>
+              <a:buClr>
+                <a:srgbClr val="000000"/>
+              </a:buClr>
+              <a:buFont typeface="OpenSymbol"/>
+              <a:buChar char="►"/>
+              <a:tabLst>
+                <a:tab algn="l" pos="0"/>
+              </a:tabLst>
+            </a:pPr>
+            <a:r>
+              <a:rPr b="0" lang="fr-FR" sz="2400" strike="noStrike" u="none">
+                <a:solidFill>
+                  <a:srgbClr val="000000"/>
+                </a:solidFill>
+                <a:effectLst/>
+                <a:uFillTx/>
+                <a:latin typeface="Calibri"/>
+              </a:rPr>
+              <a:t>All AI methods (CNNs, RNNs, SVMs) follow the same principle: map inputs to outputs via learned weights.</a:t>
+            </a:r>
+            <a:endParaRPr b="0" lang="en-US" sz="2400" strike="noStrike" u="none">
+              <a:solidFill>
+                <a:srgbClr val="000000"/>
+              </a:solidFill>
+              <a:effectLst/>
+              <a:uFillTx/>
+              <a:latin typeface="Arial"/>
+              <a:ea typeface="Unifont"/>
+            </a:endParaRPr>
+          </a:p>
+          <a:p>
+            <a:pPr marL="360000" defTabSz="343080">
+              <a:lnSpc>
+                <a:spcPct val="100000"/>
+              </a:lnSpc>
+              <a:buClr>
+                <a:srgbClr val="000000"/>
+              </a:buClr>
+              <a:buFont typeface="OpenSymbol"/>
+              <a:buChar char="►"/>
+              <a:tabLst>
+                <a:tab algn="l" pos="0"/>
+              </a:tabLst>
+            </a:pPr>
+            <a:r>
+              <a:rPr b="0" lang="fr-FR" sz="2400" strike="noStrike" u="none">
+                <a:solidFill>
+                  <a:srgbClr val="000000"/>
+                </a:solidFill>
+                <a:effectLst/>
+                <a:uFillTx/>
+                <a:latin typeface="Calibri"/>
+              </a:rPr>
+              <a:t>Differences lie in architecture, training efficiency, and interpretability.</a:t>
+            </a:r>
+            <a:endParaRPr b="0" lang="en-US" sz="2400" strike="noStrike" u="none">
+              <a:solidFill>
+                <a:srgbClr val="000000"/>
+              </a:solidFill>
+              <a:effectLst/>
+              <a:uFillTx/>
+              <a:latin typeface="Arial"/>
+              <a:ea typeface="Unifont"/>
+            </a:endParaRPr>
+          </a:p>
+        </p:txBody>
+      </p:sp>
     </p:spTree>
   </p:cSld>
   <mc:AlternateContent>
@@ -3490,6 +5108,2818 @@
 </file>
 
 <file path=ppt/slides/slide11.xml><?xml version="1.0" encoding="utf-8"?>
+<p:sld xmlns:a="http://schemas.openxmlformats.org/drawingml/2006/main" xmlns:p="http://schemas.openxmlformats.org/presentationml/2006/main" xmlns:r="http://schemas.openxmlformats.org/officeDocument/2006/relationships" xmlns:p14="http://schemas.microsoft.com/office/powerpoint/2010/main" xmlns:p15="http://schemas.microsoft.com/office/powerpoint/2012/main" xmlns:mc="http://schemas.openxmlformats.org/markup-compatibility/2006">
+  <p:cSld>
+    <p:spTree>
+      <p:nvGrpSpPr>
+        <p:cNvPr id="1" name=""/>
+        <p:cNvGrpSpPr/>
+        <p:nvPr/>
+      </p:nvGrpSpPr>
+      <p:grpSpPr>
+        <a:xfrm>
+          <a:off x="0" y="0"/>
+          <a:ext cx="0" cy="0"/>
+          <a:chOff x="0" y="0"/>
+          <a:chExt cx="0" cy="0"/>
+        </a:xfrm>
+      </p:grpSpPr>
+      <p:sp>
+        <p:nvSpPr>
+          <p:cNvPr id="77" name="Text 37"/>
+          <p:cNvSpPr/>
+          <p:nvPr/>
+        </p:nvSpPr>
+        <p:spPr>
+          <a:xfrm>
+            <a:off x="548640" y="384120"/>
+            <a:ext cx="9142560" cy="291240"/>
+          </a:xfrm>
+          <a:prstGeom prst="rect">
+            <a:avLst/>
+          </a:prstGeom>
+          <a:noFill/>
+          <a:ln w="0">
+            <a:noFill/>
+          </a:ln>
+        </p:spPr>
+        <p:style>
+          <a:lnRef idx="0"/>
+          <a:fillRef idx="0"/>
+          <a:effectRef idx="0"/>
+          <a:fontRef idx="minor"/>
+        </p:style>
+        <p:txBody>
+          <a:bodyPr lIns="90000" rIns="90000" tIns="45000" bIns="45000" anchor="ctr">
+            <a:noAutofit/>
+          </a:bodyPr>
+          <a:p>
+            <a:pPr defTabSz="914400">
+              <a:lnSpc>
+                <a:spcPct val="100000"/>
+              </a:lnSpc>
+              <a:spcBef>
+                <a:spcPts val="1191"/>
+              </a:spcBef>
+              <a:spcAft>
+                <a:spcPts val="992"/>
+              </a:spcAft>
+              <a:tabLst>
+                <a:tab algn="l" pos="0"/>
+              </a:tabLst>
+            </a:pPr>
+            <a:r>
+              <a:rPr b="1" lang="en-GB" sz="1200" spc="201" strike="noStrike" u="none">
+                <a:solidFill>
+                  <a:srgbClr val="1c7293"/>
+                </a:solidFill>
+                <a:effectLst/>
+                <a:uFillTx/>
+                <a:latin typeface="Calibri"/>
+              </a:rPr>
+              <a:t>General AI Methodology</a:t>
+            </a:r>
+            <a:endParaRPr b="0" lang="en-US" sz="1200" strike="noStrike" u="none">
+              <a:solidFill>
+                <a:srgbClr val="000000"/>
+              </a:solidFill>
+              <a:effectLst/>
+              <a:uFillTx/>
+              <a:latin typeface="Arial"/>
+            </a:endParaRPr>
+          </a:p>
+        </p:txBody>
+      </p:sp>
+      <p:sp>
+        <p:nvSpPr>
+          <p:cNvPr id="78" name="Text 38"/>
+          <p:cNvSpPr/>
+          <p:nvPr/>
+        </p:nvSpPr>
+        <p:spPr>
+          <a:xfrm>
+            <a:off x="548640" y="658440"/>
+            <a:ext cx="11062800" cy="821520"/>
+          </a:xfrm>
+          <a:prstGeom prst="rect">
+            <a:avLst/>
+          </a:prstGeom>
+          <a:noFill/>
+          <a:ln w="0">
+            <a:noFill/>
+          </a:ln>
+        </p:spPr>
+        <p:style>
+          <a:lnRef idx="0"/>
+          <a:fillRef idx="0"/>
+          <a:effectRef idx="0"/>
+          <a:fontRef idx="minor"/>
+        </p:style>
+        <p:txBody>
+          <a:bodyPr lIns="90000" rIns="90000" tIns="45000" bIns="45000" anchor="ctr">
+            <a:noAutofit/>
+          </a:bodyPr>
+          <a:p>
+            <a:pPr defTabSz="914400">
+              <a:lnSpc>
+                <a:spcPct val="100000"/>
+              </a:lnSpc>
+              <a:spcBef>
+                <a:spcPts val="1191"/>
+              </a:spcBef>
+              <a:spcAft>
+                <a:spcPts val="992"/>
+              </a:spcAft>
+              <a:tabLst>
+                <a:tab algn="l" pos="0"/>
+              </a:tabLst>
+            </a:pPr>
+            <a:r>
+              <a:rPr b="1" lang="en-GB" sz="3000" strike="noStrike" u="none">
+                <a:solidFill>
+                  <a:srgbClr val="20242b"/>
+                </a:solidFill>
+                <a:effectLst/>
+                <a:uFillTx/>
+                <a:latin typeface="Cambria"/>
+              </a:rPr>
+              <a:t>General AI Methodology</a:t>
+            </a:r>
+            <a:endParaRPr b="0" lang="en-US" sz="3000" strike="noStrike" u="none">
+              <a:solidFill>
+                <a:srgbClr val="000000"/>
+              </a:solidFill>
+              <a:effectLst/>
+              <a:uFillTx/>
+              <a:latin typeface="Arial"/>
+            </a:endParaRPr>
+          </a:p>
+        </p:txBody>
+      </p:sp>
+      <p:sp>
+        <p:nvSpPr>
+          <p:cNvPr id="79" name="Text 39"/>
+          <p:cNvSpPr/>
+          <p:nvPr/>
+        </p:nvSpPr>
+        <p:spPr>
+          <a:xfrm>
+            <a:off x="11185920" y="6446520"/>
+            <a:ext cx="455760" cy="272880"/>
+          </a:xfrm>
+          <a:prstGeom prst="rect">
+            <a:avLst/>
+          </a:prstGeom>
+          <a:noFill/>
+          <a:ln w="0">
+            <a:noFill/>
+          </a:ln>
+        </p:spPr>
+        <p:style>
+          <a:lnRef idx="0"/>
+          <a:fillRef idx="0"/>
+          <a:effectRef idx="0"/>
+          <a:fontRef idx="minor"/>
+        </p:style>
+        <p:txBody>
+          <a:bodyPr lIns="90000" rIns="90000" tIns="45000" bIns="45000" anchor="ctr">
+            <a:noAutofit/>
+          </a:bodyPr>
+          <a:p>
+            <a:pPr algn="r" defTabSz="914400">
+              <a:lnSpc>
+                <a:spcPct val="100000"/>
+              </a:lnSpc>
+              <a:tabLst>
+                <a:tab algn="l" pos="0"/>
+              </a:tabLst>
+            </a:pPr>
+            <a:r>
+              <a:rPr b="0" lang="en-US" sz="900" strike="noStrike" u="none">
+                <a:solidFill>
+                  <a:srgbClr val="6e7580"/>
+                </a:solidFill>
+                <a:effectLst/>
+                <a:uFillTx/>
+                <a:latin typeface="Calibri"/>
+                <a:ea typeface="Calibri"/>
+              </a:rPr>
+              <a:t>2</a:t>
+            </a:r>
+            <a:endParaRPr b="0" lang="en-US" sz="900" strike="noStrike" u="none">
+              <a:solidFill>
+                <a:srgbClr val="000000"/>
+              </a:solidFill>
+              <a:effectLst/>
+              <a:uFillTx/>
+              <a:latin typeface="Arial"/>
+            </a:endParaRPr>
+          </a:p>
+        </p:txBody>
+      </p:sp>
+      <p:sp>
+        <p:nvSpPr>
+          <p:cNvPr id="80" name=""/>
+          <p:cNvSpPr/>
+          <p:nvPr/>
+        </p:nvSpPr>
+        <p:spPr>
+          <a:xfrm>
+            <a:off x="540000" y="1800000"/>
+            <a:ext cx="10979280" cy="4604760"/>
+          </a:xfrm>
+          <a:prstGeom prst="rect">
+            <a:avLst/>
+          </a:prstGeom>
+          <a:noFill/>
+          <a:ln w="0">
+            <a:noFill/>
+          </a:ln>
+        </p:spPr>
+        <p:style>
+          <a:lnRef idx="0"/>
+          <a:fillRef idx="0"/>
+          <a:effectRef idx="0"/>
+          <a:fontRef idx="minor"/>
+        </p:style>
+        <p:txBody>
+          <a:bodyPr lIns="90000" rIns="90000" tIns="45000" bIns="45000" anchor="t">
+            <a:spAutoFit/>
+          </a:bodyPr>
+          <a:p>
+            <a:pPr marL="343080" indent="-343080" defTabSz="343080">
+              <a:lnSpc>
+                <a:spcPct val="100000"/>
+              </a:lnSpc>
+              <a:spcBef>
+                <a:spcPts val="1191"/>
+              </a:spcBef>
+              <a:spcAft>
+                <a:spcPts val="992"/>
+              </a:spcAft>
+              <a:buClr>
+                <a:srgbClr val="000000"/>
+              </a:buClr>
+              <a:buFont typeface="Arial"/>
+              <a:buChar char="•"/>
+              <a:tabLst>
+                <a:tab algn="l" pos="0"/>
+              </a:tabLst>
+            </a:pPr>
+            <a:r>
+              <a:rPr b="1" lang="fr-FR" sz="2400" strike="noStrike" u="none">
+                <a:solidFill>
+                  <a:srgbClr val="0000ff"/>
+                </a:solidFill>
+                <a:effectLst/>
+                <a:uFillTx/>
+                <a:latin typeface="Calibri"/>
+              </a:rPr>
+              <a:t>Training: The Core Process</a:t>
+            </a:r>
+            <a:br>
+              <a:rPr sz="2400"/>
+            </a:br>
+            <a:endParaRPr b="0" lang="en-US" sz="2400" strike="noStrike" u="none">
+              <a:solidFill>
+                <a:srgbClr val="000000"/>
+              </a:solidFill>
+              <a:effectLst/>
+              <a:uFillTx/>
+              <a:latin typeface="Arial"/>
+            </a:endParaRPr>
+          </a:p>
+          <a:p>
+            <a:pPr marL="343080" indent="-343080" defTabSz="343080">
+              <a:lnSpc>
+                <a:spcPct val="100000"/>
+              </a:lnSpc>
+              <a:buClr>
+                <a:srgbClr val="000000"/>
+              </a:buClr>
+              <a:buFont typeface="Arial"/>
+              <a:buChar char="•"/>
+              <a:tabLst>
+                <a:tab algn="l" pos="0"/>
+              </a:tabLst>
+            </a:pPr>
+            <a:r>
+              <a:rPr b="1" lang="fr-FR" sz="2400" strike="noStrike" u="none">
+                <a:solidFill>
+                  <a:srgbClr val="000000"/>
+                </a:solidFill>
+                <a:effectLst/>
+                <a:uFillTx/>
+                <a:latin typeface="Arial"/>
+                <a:ea typeface="Unifont"/>
+              </a:rPr>
+              <a:t>Objective</a:t>
+            </a:r>
+            <a:r>
+              <a:rPr b="0" lang="fr-FR" sz="2400" strike="noStrike" u="none">
+                <a:solidFill>
+                  <a:srgbClr val="000000"/>
+                </a:solidFill>
+                <a:effectLst/>
+                <a:uFillTx/>
+                <a:latin typeface="Arial"/>
+                <a:ea typeface="Unifont"/>
+              </a:rPr>
+              <a:t>: Minimize the loss function (e.g., Mean Squared Error, Cross-Entropy).</a:t>
+            </a:r>
+            <a:endParaRPr b="0" lang="en-US" sz="2400" strike="noStrike" u="none">
+              <a:solidFill>
+                <a:srgbClr val="000000"/>
+              </a:solidFill>
+              <a:effectLst/>
+              <a:uFillTx/>
+              <a:latin typeface="Arial"/>
+              <a:ea typeface="Unifont"/>
+            </a:endParaRPr>
+          </a:p>
+          <a:p>
+            <a:pPr marL="360000" defTabSz="343080">
+              <a:lnSpc>
+                <a:spcPct val="100000"/>
+              </a:lnSpc>
+              <a:buClr>
+                <a:srgbClr val="000000"/>
+              </a:buClr>
+              <a:buFont typeface="Arial"/>
+              <a:buChar char="•"/>
+              <a:tabLst>
+                <a:tab algn="l" pos="0"/>
+              </a:tabLst>
+            </a:pPr>
+            <a:r>
+              <a:rPr b="0" lang="fr-FR" sz="2400" strike="noStrike" u="none">
+                <a:solidFill>
+                  <a:srgbClr val="000000"/>
+                </a:solidFill>
+                <a:effectLst/>
+                <a:uFillTx/>
+                <a:latin typeface="Arial"/>
+                <a:ea typeface="Unifont"/>
+              </a:rPr>
+              <a:t>Loss Function: Measures the difference between predicted and actual outputs.</a:t>
+            </a:r>
+            <a:endParaRPr b="0" lang="en-US" sz="2400" strike="noStrike" u="none">
+              <a:solidFill>
+                <a:srgbClr val="000000"/>
+              </a:solidFill>
+              <a:effectLst/>
+              <a:uFillTx/>
+              <a:latin typeface="Arial"/>
+              <a:ea typeface="Unifont"/>
+            </a:endParaRPr>
+          </a:p>
+          <a:p>
+            <a:pPr marL="343080" indent="-343080" defTabSz="343080">
+              <a:lnSpc>
+                <a:spcPct val="100000"/>
+              </a:lnSpc>
+              <a:buClr>
+                <a:srgbClr val="000000"/>
+              </a:buClr>
+              <a:buFont typeface="Arial"/>
+              <a:buChar char="•"/>
+              <a:tabLst>
+                <a:tab algn="l" pos="0"/>
+              </a:tabLst>
+            </a:pPr>
+            <a:r>
+              <a:rPr b="1" lang="fr-FR" sz="2400" strike="noStrike" u="none">
+                <a:solidFill>
+                  <a:srgbClr val="000000"/>
+                </a:solidFill>
+                <a:effectLst/>
+                <a:uFillTx/>
+                <a:latin typeface="Arial"/>
+                <a:ea typeface="Unifont"/>
+              </a:rPr>
+              <a:t>Steps</a:t>
+            </a:r>
+            <a:r>
+              <a:rPr b="0" lang="fr-FR" sz="2400" strike="noStrike" u="none">
+                <a:solidFill>
+                  <a:srgbClr val="000000"/>
+                </a:solidFill>
+                <a:effectLst/>
+                <a:uFillTx/>
+                <a:latin typeface="Arial"/>
+                <a:ea typeface="Unifont"/>
+              </a:rPr>
+              <a:t>:</a:t>
+            </a:r>
+            <a:endParaRPr b="0" lang="en-US" sz="2400" strike="noStrike" u="none">
+              <a:solidFill>
+                <a:srgbClr val="000000"/>
+              </a:solidFill>
+              <a:effectLst/>
+              <a:uFillTx/>
+              <a:latin typeface="Arial"/>
+              <a:ea typeface="Unifont"/>
+            </a:endParaRPr>
+          </a:p>
+          <a:p>
+            <a:pPr marL="360000" defTabSz="343080">
+              <a:lnSpc>
+                <a:spcPct val="100000"/>
+              </a:lnSpc>
+              <a:buClr>
+                <a:srgbClr val="000000"/>
+              </a:buClr>
+              <a:buFont typeface="Arial"/>
+              <a:buChar char="•"/>
+              <a:tabLst>
+                <a:tab algn="l" pos="0"/>
+              </a:tabLst>
+            </a:pPr>
+            <a:r>
+              <a:rPr b="0" lang="fr-FR" sz="2400" strike="noStrike" u="none">
+                <a:solidFill>
+                  <a:srgbClr val="000000"/>
+                </a:solidFill>
+                <a:effectLst/>
+                <a:uFillTx/>
+                <a:latin typeface="Arial"/>
+                <a:ea typeface="Unifont"/>
+              </a:rPr>
+              <a:t>Forward Pass: Compute predictions for a batch of training data.</a:t>
+            </a:r>
+            <a:endParaRPr b="0" lang="en-US" sz="2400" strike="noStrike" u="none">
+              <a:solidFill>
+                <a:srgbClr val="000000"/>
+              </a:solidFill>
+              <a:effectLst/>
+              <a:uFillTx/>
+              <a:latin typeface="Arial"/>
+              <a:ea typeface="Unifont"/>
+            </a:endParaRPr>
+          </a:p>
+          <a:p>
+            <a:pPr marL="360000" defTabSz="343080">
+              <a:lnSpc>
+                <a:spcPct val="100000"/>
+              </a:lnSpc>
+              <a:buClr>
+                <a:srgbClr val="000000"/>
+              </a:buClr>
+              <a:buFont typeface="Arial"/>
+              <a:buChar char="•"/>
+              <a:tabLst>
+                <a:tab algn="l" pos="0"/>
+              </a:tabLst>
+            </a:pPr>
+            <a:r>
+              <a:rPr b="0" lang="fr-FR" sz="2400" strike="noStrike" u="none">
+                <a:solidFill>
+                  <a:srgbClr val="000000"/>
+                </a:solidFill>
+                <a:effectLst/>
+                <a:uFillTx/>
+                <a:latin typeface="Arial"/>
+                <a:ea typeface="Unifont"/>
+              </a:rPr>
+              <a:t>Loss Calculation: Evaluate how far predictions are from true values.</a:t>
+            </a:r>
+            <a:endParaRPr b="0" lang="en-US" sz="2400" strike="noStrike" u="none">
+              <a:solidFill>
+                <a:srgbClr val="000000"/>
+              </a:solidFill>
+              <a:effectLst/>
+              <a:uFillTx/>
+              <a:latin typeface="Arial"/>
+              <a:ea typeface="Unifont"/>
+            </a:endParaRPr>
+          </a:p>
+          <a:p>
+            <a:pPr marL="360000" defTabSz="343080">
+              <a:lnSpc>
+                <a:spcPct val="100000"/>
+              </a:lnSpc>
+              <a:buClr>
+                <a:srgbClr val="000000"/>
+              </a:buClr>
+              <a:buFont typeface="Arial"/>
+              <a:buChar char="•"/>
+              <a:tabLst>
+                <a:tab algn="l" pos="0"/>
+              </a:tabLst>
+            </a:pPr>
+            <a:r>
+              <a:rPr b="0" lang="fr-FR" sz="2400" strike="noStrike" u="none">
+                <a:solidFill>
+                  <a:srgbClr val="000000"/>
+                </a:solidFill>
+                <a:effectLst/>
+                <a:uFillTx/>
+                <a:latin typeface="Arial"/>
+                <a:ea typeface="Unifont"/>
+              </a:rPr>
+              <a:t>Backpropagation: Compute gradients of the loss with respect to weights.</a:t>
+            </a:r>
+            <a:endParaRPr b="0" lang="en-US" sz="2400" strike="noStrike" u="none">
+              <a:solidFill>
+                <a:srgbClr val="000000"/>
+              </a:solidFill>
+              <a:effectLst/>
+              <a:uFillTx/>
+              <a:latin typeface="Arial"/>
+              <a:ea typeface="Unifont"/>
+            </a:endParaRPr>
+          </a:p>
+          <a:p>
+            <a:pPr marL="360000" defTabSz="343080">
+              <a:lnSpc>
+                <a:spcPct val="100000"/>
+              </a:lnSpc>
+              <a:buClr>
+                <a:srgbClr val="000000"/>
+              </a:buClr>
+              <a:buFont typeface="Arial"/>
+              <a:buChar char="•"/>
+              <a:tabLst>
+                <a:tab algn="l" pos="0"/>
+              </a:tabLst>
+            </a:pPr>
+            <a:r>
+              <a:rPr b="0" lang="fr-FR" sz="2400" strike="noStrike" u="none">
+                <a:solidFill>
+                  <a:srgbClr val="000000"/>
+                </a:solidFill>
+                <a:effectLst/>
+                <a:uFillTx/>
+                <a:latin typeface="Arial"/>
+                <a:ea typeface="Unifont"/>
+              </a:rPr>
+              <a:t>Optimization: Update weights using an optimizer (e.g., Adam, SGD).</a:t>
+            </a:r>
+            <a:endParaRPr b="0" lang="en-US" sz="2400" strike="noStrike" u="none">
+              <a:solidFill>
+                <a:srgbClr val="000000"/>
+              </a:solidFill>
+              <a:effectLst/>
+              <a:uFillTx/>
+              <a:latin typeface="Arial"/>
+              <a:ea typeface="Unifont"/>
+            </a:endParaRPr>
+          </a:p>
+          <a:p>
+            <a:pPr marL="343080" indent="-343080" defTabSz="343080">
+              <a:lnSpc>
+                <a:spcPct val="100000"/>
+              </a:lnSpc>
+              <a:buClr>
+                <a:srgbClr val="000000"/>
+              </a:buClr>
+              <a:buFont typeface="Arial"/>
+              <a:buChar char="•"/>
+              <a:tabLst>
+                <a:tab algn="l" pos="0"/>
+              </a:tabLst>
+            </a:pPr>
+            <a:endParaRPr b="0" lang="en-US" sz="2400" strike="noStrike" u="none">
+              <a:solidFill>
+                <a:srgbClr val="000000"/>
+              </a:solidFill>
+              <a:effectLst/>
+              <a:uFillTx/>
+              <a:latin typeface="Arial"/>
+              <a:ea typeface="Unifont"/>
+            </a:endParaRPr>
+          </a:p>
+        </p:txBody>
+      </p:sp>
+    </p:spTree>
+  </p:cSld>
+  <mc:AlternateContent>
+    <mc:Choice Requires="p14">
+      <p:transition spd="slow" p14:dur="2000"/>
+    </mc:Choice>
+    <mc:Fallback>
+      <p:transition spd="slow"/>
+    </mc:Fallback>
+  </mc:AlternateContent>
+</p:sld>
+</file>
+
+<file path=ppt/slides/slide12.xml><?xml version="1.0" encoding="utf-8"?>
+<p:sld xmlns:a="http://schemas.openxmlformats.org/drawingml/2006/main" xmlns:p="http://schemas.openxmlformats.org/presentationml/2006/main" xmlns:r="http://schemas.openxmlformats.org/officeDocument/2006/relationships" xmlns:p14="http://schemas.microsoft.com/office/powerpoint/2010/main" xmlns:p15="http://schemas.microsoft.com/office/powerpoint/2012/main" xmlns:mc="http://schemas.openxmlformats.org/markup-compatibility/2006">
+  <p:cSld>
+    <p:spTree>
+      <p:nvGrpSpPr>
+        <p:cNvPr id="1" name=""/>
+        <p:cNvGrpSpPr/>
+        <p:nvPr/>
+      </p:nvGrpSpPr>
+      <p:grpSpPr>
+        <a:xfrm>
+          <a:off x="0" y="0"/>
+          <a:ext cx="0" cy="0"/>
+          <a:chOff x="0" y="0"/>
+          <a:chExt cx="0" cy="0"/>
+        </a:xfrm>
+      </p:grpSpPr>
+      <p:sp>
+        <p:nvSpPr>
+          <p:cNvPr id="81" name="Text 40"/>
+          <p:cNvSpPr/>
+          <p:nvPr/>
+        </p:nvSpPr>
+        <p:spPr>
+          <a:xfrm>
+            <a:off x="548640" y="383760"/>
+            <a:ext cx="9142560" cy="291240"/>
+          </a:xfrm>
+          <a:prstGeom prst="rect">
+            <a:avLst/>
+          </a:prstGeom>
+          <a:noFill/>
+          <a:ln w="0">
+            <a:noFill/>
+          </a:ln>
+        </p:spPr>
+        <p:style>
+          <a:lnRef idx="0"/>
+          <a:fillRef idx="0"/>
+          <a:effectRef idx="0"/>
+          <a:fontRef idx="minor"/>
+        </p:style>
+        <p:txBody>
+          <a:bodyPr lIns="90000" rIns="90000" tIns="45000" bIns="45000" anchor="ctr">
+            <a:noAutofit/>
+          </a:bodyPr>
+          <a:p>
+            <a:pPr defTabSz="914400">
+              <a:lnSpc>
+                <a:spcPct val="100000"/>
+              </a:lnSpc>
+              <a:spcBef>
+                <a:spcPts val="1191"/>
+              </a:spcBef>
+              <a:spcAft>
+                <a:spcPts val="992"/>
+              </a:spcAft>
+              <a:tabLst>
+                <a:tab algn="l" pos="0"/>
+              </a:tabLst>
+            </a:pPr>
+            <a:r>
+              <a:rPr b="1" lang="en-GB" sz="1200" spc="201" strike="noStrike" u="none">
+                <a:solidFill>
+                  <a:srgbClr val="1c7293"/>
+                </a:solidFill>
+                <a:effectLst/>
+                <a:uFillTx/>
+                <a:latin typeface="Calibri"/>
+              </a:rPr>
+              <a:t>General AI Methodology</a:t>
+            </a:r>
+            <a:endParaRPr b="0" lang="en-US" sz="1200" strike="noStrike" u="none">
+              <a:solidFill>
+                <a:srgbClr val="000000"/>
+              </a:solidFill>
+              <a:effectLst/>
+              <a:uFillTx/>
+              <a:latin typeface="Arial"/>
+            </a:endParaRPr>
+          </a:p>
+        </p:txBody>
+      </p:sp>
+      <p:sp>
+        <p:nvSpPr>
+          <p:cNvPr id="82" name="Text 41"/>
+          <p:cNvSpPr/>
+          <p:nvPr/>
+        </p:nvSpPr>
+        <p:spPr>
+          <a:xfrm>
+            <a:off x="548640" y="658080"/>
+            <a:ext cx="11062800" cy="821520"/>
+          </a:xfrm>
+          <a:prstGeom prst="rect">
+            <a:avLst/>
+          </a:prstGeom>
+          <a:noFill/>
+          <a:ln w="0">
+            <a:noFill/>
+          </a:ln>
+        </p:spPr>
+        <p:style>
+          <a:lnRef idx="0"/>
+          <a:fillRef idx="0"/>
+          <a:effectRef idx="0"/>
+          <a:fontRef idx="minor"/>
+        </p:style>
+        <p:txBody>
+          <a:bodyPr lIns="90000" rIns="90000" tIns="45000" bIns="45000" anchor="ctr">
+            <a:noAutofit/>
+          </a:bodyPr>
+          <a:p>
+            <a:pPr defTabSz="914400">
+              <a:lnSpc>
+                <a:spcPct val="100000"/>
+              </a:lnSpc>
+              <a:spcBef>
+                <a:spcPts val="1191"/>
+              </a:spcBef>
+              <a:spcAft>
+                <a:spcPts val="992"/>
+              </a:spcAft>
+              <a:tabLst>
+                <a:tab algn="l" pos="0"/>
+              </a:tabLst>
+            </a:pPr>
+            <a:r>
+              <a:rPr b="1" lang="en-GB" sz="3000" strike="noStrike" u="none">
+                <a:solidFill>
+                  <a:srgbClr val="20242b"/>
+                </a:solidFill>
+                <a:effectLst/>
+                <a:uFillTx/>
+                <a:latin typeface="Cambria"/>
+              </a:rPr>
+              <a:t>General AI Methodology</a:t>
+            </a:r>
+            <a:endParaRPr b="0" lang="en-US" sz="3000" strike="noStrike" u="none">
+              <a:solidFill>
+                <a:srgbClr val="000000"/>
+              </a:solidFill>
+              <a:effectLst/>
+              <a:uFillTx/>
+              <a:latin typeface="Arial"/>
+            </a:endParaRPr>
+          </a:p>
+        </p:txBody>
+      </p:sp>
+      <p:sp>
+        <p:nvSpPr>
+          <p:cNvPr id="83" name="Text 42"/>
+          <p:cNvSpPr/>
+          <p:nvPr/>
+        </p:nvSpPr>
+        <p:spPr>
+          <a:xfrm>
+            <a:off x="11185920" y="6446160"/>
+            <a:ext cx="455760" cy="272880"/>
+          </a:xfrm>
+          <a:prstGeom prst="rect">
+            <a:avLst/>
+          </a:prstGeom>
+          <a:noFill/>
+          <a:ln w="0">
+            <a:noFill/>
+          </a:ln>
+        </p:spPr>
+        <p:style>
+          <a:lnRef idx="0"/>
+          <a:fillRef idx="0"/>
+          <a:effectRef idx="0"/>
+          <a:fontRef idx="minor"/>
+        </p:style>
+        <p:txBody>
+          <a:bodyPr lIns="90000" rIns="90000" tIns="45000" bIns="45000" anchor="ctr">
+            <a:noAutofit/>
+          </a:bodyPr>
+          <a:p>
+            <a:pPr algn="r" defTabSz="914400">
+              <a:lnSpc>
+                <a:spcPct val="100000"/>
+              </a:lnSpc>
+              <a:tabLst>
+                <a:tab algn="l" pos="0"/>
+              </a:tabLst>
+            </a:pPr>
+            <a:r>
+              <a:rPr b="0" lang="en-US" sz="900" strike="noStrike" u="none">
+                <a:solidFill>
+                  <a:srgbClr val="6e7580"/>
+                </a:solidFill>
+                <a:effectLst/>
+                <a:uFillTx/>
+                <a:latin typeface="Calibri"/>
+                <a:ea typeface="Calibri"/>
+              </a:rPr>
+              <a:t>2</a:t>
+            </a:r>
+            <a:endParaRPr b="0" lang="en-US" sz="900" strike="noStrike" u="none">
+              <a:solidFill>
+                <a:srgbClr val="000000"/>
+              </a:solidFill>
+              <a:effectLst/>
+              <a:uFillTx/>
+              <a:latin typeface="Arial"/>
+            </a:endParaRPr>
+          </a:p>
+        </p:txBody>
+      </p:sp>
+      <p:sp>
+        <p:nvSpPr>
+          <p:cNvPr id="84" name=""/>
+          <p:cNvSpPr/>
+          <p:nvPr/>
+        </p:nvSpPr>
+        <p:spPr>
+          <a:xfrm>
+            <a:off x="540000" y="1799640"/>
+            <a:ext cx="10979280" cy="2776680"/>
+          </a:xfrm>
+          <a:prstGeom prst="rect">
+            <a:avLst/>
+          </a:prstGeom>
+          <a:noFill/>
+          <a:ln w="0">
+            <a:noFill/>
+          </a:ln>
+        </p:spPr>
+        <p:style>
+          <a:lnRef idx="0"/>
+          <a:fillRef idx="0"/>
+          <a:effectRef idx="0"/>
+          <a:fontRef idx="minor"/>
+        </p:style>
+        <p:txBody>
+          <a:bodyPr lIns="90000" rIns="90000" tIns="45000" bIns="45000" anchor="t">
+            <a:spAutoFit/>
+          </a:bodyPr>
+          <a:p>
+            <a:pPr marL="343080" indent="-343080" defTabSz="343080">
+              <a:lnSpc>
+                <a:spcPct val="100000"/>
+              </a:lnSpc>
+              <a:spcBef>
+                <a:spcPts val="1191"/>
+              </a:spcBef>
+              <a:spcAft>
+                <a:spcPts val="992"/>
+              </a:spcAft>
+              <a:buClr>
+                <a:srgbClr val="000000"/>
+              </a:buClr>
+              <a:buFont typeface="Arial"/>
+              <a:buChar char="•"/>
+              <a:tabLst>
+                <a:tab algn="l" pos="0"/>
+              </a:tabLst>
+            </a:pPr>
+            <a:r>
+              <a:rPr b="1" lang="fr-FR" sz="2400" strike="noStrike" u="none">
+                <a:solidFill>
+                  <a:srgbClr val="0000ff"/>
+                </a:solidFill>
+                <a:effectLst/>
+                <a:uFillTx/>
+                <a:latin typeface="Calibri"/>
+              </a:rPr>
+              <a:t>Training: The Core Process</a:t>
+            </a:r>
+            <a:endParaRPr b="0" lang="en-US" sz="2400" strike="noStrike" u="none">
+              <a:solidFill>
+                <a:srgbClr val="000000"/>
+              </a:solidFill>
+              <a:effectLst/>
+              <a:uFillTx/>
+              <a:latin typeface="Arial"/>
+            </a:endParaRPr>
+          </a:p>
+          <a:p>
+            <a:pPr marL="343080" indent="-343080" defTabSz="343080">
+              <a:lnSpc>
+                <a:spcPct val="100000"/>
+              </a:lnSpc>
+              <a:buClr>
+                <a:srgbClr val="000000"/>
+              </a:buClr>
+              <a:buFont typeface="Arial"/>
+              <a:buChar char="•"/>
+              <a:tabLst>
+                <a:tab algn="l" pos="0"/>
+              </a:tabLst>
+            </a:pPr>
+            <a:endParaRPr b="0" lang="en-US" sz="2400" strike="noStrike" u="none">
+              <a:solidFill>
+                <a:srgbClr val="000000"/>
+              </a:solidFill>
+              <a:effectLst/>
+              <a:uFillTx/>
+              <a:latin typeface="Arial"/>
+              <a:ea typeface="Unifont"/>
+            </a:endParaRPr>
+          </a:p>
+          <a:p>
+            <a:pPr marL="343080" indent="-343080" defTabSz="343080">
+              <a:lnSpc>
+                <a:spcPct val="100000"/>
+              </a:lnSpc>
+              <a:buClr>
+                <a:srgbClr val="000000"/>
+              </a:buClr>
+              <a:buFont typeface="Arial"/>
+              <a:buChar char="•"/>
+              <a:tabLst>
+                <a:tab algn="l" pos="0"/>
+              </a:tabLst>
+            </a:pPr>
+            <a:r>
+              <a:rPr b="1" lang="fr-FR" sz="2400" strike="noStrike" u="none">
+                <a:solidFill>
+                  <a:srgbClr val="000000"/>
+                </a:solidFill>
+                <a:effectLst/>
+                <a:uFillTx/>
+                <a:latin typeface="Arial"/>
+                <a:ea typeface="Unifont"/>
+              </a:rPr>
+              <a:t>Key Factors for Success:</a:t>
+            </a:r>
+            <a:endParaRPr b="0" lang="en-US" sz="2400" strike="noStrike" u="none">
+              <a:solidFill>
+                <a:srgbClr val="000000"/>
+              </a:solidFill>
+              <a:effectLst/>
+              <a:uFillTx/>
+              <a:latin typeface="Arial"/>
+              <a:ea typeface="Unifont"/>
+            </a:endParaRPr>
+          </a:p>
+          <a:p>
+            <a:pPr marL="360000" defTabSz="343080">
+              <a:lnSpc>
+                <a:spcPct val="100000"/>
+              </a:lnSpc>
+              <a:buClr>
+                <a:srgbClr val="000000"/>
+              </a:buClr>
+              <a:buFont typeface="Arial"/>
+              <a:buChar char="•"/>
+              <a:tabLst>
+                <a:tab algn="l" pos="0"/>
+              </a:tabLst>
+            </a:pPr>
+            <a:r>
+              <a:rPr b="0" lang="fr-FR" sz="2400" strike="noStrike" u="none">
+                <a:solidFill>
+                  <a:srgbClr val="000000"/>
+                </a:solidFill>
+                <a:effectLst/>
+                <a:uFillTx/>
+                <a:latin typeface="Arial"/>
+                <a:ea typeface="Unifont"/>
+              </a:rPr>
+              <a:t>Data Quality: High-fidelity simulations with diverse parameters.</a:t>
+            </a:r>
+            <a:endParaRPr b="0" lang="en-US" sz="2400" strike="noStrike" u="none">
+              <a:solidFill>
+                <a:srgbClr val="000000"/>
+              </a:solidFill>
+              <a:effectLst/>
+              <a:uFillTx/>
+              <a:latin typeface="Arial"/>
+              <a:ea typeface="Unifont"/>
+            </a:endParaRPr>
+          </a:p>
+          <a:p>
+            <a:pPr marL="360000" defTabSz="343080">
+              <a:lnSpc>
+                <a:spcPct val="100000"/>
+              </a:lnSpc>
+              <a:buClr>
+                <a:srgbClr val="000000"/>
+              </a:buClr>
+              <a:buFont typeface="Arial"/>
+              <a:buChar char="•"/>
+              <a:tabLst>
+                <a:tab algn="l" pos="0"/>
+              </a:tabLst>
+            </a:pPr>
+            <a:r>
+              <a:rPr b="0" lang="fr-FR" sz="2400" strike="noStrike" u="none">
+                <a:solidFill>
+                  <a:srgbClr val="000000"/>
+                </a:solidFill>
+                <a:effectLst/>
+                <a:uFillTx/>
+                <a:latin typeface="Arial"/>
+                <a:ea typeface="Unifont"/>
+              </a:rPr>
+              <a:t>Model Architecture: Match complexity to the problem (e.g., CNNs for images, Transformers for sequences).</a:t>
+            </a:r>
+            <a:endParaRPr b="0" lang="en-US" sz="2400" strike="noStrike" u="none">
+              <a:solidFill>
+                <a:srgbClr val="000000"/>
+              </a:solidFill>
+              <a:effectLst/>
+              <a:uFillTx/>
+              <a:latin typeface="Arial"/>
+              <a:ea typeface="Unifont"/>
+            </a:endParaRPr>
+          </a:p>
+          <a:p>
+            <a:pPr marL="360000" defTabSz="343080">
+              <a:lnSpc>
+                <a:spcPct val="100000"/>
+              </a:lnSpc>
+              <a:buClr>
+                <a:srgbClr val="000000"/>
+              </a:buClr>
+              <a:buFont typeface="Arial"/>
+              <a:buChar char="•"/>
+              <a:tabLst>
+                <a:tab algn="l" pos="0"/>
+              </a:tabLst>
+            </a:pPr>
+            <a:r>
+              <a:rPr b="0" lang="fr-FR" sz="2400" strike="noStrike" u="none">
+                <a:solidFill>
+                  <a:srgbClr val="000000"/>
+                </a:solidFill>
+                <a:effectLst/>
+                <a:uFillTx/>
+                <a:latin typeface="Arial"/>
+                <a:ea typeface="Unifont"/>
+              </a:rPr>
+              <a:t>Hyperparameters: Learning rate, batch size, number of epochs.</a:t>
+            </a:r>
+            <a:endParaRPr b="0" lang="en-US" sz="2400" strike="noStrike" u="none">
+              <a:solidFill>
+                <a:srgbClr val="000000"/>
+              </a:solidFill>
+              <a:effectLst/>
+              <a:uFillTx/>
+              <a:latin typeface="Arial"/>
+              <a:ea typeface="Unifont"/>
+            </a:endParaRPr>
+          </a:p>
+        </p:txBody>
+      </p:sp>
+    </p:spTree>
+  </p:cSld>
+  <mc:AlternateContent>
+    <mc:Choice Requires="p14">
+      <p:transition spd="slow" p14:dur="2000"/>
+    </mc:Choice>
+    <mc:Fallback>
+      <p:transition spd="slow"/>
+    </mc:Fallback>
+  </mc:AlternateContent>
+</p:sld>
+</file>
+
+<file path=ppt/slides/slide13.xml><?xml version="1.0" encoding="utf-8"?>
+<p:sld xmlns:a="http://schemas.openxmlformats.org/drawingml/2006/main" xmlns:p="http://schemas.openxmlformats.org/presentationml/2006/main" xmlns:r="http://schemas.openxmlformats.org/officeDocument/2006/relationships" xmlns:p14="http://schemas.microsoft.com/office/powerpoint/2010/main" xmlns:p15="http://schemas.microsoft.com/office/powerpoint/2012/main" xmlns:mc="http://schemas.openxmlformats.org/markup-compatibility/2006">
+  <p:cSld>
+    <p:spTree>
+      <p:nvGrpSpPr>
+        <p:cNvPr id="1" name=""/>
+        <p:cNvGrpSpPr/>
+        <p:nvPr/>
+      </p:nvGrpSpPr>
+      <p:grpSpPr>
+        <a:xfrm>
+          <a:off x="0" y="0"/>
+          <a:ext cx="0" cy="0"/>
+          <a:chOff x="0" y="0"/>
+          <a:chExt cx="0" cy="0"/>
+        </a:xfrm>
+      </p:grpSpPr>
+      <p:sp>
+        <p:nvSpPr>
+          <p:cNvPr id="85" name="Text 46"/>
+          <p:cNvSpPr/>
+          <p:nvPr/>
+        </p:nvSpPr>
+        <p:spPr>
+          <a:xfrm>
+            <a:off x="548640" y="383760"/>
+            <a:ext cx="9142560" cy="291240"/>
+          </a:xfrm>
+          <a:prstGeom prst="rect">
+            <a:avLst/>
+          </a:prstGeom>
+          <a:noFill/>
+          <a:ln w="0">
+            <a:noFill/>
+          </a:ln>
+        </p:spPr>
+        <p:style>
+          <a:lnRef idx="0"/>
+          <a:fillRef idx="0"/>
+          <a:effectRef idx="0"/>
+          <a:fontRef idx="minor"/>
+        </p:style>
+        <p:txBody>
+          <a:bodyPr lIns="90000" rIns="90000" tIns="45000" bIns="45000" anchor="ctr">
+            <a:noAutofit/>
+          </a:bodyPr>
+          <a:p>
+            <a:pPr defTabSz="914400">
+              <a:lnSpc>
+                <a:spcPct val="100000"/>
+              </a:lnSpc>
+              <a:spcBef>
+                <a:spcPts val="1191"/>
+              </a:spcBef>
+              <a:spcAft>
+                <a:spcPts val="992"/>
+              </a:spcAft>
+              <a:tabLst>
+                <a:tab algn="l" pos="0"/>
+              </a:tabLst>
+            </a:pPr>
+            <a:r>
+              <a:rPr b="1" lang="en-GB" sz="1200" spc="201" strike="noStrike" u="none">
+                <a:solidFill>
+                  <a:srgbClr val="1c7293"/>
+                </a:solidFill>
+                <a:effectLst/>
+                <a:uFillTx/>
+                <a:latin typeface="Calibri"/>
+              </a:rPr>
+              <a:t>Lessons and praticals</a:t>
+            </a:r>
+            <a:endParaRPr b="0" lang="en-US" sz="1200" strike="noStrike" u="none">
+              <a:solidFill>
+                <a:srgbClr val="000000"/>
+              </a:solidFill>
+              <a:effectLst/>
+              <a:uFillTx/>
+              <a:latin typeface="Arial"/>
+            </a:endParaRPr>
+          </a:p>
+        </p:txBody>
+      </p:sp>
+      <p:sp>
+        <p:nvSpPr>
+          <p:cNvPr id="86" name="Text 47"/>
+          <p:cNvSpPr/>
+          <p:nvPr/>
+        </p:nvSpPr>
+        <p:spPr>
+          <a:xfrm>
+            <a:off x="548640" y="658080"/>
+            <a:ext cx="11062800" cy="821520"/>
+          </a:xfrm>
+          <a:prstGeom prst="rect">
+            <a:avLst/>
+          </a:prstGeom>
+          <a:noFill/>
+          <a:ln w="0">
+            <a:noFill/>
+          </a:ln>
+        </p:spPr>
+        <p:style>
+          <a:lnRef idx="0"/>
+          <a:fillRef idx="0"/>
+          <a:effectRef idx="0"/>
+          <a:fontRef idx="minor"/>
+        </p:style>
+        <p:txBody>
+          <a:bodyPr lIns="90000" rIns="90000" tIns="45000" bIns="45000" anchor="ctr">
+            <a:noAutofit/>
+          </a:bodyPr>
+          <a:p>
+            <a:pPr defTabSz="914400">
+              <a:lnSpc>
+                <a:spcPct val="100000"/>
+              </a:lnSpc>
+              <a:spcBef>
+                <a:spcPts val="1191"/>
+              </a:spcBef>
+              <a:spcAft>
+                <a:spcPts val="992"/>
+              </a:spcAft>
+              <a:tabLst>
+                <a:tab algn="l" pos="0"/>
+              </a:tabLst>
+            </a:pPr>
+            <a:r>
+              <a:rPr b="1" lang="en-GB" sz="3000" strike="noStrike" u="none">
+                <a:solidFill>
+                  <a:srgbClr val="20242b"/>
+                </a:solidFill>
+                <a:effectLst/>
+                <a:uFillTx/>
+                <a:latin typeface="Cambria"/>
+              </a:rPr>
+              <a:t>What You Will Learn and Practice</a:t>
+            </a:r>
+            <a:endParaRPr b="0" lang="en-US" sz="3000" strike="noStrike" u="none">
+              <a:solidFill>
+                <a:srgbClr val="000000"/>
+              </a:solidFill>
+              <a:effectLst/>
+              <a:uFillTx/>
+              <a:latin typeface="Arial"/>
+            </a:endParaRPr>
+          </a:p>
+        </p:txBody>
+      </p:sp>
+      <p:sp>
+        <p:nvSpPr>
+          <p:cNvPr id="87" name="Text 48"/>
+          <p:cNvSpPr/>
+          <p:nvPr/>
+        </p:nvSpPr>
+        <p:spPr>
+          <a:xfrm>
+            <a:off x="11185920" y="6446160"/>
+            <a:ext cx="455760" cy="272880"/>
+          </a:xfrm>
+          <a:prstGeom prst="rect">
+            <a:avLst/>
+          </a:prstGeom>
+          <a:noFill/>
+          <a:ln w="0">
+            <a:noFill/>
+          </a:ln>
+        </p:spPr>
+        <p:style>
+          <a:lnRef idx="0"/>
+          <a:fillRef idx="0"/>
+          <a:effectRef idx="0"/>
+          <a:fontRef idx="minor"/>
+        </p:style>
+        <p:txBody>
+          <a:bodyPr lIns="90000" rIns="90000" tIns="45000" bIns="45000" anchor="ctr">
+            <a:noAutofit/>
+          </a:bodyPr>
+          <a:p>
+            <a:pPr algn="r" defTabSz="914400">
+              <a:lnSpc>
+                <a:spcPct val="100000"/>
+              </a:lnSpc>
+              <a:tabLst>
+                <a:tab algn="l" pos="0"/>
+              </a:tabLst>
+            </a:pPr>
+            <a:r>
+              <a:rPr b="0" lang="en-US" sz="900" strike="noStrike" u="none">
+                <a:solidFill>
+                  <a:srgbClr val="6e7580"/>
+                </a:solidFill>
+                <a:effectLst/>
+                <a:uFillTx/>
+                <a:latin typeface="Calibri"/>
+                <a:ea typeface="Calibri"/>
+              </a:rPr>
+              <a:t>2</a:t>
+            </a:r>
+            <a:endParaRPr b="0" lang="en-US" sz="900" strike="noStrike" u="none">
+              <a:solidFill>
+                <a:srgbClr val="000000"/>
+              </a:solidFill>
+              <a:effectLst/>
+              <a:uFillTx/>
+              <a:latin typeface="Arial"/>
+            </a:endParaRPr>
+          </a:p>
+        </p:txBody>
+      </p:sp>
+      <p:sp>
+        <p:nvSpPr>
+          <p:cNvPr id="88" name=""/>
+          <p:cNvSpPr/>
+          <p:nvPr/>
+        </p:nvSpPr>
+        <p:spPr>
+          <a:xfrm>
+            <a:off x="540000" y="1799640"/>
+            <a:ext cx="10979280" cy="4303800"/>
+          </a:xfrm>
+          <a:prstGeom prst="rect">
+            <a:avLst/>
+          </a:prstGeom>
+          <a:noFill/>
+          <a:ln w="0">
+            <a:noFill/>
+          </a:ln>
+        </p:spPr>
+        <p:style>
+          <a:lnRef idx="0"/>
+          <a:fillRef idx="0"/>
+          <a:effectRef idx="0"/>
+          <a:fontRef idx="minor"/>
+        </p:style>
+        <p:txBody>
+          <a:bodyPr lIns="90000" rIns="90000" tIns="45000" bIns="45000" anchor="t">
+            <a:spAutoFit/>
+          </a:bodyPr>
+          <a:p>
+            <a:pPr marL="343080" indent="-343080" defTabSz="343080">
+              <a:lnSpc>
+                <a:spcPct val="100000"/>
+              </a:lnSpc>
+              <a:spcBef>
+                <a:spcPts val="1191"/>
+              </a:spcBef>
+              <a:spcAft>
+                <a:spcPts val="992"/>
+              </a:spcAft>
+              <a:buClr>
+                <a:srgbClr val="000000"/>
+              </a:buClr>
+              <a:buFont typeface="Arial"/>
+              <a:buChar char="•"/>
+              <a:tabLst>
+                <a:tab algn="l" pos="0"/>
+              </a:tabLst>
+            </a:pPr>
+            <a:r>
+              <a:rPr b="1" lang="fr-FR" sz="2400" strike="noStrike" u="none">
+                <a:solidFill>
+                  <a:srgbClr val="0000ff"/>
+                </a:solidFill>
+                <a:effectLst/>
+                <a:uFillTx/>
+                <a:latin typeface="Calibri"/>
+              </a:rPr>
+              <a:t>Hands-on skills</a:t>
+            </a:r>
+            <a:endParaRPr b="0" lang="en-US" sz="2400" strike="noStrike" u="none">
+              <a:solidFill>
+                <a:srgbClr val="000000"/>
+              </a:solidFill>
+              <a:effectLst/>
+              <a:uFillTx/>
+              <a:latin typeface="Arial"/>
+            </a:endParaRPr>
+          </a:p>
+          <a:p>
+            <a:pPr marL="343080" indent="-343080" defTabSz="343080">
+              <a:lnSpc>
+                <a:spcPct val="100000"/>
+              </a:lnSpc>
+              <a:buClr>
+                <a:srgbClr val="000000"/>
+              </a:buClr>
+              <a:buFont typeface="Arial"/>
+              <a:buChar char="•"/>
+              <a:tabLst>
+                <a:tab algn="l" pos="0"/>
+              </a:tabLst>
+            </a:pPr>
+            <a:endParaRPr b="0" lang="en-US" sz="1000" strike="noStrike" u="none">
+              <a:solidFill>
+                <a:srgbClr val="000000"/>
+              </a:solidFill>
+              <a:effectLst/>
+              <a:uFillTx/>
+              <a:latin typeface="Arial"/>
+              <a:ea typeface="Unifont"/>
+            </a:endParaRPr>
+          </a:p>
+          <a:p>
+            <a:pPr marL="343080" indent="-343080" defTabSz="343080">
+              <a:lnSpc>
+                <a:spcPct val="100000"/>
+              </a:lnSpc>
+              <a:spcBef>
+                <a:spcPts val="1191"/>
+              </a:spcBef>
+              <a:spcAft>
+                <a:spcPts val="992"/>
+              </a:spcAft>
+              <a:buClr>
+                <a:srgbClr val="000000"/>
+              </a:buClr>
+              <a:buFont typeface="Arial"/>
+              <a:buChar char="•"/>
+              <a:tabLst>
+                <a:tab algn="l" pos="0"/>
+              </a:tabLst>
+            </a:pPr>
+            <a:r>
+              <a:rPr b="1" lang="fr-FR" sz="2400" strike="noStrike" u="none">
+                <a:solidFill>
+                  <a:srgbClr val="000000"/>
+                </a:solidFill>
+                <a:effectLst/>
+                <a:uFillTx/>
+                <a:latin typeface="Arial"/>
+                <a:ea typeface="Unifont"/>
+              </a:rPr>
+              <a:t>Setting Up Simulations:</a:t>
+            </a:r>
+            <a:endParaRPr b="0" lang="en-US" sz="2400" strike="noStrike" u="none">
+              <a:solidFill>
+                <a:srgbClr val="000000"/>
+              </a:solidFill>
+              <a:effectLst/>
+              <a:uFillTx/>
+              <a:latin typeface="Arial"/>
+            </a:endParaRPr>
+          </a:p>
+          <a:p>
+            <a:pPr marL="360000" defTabSz="343080">
+              <a:lnSpc>
+                <a:spcPct val="100000"/>
+              </a:lnSpc>
+              <a:buClr>
+                <a:srgbClr val="000000"/>
+              </a:buClr>
+              <a:buFont typeface="Arial"/>
+              <a:buChar char="•"/>
+              <a:tabLst>
+                <a:tab algn="l" pos="0"/>
+              </a:tabLst>
+            </a:pPr>
+            <a:r>
+              <a:rPr b="0" lang="fr-FR" sz="2400" strike="noStrike" u="none">
+                <a:solidFill>
+                  <a:srgbClr val="000000"/>
+                </a:solidFill>
+                <a:effectLst/>
+                <a:uFillTx/>
+                <a:latin typeface="Arial"/>
+                <a:ea typeface="Unifont"/>
+              </a:rPr>
+              <a:t>Configure beamlines/instruments in McStas (neutrons) and McXtrace (X-rays).</a:t>
+            </a:r>
+            <a:endParaRPr b="0" lang="en-US" sz="2400" strike="noStrike" u="none">
+              <a:solidFill>
+                <a:srgbClr val="000000"/>
+              </a:solidFill>
+              <a:effectLst/>
+              <a:uFillTx/>
+              <a:latin typeface="Arial"/>
+              <a:ea typeface="Unifont"/>
+            </a:endParaRPr>
+          </a:p>
+          <a:p>
+            <a:pPr marL="360000" defTabSz="343080">
+              <a:lnSpc>
+                <a:spcPct val="100000"/>
+              </a:lnSpc>
+              <a:buClr>
+                <a:srgbClr val="000000"/>
+              </a:buClr>
+              <a:buFont typeface="Arial"/>
+              <a:buChar char="•"/>
+              <a:tabLst>
+                <a:tab algn="l" pos="0"/>
+              </a:tabLst>
+            </a:pPr>
+            <a:r>
+              <a:rPr b="0" lang="fr-FR" sz="2400" strike="noStrike" u="none">
+                <a:solidFill>
+                  <a:srgbClr val="000000"/>
+                </a:solidFill>
+                <a:effectLst/>
+                <a:uFillTx/>
+                <a:latin typeface="Arial"/>
+                <a:ea typeface="Unifont"/>
+              </a:rPr>
+              <a:t>Define sample properties (e.g., crystal structure, composition).</a:t>
+            </a:r>
+            <a:br>
+              <a:rPr sz="2400"/>
+            </a:br>
+            <a:r>
+              <a:rPr b="0" lang="fr-FR" sz="2400" strike="noStrike" u="none">
+                <a:solidFill>
+                  <a:srgbClr val="000000"/>
+                </a:solidFill>
+                <a:effectLst/>
+                <a:uFillTx/>
+                <a:latin typeface="Arial"/>
+              </a:rPr>
+              <a:t> </a:t>
+            </a:r>
+            <a:endParaRPr b="0" lang="en-US" sz="2400" strike="noStrike" u="none">
+              <a:solidFill>
+                <a:srgbClr val="000000"/>
+              </a:solidFill>
+              <a:effectLst/>
+              <a:uFillTx/>
+              <a:latin typeface="Arial"/>
+              <a:ea typeface="Unifont"/>
+            </a:endParaRPr>
+          </a:p>
+          <a:p>
+            <a:pPr marL="343080" indent="-343080" defTabSz="343080">
+              <a:lnSpc>
+                <a:spcPct val="100000"/>
+              </a:lnSpc>
+              <a:buClr>
+                <a:srgbClr val="000000"/>
+              </a:buClr>
+              <a:buFont typeface="Arial"/>
+              <a:buChar char="•"/>
+              <a:tabLst>
+                <a:tab algn="l" pos="0"/>
+              </a:tabLst>
+            </a:pPr>
+            <a:r>
+              <a:rPr b="1" lang="fr-FR" sz="2400" strike="noStrike" u="none">
+                <a:solidFill>
+                  <a:srgbClr val="000000"/>
+                </a:solidFill>
+                <a:effectLst/>
+                <a:uFillTx/>
+                <a:latin typeface="Arial"/>
+                <a:ea typeface="Unifont"/>
+              </a:rPr>
+              <a:t>Characterizing Models:</a:t>
+            </a:r>
+            <a:endParaRPr b="0" lang="en-US" sz="2400" strike="noStrike" u="none">
+              <a:solidFill>
+                <a:srgbClr val="000000"/>
+              </a:solidFill>
+              <a:effectLst/>
+              <a:uFillTx/>
+              <a:latin typeface="Arial"/>
+              <a:ea typeface="Unifont"/>
+            </a:endParaRPr>
+          </a:p>
+          <a:p>
+            <a:pPr marL="360000" defTabSz="343080">
+              <a:lnSpc>
+                <a:spcPct val="100000"/>
+              </a:lnSpc>
+              <a:buClr>
+                <a:srgbClr val="000000"/>
+              </a:buClr>
+              <a:buFont typeface="Arial"/>
+              <a:buChar char="•"/>
+              <a:tabLst>
+                <a:tab algn="l" pos="0"/>
+              </a:tabLst>
+            </a:pPr>
+            <a:r>
+              <a:rPr b="0" lang="fr-FR" sz="2400" strike="noStrike" u="none">
+                <a:solidFill>
+                  <a:srgbClr val="000000"/>
+                </a:solidFill>
+                <a:effectLst/>
+                <a:uFillTx/>
+                <a:latin typeface="Arial"/>
+                <a:ea typeface="Unifont"/>
+              </a:rPr>
+              <a:t>Check geometry (e.g., detector positions, slit sizes).</a:t>
+            </a:r>
+            <a:endParaRPr b="0" lang="en-US" sz="2400" strike="noStrike" u="none">
+              <a:solidFill>
+                <a:srgbClr val="000000"/>
+              </a:solidFill>
+              <a:effectLst/>
+              <a:uFillTx/>
+              <a:latin typeface="Arial"/>
+              <a:ea typeface="Unifont"/>
+            </a:endParaRPr>
+          </a:p>
+          <a:p>
+            <a:pPr marL="360000" defTabSz="343080">
+              <a:lnSpc>
+                <a:spcPct val="100000"/>
+              </a:lnSpc>
+              <a:buClr>
+                <a:srgbClr val="000000"/>
+              </a:buClr>
+              <a:buFont typeface="Arial"/>
+              <a:buChar char="•"/>
+              <a:tabLst>
+                <a:tab algn="l" pos="0"/>
+              </a:tabLst>
+            </a:pPr>
+            <a:r>
+              <a:rPr b="0" lang="fr-FR" sz="2400" strike="noStrike" u="none">
+                <a:solidFill>
+                  <a:srgbClr val="000000"/>
+                </a:solidFill>
+                <a:effectLst/>
+                <a:uFillTx/>
+                <a:latin typeface="Arial"/>
+                <a:ea typeface="Unifont"/>
+              </a:rPr>
+              <a:t>Extract parameters (e.g., resolution, flux) and results (e.g., spectra, diffraction patterns).</a:t>
+            </a:r>
+            <a:endParaRPr b="0" lang="en-US" sz="2400" strike="noStrike" u="none">
+              <a:solidFill>
+                <a:srgbClr val="000000"/>
+              </a:solidFill>
+              <a:effectLst/>
+              <a:uFillTx/>
+              <a:latin typeface="Arial"/>
+              <a:ea typeface="Unifont"/>
+            </a:endParaRPr>
+          </a:p>
+        </p:txBody>
+      </p:sp>
+    </p:spTree>
+  </p:cSld>
+  <mc:AlternateContent>
+    <mc:Choice Requires="p14">
+      <p:transition spd="slow" p14:dur="2000"/>
+    </mc:Choice>
+    <mc:Fallback>
+      <p:transition spd="slow"/>
+    </mc:Fallback>
+  </mc:AlternateContent>
+</p:sld>
+</file>
+
+<file path=ppt/slides/slide14.xml><?xml version="1.0" encoding="utf-8"?>
+<p:sld xmlns:a="http://schemas.openxmlformats.org/drawingml/2006/main" xmlns:p="http://schemas.openxmlformats.org/presentationml/2006/main" xmlns:r="http://schemas.openxmlformats.org/officeDocument/2006/relationships" xmlns:p14="http://schemas.microsoft.com/office/powerpoint/2010/main" xmlns:p15="http://schemas.microsoft.com/office/powerpoint/2012/main" xmlns:mc="http://schemas.openxmlformats.org/markup-compatibility/2006">
+  <p:cSld>
+    <p:spTree>
+      <p:nvGrpSpPr>
+        <p:cNvPr id="1" name=""/>
+        <p:cNvGrpSpPr/>
+        <p:nvPr/>
+      </p:nvGrpSpPr>
+      <p:grpSpPr>
+        <a:xfrm>
+          <a:off x="0" y="0"/>
+          <a:ext cx="0" cy="0"/>
+          <a:chOff x="0" y="0"/>
+          <a:chExt cx="0" cy="0"/>
+        </a:xfrm>
+      </p:grpSpPr>
+      <p:sp>
+        <p:nvSpPr>
+          <p:cNvPr id="89" name="Text 43"/>
+          <p:cNvSpPr/>
+          <p:nvPr/>
+        </p:nvSpPr>
+        <p:spPr>
+          <a:xfrm>
+            <a:off x="548640" y="383760"/>
+            <a:ext cx="9142560" cy="291240"/>
+          </a:xfrm>
+          <a:prstGeom prst="rect">
+            <a:avLst/>
+          </a:prstGeom>
+          <a:noFill/>
+          <a:ln w="0">
+            <a:noFill/>
+          </a:ln>
+        </p:spPr>
+        <p:style>
+          <a:lnRef idx="0"/>
+          <a:fillRef idx="0"/>
+          <a:effectRef idx="0"/>
+          <a:fontRef idx="minor"/>
+        </p:style>
+        <p:txBody>
+          <a:bodyPr lIns="90000" rIns="90000" tIns="45000" bIns="45000" anchor="ctr">
+            <a:noAutofit/>
+          </a:bodyPr>
+          <a:p>
+            <a:pPr defTabSz="914400">
+              <a:lnSpc>
+                <a:spcPct val="100000"/>
+              </a:lnSpc>
+              <a:spcBef>
+                <a:spcPts val="1191"/>
+              </a:spcBef>
+              <a:spcAft>
+                <a:spcPts val="992"/>
+              </a:spcAft>
+              <a:tabLst>
+                <a:tab algn="l" pos="0"/>
+              </a:tabLst>
+            </a:pPr>
+            <a:r>
+              <a:rPr b="1" lang="en-GB" sz="1200" spc="201" strike="noStrike" u="none">
+                <a:solidFill>
+                  <a:srgbClr val="1c7293"/>
+                </a:solidFill>
+                <a:effectLst/>
+                <a:uFillTx/>
+                <a:latin typeface="Calibri"/>
+              </a:rPr>
+              <a:t>Lessons and praticals</a:t>
+            </a:r>
+            <a:endParaRPr b="0" lang="en-US" sz="1200" strike="noStrike" u="none">
+              <a:solidFill>
+                <a:srgbClr val="000000"/>
+              </a:solidFill>
+              <a:effectLst/>
+              <a:uFillTx/>
+              <a:latin typeface="Arial"/>
+            </a:endParaRPr>
+          </a:p>
+        </p:txBody>
+      </p:sp>
+      <p:sp>
+        <p:nvSpPr>
+          <p:cNvPr id="90" name="Text 44"/>
+          <p:cNvSpPr/>
+          <p:nvPr/>
+        </p:nvSpPr>
+        <p:spPr>
+          <a:xfrm>
+            <a:off x="548640" y="658080"/>
+            <a:ext cx="11062800" cy="821520"/>
+          </a:xfrm>
+          <a:prstGeom prst="rect">
+            <a:avLst/>
+          </a:prstGeom>
+          <a:noFill/>
+          <a:ln w="0">
+            <a:noFill/>
+          </a:ln>
+        </p:spPr>
+        <p:style>
+          <a:lnRef idx="0"/>
+          <a:fillRef idx="0"/>
+          <a:effectRef idx="0"/>
+          <a:fontRef idx="minor"/>
+        </p:style>
+        <p:txBody>
+          <a:bodyPr lIns="90000" rIns="90000" tIns="45000" bIns="45000" anchor="ctr">
+            <a:noAutofit/>
+          </a:bodyPr>
+          <a:p>
+            <a:pPr defTabSz="914400">
+              <a:lnSpc>
+                <a:spcPct val="100000"/>
+              </a:lnSpc>
+              <a:spcBef>
+                <a:spcPts val="1191"/>
+              </a:spcBef>
+              <a:spcAft>
+                <a:spcPts val="992"/>
+              </a:spcAft>
+              <a:tabLst>
+                <a:tab algn="l" pos="0"/>
+              </a:tabLst>
+            </a:pPr>
+            <a:r>
+              <a:rPr b="1" lang="en-GB" sz="3000" strike="noStrike" u="none">
+                <a:solidFill>
+                  <a:srgbClr val="20242b"/>
+                </a:solidFill>
+                <a:effectLst/>
+                <a:uFillTx/>
+                <a:latin typeface="Cambria"/>
+              </a:rPr>
+              <a:t>What You Will Learn and Practice</a:t>
+            </a:r>
+            <a:endParaRPr b="0" lang="en-US" sz="3000" strike="noStrike" u="none">
+              <a:solidFill>
+                <a:srgbClr val="000000"/>
+              </a:solidFill>
+              <a:effectLst/>
+              <a:uFillTx/>
+              <a:latin typeface="Arial"/>
+            </a:endParaRPr>
+          </a:p>
+        </p:txBody>
+      </p:sp>
+      <p:sp>
+        <p:nvSpPr>
+          <p:cNvPr id="91" name="Text 45"/>
+          <p:cNvSpPr/>
+          <p:nvPr/>
+        </p:nvSpPr>
+        <p:spPr>
+          <a:xfrm>
+            <a:off x="11185920" y="6446160"/>
+            <a:ext cx="455760" cy="272880"/>
+          </a:xfrm>
+          <a:prstGeom prst="rect">
+            <a:avLst/>
+          </a:prstGeom>
+          <a:noFill/>
+          <a:ln w="0">
+            <a:noFill/>
+          </a:ln>
+        </p:spPr>
+        <p:style>
+          <a:lnRef idx="0"/>
+          <a:fillRef idx="0"/>
+          <a:effectRef idx="0"/>
+          <a:fontRef idx="minor"/>
+        </p:style>
+        <p:txBody>
+          <a:bodyPr lIns="90000" rIns="90000" tIns="45000" bIns="45000" anchor="ctr">
+            <a:noAutofit/>
+          </a:bodyPr>
+          <a:p>
+            <a:pPr algn="r" defTabSz="914400">
+              <a:lnSpc>
+                <a:spcPct val="100000"/>
+              </a:lnSpc>
+              <a:tabLst>
+                <a:tab algn="l" pos="0"/>
+              </a:tabLst>
+            </a:pPr>
+            <a:r>
+              <a:rPr b="0" lang="en-US" sz="900" strike="noStrike" u="none">
+                <a:solidFill>
+                  <a:srgbClr val="6e7580"/>
+                </a:solidFill>
+                <a:effectLst/>
+                <a:uFillTx/>
+                <a:latin typeface="Calibri"/>
+                <a:ea typeface="Calibri"/>
+              </a:rPr>
+              <a:t>2</a:t>
+            </a:r>
+            <a:endParaRPr b="0" lang="en-US" sz="900" strike="noStrike" u="none">
+              <a:solidFill>
+                <a:srgbClr val="000000"/>
+              </a:solidFill>
+              <a:effectLst/>
+              <a:uFillTx/>
+              <a:latin typeface="Arial"/>
+            </a:endParaRPr>
+          </a:p>
+        </p:txBody>
+      </p:sp>
+      <p:sp>
+        <p:nvSpPr>
+          <p:cNvPr id="92" name=""/>
+          <p:cNvSpPr/>
+          <p:nvPr/>
+        </p:nvSpPr>
+        <p:spPr>
+          <a:xfrm>
+            <a:off x="540000" y="1799640"/>
+            <a:ext cx="10979280" cy="4336920"/>
+          </a:xfrm>
+          <a:prstGeom prst="rect">
+            <a:avLst/>
+          </a:prstGeom>
+          <a:noFill/>
+          <a:ln w="0">
+            <a:noFill/>
+          </a:ln>
+        </p:spPr>
+        <p:style>
+          <a:lnRef idx="0"/>
+          <a:fillRef idx="0"/>
+          <a:effectRef idx="0"/>
+          <a:fontRef idx="minor"/>
+        </p:style>
+        <p:txBody>
+          <a:bodyPr lIns="90000" rIns="90000" tIns="45000" bIns="45000" anchor="t">
+            <a:spAutoFit/>
+          </a:bodyPr>
+          <a:p>
+            <a:pPr marL="343080" indent="-343080" defTabSz="343080">
+              <a:lnSpc>
+                <a:spcPct val="100000"/>
+              </a:lnSpc>
+              <a:spcBef>
+                <a:spcPts val="1191"/>
+              </a:spcBef>
+              <a:spcAft>
+                <a:spcPts val="992"/>
+              </a:spcAft>
+              <a:buClr>
+                <a:srgbClr val="000000"/>
+              </a:buClr>
+              <a:buFont typeface="Arial"/>
+              <a:buChar char="•"/>
+              <a:tabLst>
+                <a:tab algn="l" pos="0"/>
+              </a:tabLst>
+            </a:pPr>
+            <a:r>
+              <a:rPr b="1" lang="fr-FR" sz="2400" strike="noStrike" u="none">
+                <a:solidFill>
+                  <a:srgbClr val="0000ff"/>
+                </a:solidFill>
+                <a:effectLst/>
+                <a:uFillTx/>
+                <a:latin typeface="Calibri"/>
+              </a:rPr>
+              <a:t>Hands-on skills</a:t>
+            </a:r>
+            <a:endParaRPr b="0" lang="en-US" sz="2400" strike="noStrike" u="none">
+              <a:solidFill>
+                <a:srgbClr val="000000"/>
+              </a:solidFill>
+              <a:effectLst/>
+              <a:uFillTx/>
+              <a:latin typeface="Arial"/>
+            </a:endParaRPr>
+          </a:p>
+          <a:p>
+            <a:pPr marL="343080" indent="-343080" defTabSz="343080">
+              <a:lnSpc>
+                <a:spcPct val="100000"/>
+              </a:lnSpc>
+              <a:buClr>
+                <a:srgbClr val="000000"/>
+              </a:buClr>
+              <a:buFont typeface="Arial"/>
+              <a:buChar char="•"/>
+              <a:tabLst>
+                <a:tab algn="l" pos="0"/>
+              </a:tabLst>
+            </a:pPr>
+            <a:endParaRPr b="0" lang="en-US" sz="1000" strike="noStrike" u="none">
+              <a:solidFill>
+                <a:srgbClr val="000000"/>
+              </a:solidFill>
+              <a:effectLst/>
+              <a:uFillTx/>
+              <a:latin typeface="Arial"/>
+              <a:ea typeface="Unifont"/>
+            </a:endParaRPr>
+          </a:p>
+          <a:p>
+            <a:pPr marL="343080" indent="-343080" defTabSz="343080">
+              <a:lnSpc>
+                <a:spcPct val="100000"/>
+              </a:lnSpc>
+              <a:spcBef>
+                <a:spcPts val="1191"/>
+              </a:spcBef>
+              <a:spcAft>
+                <a:spcPts val="992"/>
+              </a:spcAft>
+              <a:buClr>
+                <a:srgbClr val="000000"/>
+              </a:buClr>
+              <a:buFont typeface="Arial"/>
+              <a:buChar char="•"/>
+              <a:tabLst>
+                <a:tab algn="l" pos="0"/>
+              </a:tabLst>
+            </a:pPr>
+            <a:r>
+              <a:rPr b="1" lang="fr-FR" sz="2400" strike="noStrike" u="none">
+                <a:solidFill>
+                  <a:srgbClr val="000000"/>
+                </a:solidFill>
+                <a:effectLst/>
+                <a:uFillTx/>
+                <a:latin typeface="Arial"/>
+                <a:ea typeface="Unifont"/>
+              </a:rPr>
+              <a:t>Generating Datasets:</a:t>
+            </a:r>
+            <a:endParaRPr b="0" lang="en-US" sz="2400" strike="noStrike" u="none">
+              <a:solidFill>
+                <a:srgbClr val="000000"/>
+              </a:solidFill>
+              <a:effectLst/>
+              <a:uFillTx/>
+              <a:latin typeface="Arial"/>
+            </a:endParaRPr>
+          </a:p>
+          <a:p>
+            <a:pPr marL="360000" defTabSz="343080">
+              <a:lnSpc>
+                <a:spcPct val="100000"/>
+              </a:lnSpc>
+              <a:spcBef>
+                <a:spcPts val="624"/>
+              </a:spcBef>
+              <a:spcAft>
+                <a:spcPts val="425"/>
+              </a:spcAft>
+              <a:buClr>
+                <a:srgbClr val="000000"/>
+              </a:buClr>
+              <a:buFont typeface="Arial"/>
+              <a:buChar char="•"/>
+              <a:tabLst>
+                <a:tab algn="l" pos="0"/>
+              </a:tabLst>
+            </a:pPr>
+            <a:r>
+              <a:rPr b="0" lang="fr-FR" sz="2400" strike="noStrike" u="none">
+                <a:solidFill>
+                  <a:srgbClr val="000000"/>
+                </a:solidFill>
+                <a:effectLst/>
+                <a:uFillTx/>
+                <a:latin typeface="Arial"/>
+                <a:ea typeface="Unifont"/>
+              </a:rPr>
+              <a:t>Automate simulations across </a:t>
+            </a:r>
+            <a:r>
+              <a:rPr b="0" i="1" lang="fr-FR" sz="2400" strike="noStrike" u="none">
+                <a:solidFill>
+                  <a:srgbClr val="000000"/>
+                </a:solidFill>
+                <a:effectLst/>
+                <a:uFillTx/>
+                <a:latin typeface="Arial"/>
+                <a:ea typeface="Unifont"/>
+              </a:rPr>
+              <a:t>parameter</a:t>
+            </a:r>
+            <a:r>
+              <a:rPr b="0" lang="fr-FR" sz="2400" strike="noStrike" u="none">
+                <a:solidFill>
+                  <a:srgbClr val="000000"/>
+                </a:solidFill>
+                <a:effectLst/>
+                <a:uFillTx/>
+                <a:latin typeface="Arial"/>
+                <a:ea typeface="Unifont"/>
+              </a:rPr>
+              <a:t> ranges (e.g., vary samples).</a:t>
+            </a:r>
+            <a:endParaRPr b="0" lang="en-US" sz="2400" strike="noStrike" u="none">
+              <a:solidFill>
+                <a:srgbClr val="000000"/>
+              </a:solidFill>
+              <a:effectLst/>
+              <a:uFillTx/>
+              <a:latin typeface="Arial"/>
+              <a:ea typeface="Unifont"/>
+            </a:endParaRPr>
+          </a:p>
+          <a:p>
+            <a:pPr marL="360000" defTabSz="343080">
+              <a:lnSpc>
+                <a:spcPct val="100000"/>
+              </a:lnSpc>
+              <a:spcBef>
+                <a:spcPts val="624"/>
+              </a:spcBef>
+              <a:spcAft>
+                <a:spcPts val="425"/>
+              </a:spcAft>
+              <a:buClr>
+                <a:srgbClr val="000000"/>
+              </a:buClr>
+              <a:buFont typeface="Arial"/>
+              <a:buChar char="•"/>
+              <a:tabLst>
+                <a:tab algn="l" pos="0"/>
+              </a:tabLst>
+            </a:pPr>
+            <a:r>
+              <a:rPr b="0" lang="fr-FR" sz="2400" strike="noStrike" u="none">
+                <a:solidFill>
+                  <a:srgbClr val="000000"/>
+                </a:solidFill>
+                <a:effectLst/>
+                <a:uFillTx/>
+                <a:latin typeface="Arial"/>
+                <a:ea typeface="Unifont"/>
+              </a:rPr>
+              <a:t>Output: Labeled datasets of [</a:t>
+            </a:r>
+            <a:r>
+              <a:rPr b="0" i="1" lang="fr-FR" sz="2400" strike="noStrike" u="none">
+                <a:solidFill>
+                  <a:srgbClr val="000000"/>
+                </a:solidFill>
+                <a:effectLst/>
+                <a:uFillTx/>
+                <a:latin typeface="Arial"/>
+                <a:ea typeface="Unifont"/>
+              </a:rPr>
+              <a:t>parameters, virtual_measurements</a:t>
+            </a:r>
+            <a:r>
+              <a:rPr b="0" lang="fr-FR" sz="2400" strike="noStrike" u="none">
+                <a:solidFill>
+                  <a:srgbClr val="000000"/>
+                </a:solidFill>
+                <a:effectLst/>
+                <a:uFillTx/>
+                <a:latin typeface="Arial"/>
+                <a:ea typeface="Unifont"/>
+              </a:rPr>
+              <a:t>].</a:t>
+            </a:r>
+            <a:br>
+              <a:rPr sz="1000"/>
+            </a:br>
+            <a:r>
+              <a:rPr b="0" lang="fr-FR" sz="1000" strike="noStrike" u="none">
+                <a:solidFill>
+                  <a:srgbClr val="000000"/>
+                </a:solidFill>
+                <a:effectLst/>
+                <a:uFillTx/>
+                <a:latin typeface="Arial"/>
+              </a:rPr>
+              <a:t> </a:t>
+            </a:r>
+            <a:endParaRPr b="0" lang="en-US" sz="1000" strike="noStrike" u="none">
+              <a:solidFill>
+                <a:srgbClr val="000000"/>
+              </a:solidFill>
+              <a:effectLst/>
+              <a:uFillTx/>
+              <a:latin typeface="Arial"/>
+              <a:ea typeface="Unifont"/>
+            </a:endParaRPr>
+          </a:p>
+          <a:p>
+            <a:pPr marL="343080" indent="-343080" defTabSz="343080">
+              <a:lnSpc>
+                <a:spcPct val="100000"/>
+              </a:lnSpc>
+              <a:buClr>
+                <a:srgbClr val="000000"/>
+              </a:buClr>
+              <a:buFont typeface="Arial"/>
+              <a:buChar char="•"/>
+              <a:tabLst>
+                <a:tab algn="l" pos="0"/>
+              </a:tabLst>
+            </a:pPr>
+            <a:r>
+              <a:rPr b="1" lang="fr-FR" sz="2400" strike="noStrike" u="none">
+                <a:solidFill>
+                  <a:srgbClr val="000000"/>
+                </a:solidFill>
+                <a:effectLst/>
+                <a:uFillTx/>
+                <a:latin typeface="Arial"/>
+                <a:ea typeface="Unifont"/>
+              </a:rPr>
+              <a:t>Apply AI :</a:t>
+            </a:r>
+            <a:endParaRPr b="0" lang="en-US" sz="2400" strike="noStrike" u="none">
+              <a:solidFill>
+                <a:srgbClr val="000000"/>
+              </a:solidFill>
+              <a:effectLst/>
+              <a:uFillTx/>
+              <a:latin typeface="Arial"/>
+              <a:ea typeface="Unifont"/>
+            </a:endParaRPr>
+          </a:p>
+          <a:p>
+            <a:pPr marL="360000" defTabSz="343080">
+              <a:lnSpc>
+                <a:spcPct val="100000"/>
+              </a:lnSpc>
+              <a:spcBef>
+                <a:spcPts val="624"/>
+              </a:spcBef>
+              <a:spcAft>
+                <a:spcPts val="425"/>
+              </a:spcAft>
+              <a:buClr>
+                <a:srgbClr val="000000"/>
+              </a:buClr>
+              <a:buFont typeface="Arial"/>
+              <a:buChar char="•"/>
+              <a:tabLst>
+                <a:tab algn="l" pos="0"/>
+              </a:tabLst>
+            </a:pPr>
+            <a:r>
+              <a:rPr b="0" lang="fr-FR" sz="2400" strike="noStrike" u="none">
+                <a:solidFill>
+                  <a:srgbClr val="000000"/>
+                </a:solidFill>
+                <a:effectLst/>
+                <a:uFillTx/>
+                <a:latin typeface="Arial"/>
+                <a:ea typeface="Unifont"/>
+              </a:rPr>
+              <a:t>Surrogate Modeling: generate </a:t>
+            </a:r>
+            <a:r>
+              <a:rPr b="0" i="1" lang="fr-FR" sz="2400" strike="noStrike" u="none">
+                <a:solidFill>
+                  <a:srgbClr val="000000"/>
+                </a:solidFill>
+                <a:effectLst/>
+                <a:uFillTx/>
+                <a:latin typeface="Arial"/>
+                <a:ea typeface="Unifont"/>
+              </a:rPr>
+              <a:t>virtual_measurements</a:t>
+            </a:r>
+            <a:r>
+              <a:rPr b="0" lang="fr-FR" sz="2400" strike="noStrike" u="none">
+                <a:solidFill>
+                  <a:srgbClr val="000000"/>
+                </a:solidFill>
+                <a:effectLst/>
+                <a:uFillTx/>
+                <a:latin typeface="Arial"/>
+                <a:ea typeface="Unifont"/>
+              </a:rPr>
+              <a:t> faster.</a:t>
+            </a:r>
+            <a:endParaRPr b="0" lang="en-US" sz="2400" strike="noStrike" u="none">
+              <a:solidFill>
+                <a:srgbClr val="000000"/>
+              </a:solidFill>
+              <a:effectLst/>
+              <a:uFillTx/>
+              <a:latin typeface="Arial"/>
+              <a:ea typeface="Unifont"/>
+            </a:endParaRPr>
+          </a:p>
+          <a:p>
+            <a:pPr marL="360000" defTabSz="343080">
+              <a:lnSpc>
+                <a:spcPct val="100000"/>
+              </a:lnSpc>
+              <a:spcBef>
+                <a:spcPts val="624"/>
+              </a:spcBef>
+              <a:spcAft>
+                <a:spcPts val="425"/>
+              </a:spcAft>
+              <a:buClr>
+                <a:srgbClr val="000000"/>
+              </a:buClr>
+              <a:buFont typeface="Arial"/>
+              <a:buChar char="•"/>
+              <a:tabLst>
+                <a:tab algn="l" pos="0"/>
+              </a:tabLst>
+            </a:pPr>
+            <a:r>
+              <a:rPr b="0" lang="fr-FR" sz="2400" strike="noStrike" u="none">
+                <a:solidFill>
+                  <a:srgbClr val="000000"/>
+                </a:solidFill>
+                <a:effectLst/>
+                <a:uFillTx/>
+                <a:latin typeface="Arial"/>
+                <a:ea typeface="Unifont"/>
+              </a:rPr>
+              <a:t>Solving Inverse Problems: get </a:t>
+            </a:r>
+            <a:r>
+              <a:rPr b="0" i="1" lang="fr-FR" sz="2400" strike="noStrike" u="none">
+                <a:solidFill>
+                  <a:srgbClr val="000000"/>
+                </a:solidFill>
+                <a:effectLst/>
+                <a:uFillTx/>
+                <a:latin typeface="Arial"/>
+                <a:ea typeface="Unifont"/>
+              </a:rPr>
+              <a:t>parameters </a:t>
+            </a:r>
+            <a:r>
+              <a:rPr b="0" lang="fr-FR" sz="2400" strike="noStrike" u="none">
+                <a:solidFill>
+                  <a:srgbClr val="000000"/>
+                </a:solidFill>
+                <a:effectLst/>
+                <a:uFillTx/>
+                <a:latin typeface="Arial"/>
+                <a:ea typeface="Unifont"/>
+              </a:rPr>
+              <a:t>from</a:t>
+            </a:r>
+            <a:r>
+              <a:rPr b="0" i="1" lang="fr-FR" sz="2400" strike="noStrike" u="none">
+                <a:solidFill>
+                  <a:srgbClr val="000000"/>
+                </a:solidFill>
+                <a:effectLst/>
+                <a:uFillTx/>
+                <a:latin typeface="Arial"/>
+                <a:ea typeface="Unifont"/>
+              </a:rPr>
+              <a:t> measurements.</a:t>
+            </a:r>
+            <a:endParaRPr b="0" lang="en-US" sz="2400" strike="noStrike" u="none">
+              <a:solidFill>
+                <a:srgbClr val="000000"/>
+              </a:solidFill>
+              <a:effectLst/>
+              <a:uFillTx/>
+              <a:latin typeface="Arial"/>
+              <a:ea typeface="Unifont"/>
+            </a:endParaRPr>
+          </a:p>
+          <a:p>
+            <a:pPr marL="360000" defTabSz="343080">
+              <a:lnSpc>
+                <a:spcPct val="100000"/>
+              </a:lnSpc>
+              <a:spcBef>
+                <a:spcPts val="624"/>
+              </a:spcBef>
+              <a:spcAft>
+                <a:spcPts val="425"/>
+              </a:spcAft>
+              <a:buClr>
+                <a:srgbClr val="000000"/>
+              </a:buClr>
+              <a:buFont typeface="Arial"/>
+              <a:buChar char="•"/>
+              <a:tabLst>
+                <a:tab algn="l" pos="0"/>
+              </a:tabLst>
+            </a:pPr>
+            <a:r>
+              <a:rPr b="0" lang="fr-FR" sz="2400" strike="noStrike" u="none">
+                <a:solidFill>
+                  <a:srgbClr val="000000"/>
+                </a:solidFill>
+                <a:effectLst/>
+                <a:uFillTx/>
+                <a:latin typeface="Arial"/>
+                <a:ea typeface="Unifont"/>
+              </a:rPr>
+              <a:t>Optimization: search fpr best </a:t>
+            </a:r>
+            <a:r>
+              <a:rPr b="0" i="1" lang="fr-FR" sz="2400" strike="noStrike" u="none">
+                <a:solidFill>
+                  <a:srgbClr val="000000"/>
+                </a:solidFill>
+                <a:effectLst/>
+                <a:uFillTx/>
+                <a:latin typeface="Arial"/>
+                <a:ea typeface="Unifont"/>
+              </a:rPr>
+              <a:t>parameters.</a:t>
+            </a:r>
+            <a:endParaRPr b="0" lang="en-US" sz="2400" strike="noStrike" u="none">
+              <a:solidFill>
+                <a:srgbClr val="000000"/>
+              </a:solidFill>
+              <a:effectLst/>
+              <a:uFillTx/>
+              <a:latin typeface="Arial"/>
+              <a:ea typeface="Unifont"/>
+            </a:endParaRPr>
+          </a:p>
+        </p:txBody>
+      </p:sp>
+    </p:spTree>
+  </p:cSld>
+  <mc:AlternateContent>
+    <mc:Choice Requires="p14">
+      <p:transition spd="slow" p14:dur="2000"/>
+    </mc:Choice>
+    <mc:Fallback>
+      <p:transition spd="slow"/>
+    </mc:Fallback>
+  </mc:AlternateContent>
+</p:sld>
+</file>
+
+<file path=ppt/slides/slide15.xml><?xml version="1.0" encoding="utf-8"?>
+<p:sld xmlns:a="http://schemas.openxmlformats.org/drawingml/2006/main" xmlns:p="http://schemas.openxmlformats.org/presentationml/2006/main" xmlns:r="http://schemas.openxmlformats.org/officeDocument/2006/relationships" xmlns:p14="http://schemas.microsoft.com/office/powerpoint/2010/main" xmlns:p15="http://schemas.microsoft.com/office/powerpoint/2012/main" xmlns:mc="http://schemas.openxmlformats.org/markup-compatibility/2006">
+  <p:cSld>
+    <p:spTree>
+      <p:nvGrpSpPr>
+        <p:cNvPr id="1" name=""/>
+        <p:cNvGrpSpPr/>
+        <p:nvPr/>
+      </p:nvGrpSpPr>
+      <p:grpSpPr>
+        <a:xfrm>
+          <a:off x="0" y="0"/>
+          <a:ext cx="0" cy="0"/>
+          <a:chOff x="0" y="0"/>
+          <a:chExt cx="0" cy="0"/>
+        </a:xfrm>
+      </p:grpSpPr>
+      <p:sp>
+        <p:nvSpPr>
+          <p:cNvPr id="93" name="Text 49"/>
+          <p:cNvSpPr/>
+          <p:nvPr/>
+        </p:nvSpPr>
+        <p:spPr>
+          <a:xfrm>
+            <a:off x="548640" y="383760"/>
+            <a:ext cx="9142560" cy="291240"/>
+          </a:xfrm>
+          <a:prstGeom prst="rect">
+            <a:avLst/>
+          </a:prstGeom>
+          <a:noFill/>
+          <a:ln w="0">
+            <a:noFill/>
+          </a:ln>
+        </p:spPr>
+        <p:style>
+          <a:lnRef idx="0"/>
+          <a:fillRef idx="0"/>
+          <a:effectRef idx="0"/>
+          <a:fontRef idx="minor"/>
+        </p:style>
+        <p:txBody>
+          <a:bodyPr lIns="90000" rIns="90000" tIns="45000" bIns="45000" anchor="ctr">
+            <a:noAutofit/>
+          </a:bodyPr>
+          <a:p>
+            <a:pPr defTabSz="914400">
+              <a:lnSpc>
+                <a:spcPct val="100000"/>
+              </a:lnSpc>
+              <a:spcBef>
+                <a:spcPts val="1191"/>
+              </a:spcBef>
+              <a:spcAft>
+                <a:spcPts val="992"/>
+              </a:spcAft>
+              <a:tabLst>
+                <a:tab algn="l" pos="0"/>
+              </a:tabLst>
+            </a:pPr>
+            <a:r>
+              <a:rPr b="1" lang="en-GB" sz="1200" spc="201" strike="noStrike" u="none">
+                <a:solidFill>
+                  <a:srgbClr val="1c7293"/>
+                </a:solidFill>
+                <a:effectLst/>
+                <a:uFillTx/>
+                <a:latin typeface="Calibri"/>
+              </a:rPr>
+              <a:t>Resources</a:t>
+            </a:r>
+            <a:endParaRPr b="0" lang="en-US" sz="1200" strike="noStrike" u="none">
+              <a:solidFill>
+                <a:srgbClr val="000000"/>
+              </a:solidFill>
+              <a:effectLst/>
+              <a:uFillTx/>
+              <a:latin typeface="Arial"/>
+            </a:endParaRPr>
+          </a:p>
+        </p:txBody>
+      </p:sp>
+      <p:sp>
+        <p:nvSpPr>
+          <p:cNvPr id="94" name="Text 50"/>
+          <p:cNvSpPr/>
+          <p:nvPr/>
+        </p:nvSpPr>
+        <p:spPr>
+          <a:xfrm>
+            <a:off x="548640" y="658080"/>
+            <a:ext cx="11062800" cy="821520"/>
+          </a:xfrm>
+          <a:prstGeom prst="rect">
+            <a:avLst/>
+          </a:prstGeom>
+          <a:noFill/>
+          <a:ln w="0">
+            <a:noFill/>
+          </a:ln>
+        </p:spPr>
+        <p:style>
+          <a:lnRef idx="0"/>
+          <a:fillRef idx="0"/>
+          <a:effectRef idx="0"/>
+          <a:fontRef idx="minor"/>
+        </p:style>
+        <p:txBody>
+          <a:bodyPr lIns="90000" rIns="90000" tIns="45000" bIns="45000" anchor="ctr">
+            <a:noAutofit/>
+          </a:bodyPr>
+          <a:p>
+            <a:pPr defTabSz="914400">
+              <a:lnSpc>
+                <a:spcPct val="100000"/>
+              </a:lnSpc>
+              <a:spcBef>
+                <a:spcPts val="1191"/>
+              </a:spcBef>
+              <a:spcAft>
+                <a:spcPts val="992"/>
+              </a:spcAft>
+              <a:tabLst>
+                <a:tab algn="l" pos="0"/>
+              </a:tabLst>
+            </a:pPr>
+            <a:r>
+              <a:rPr b="1" lang="en-GB" sz="3000" strike="noStrike" u="none">
+                <a:solidFill>
+                  <a:srgbClr val="20242b"/>
+                </a:solidFill>
+                <a:effectLst/>
+                <a:uFillTx/>
+                <a:latin typeface="Cambria"/>
+              </a:rPr>
+              <a:t>What You Will Use</a:t>
+            </a:r>
+            <a:endParaRPr b="0" lang="en-US" sz="3000" strike="noStrike" u="none">
+              <a:solidFill>
+                <a:srgbClr val="000000"/>
+              </a:solidFill>
+              <a:effectLst/>
+              <a:uFillTx/>
+              <a:latin typeface="Arial"/>
+            </a:endParaRPr>
+          </a:p>
+        </p:txBody>
+      </p:sp>
+      <p:sp>
+        <p:nvSpPr>
+          <p:cNvPr id="95" name="Text 51"/>
+          <p:cNvSpPr/>
+          <p:nvPr/>
+        </p:nvSpPr>
+        <p:spPr>
+          <a:xfrm>
+            <a:off x="11185920" y="6446160"/>
+            <a:ext cx="455760" cy="272880"/>
+          </a:xfrm>
+          <a:prstGeom prst="rect">
+            <a:avLst/>
+          </a:prstGeom>
+          <a:noFill/>
+          <a:ln w="0">
+            <a:noFill/>
+          </a:ln>
+        </p:spPr>
+        <p:style>
+          <a:lnRef idx="0"/>
+          <a:fillRef idx="0"/>
+          <a:effectRef idx="0"/>
+          <a:fontRef idx="minor"/>
+        </p:style>
+        <p:txBody>
+          <a:bodyPr lIns="90000" rIns="90000" tIns="45000" bIns="45000" anchor="ctr">
+            <a:noAutofit/>
+          </a:bodyPr>
+          <a:p>
+            <a:pPr algn="r" defTabSz="914400">
+              <a:lnSpc>
+                <a:spcPct val="100000"/>
+              </a:lnSpc>
+              <a:tabLst>
+                <a:tab algn="l" pos="0"/>
+              </a:tabLst>
+            </a:pPr>
+            <a:r>
+              <a:rPr b="0" lang="en-US" sz="900" strike="noStrike" u="none">
+                <a:solidFill>
+                  <a:srgbClr val="6e7580"/>
+                </a:solidFill>
+                <a:effectLst/>
+                <a:uFillTx/>
+                <a:latin typeface="Calibri"/>
+                <a:ea typeface="Calibri"/>
+              </a:rPr>
+              <a:t>2</a:t>
+            </a:r>
+            <a:endParaRPr b="0" lang="en-US" sz="900" strike="noStrike" u="none">
+              <a:solidFill>
+                <a:srgbClr val="000000"/>
+              </a:solidFill>
+              <a:effectLst/>
+              <a:uFillTx/>
+              <a:latin typeface="Arial"/>
+            </a:endParaRPr>
+          </a:p>
+        </p:txBody>
+      </p:sp>
+      <p:sp>
+        <p:nvSpPr>
+          <p:cNvPr id="96" name=""/>
+          <p:cNvSpPr/>
+          <p:nvPr/>
+        </p:nvSpPr>
+        <p:spPr>
+          <a:xfrm>
+            <a:off x="540000" y="1799640"/>
+            <a:ext cx="10979280" cy="2714040"/>
+          </a:xfrm>
+          <a:prstGeom prst="rect">
+            <a:avLst/>
+          </a:prstGeom>
+          <a:noFill/>
+          <a:ln w="0">
+            <a:noFill/>
+          </a:ln>
+        </p:spPr>
+        <p:style>
+          <a:lnRef idx="0"/>
+          <a:fillRef idx="0"/>
+          <a:effectRef idx="0"/>
+          <a:fontRef idx="minor"/>
+        </p:style>
+        <p:txBody>
+          <a:bodyPr lIns="90000" rIns="90000" tIns="45000" bIns="45000" anchor="t">
+            <a:spAutoFit/>
+          </a:bodyPr>
+          <a:p>
+            <a:pPr marL="343080" indent="-343080" defTabSz="343080">
+              <a:lnSpc>
+                <a:spcPct val="100000"/>
+              </a:lnSpc>
+              <a:spcBef>
+                <a:spcPts val="1191"/>
+              </a:spcBef>
+              <a:spcAft>
+                <a:spcPts val="992"/>
+              </a:spcAft>
+              <a:buClr>
+                <a:srgbClr val="000000"/>
+              </a:buClr>
+              <a:buFont typeface="Arial"/>
+              <a:buChar char="•"/>
+              <a:tabLst>
+                <a:tab algn="l" pos="0"/>
+              </a:tabLst>
+            </a:pPr>
+            <a:r>
+              <a:rPr b="1" lang="fr-FR" sz="2400" strike="noStrike" u="none">
+                <a:solidFill>
+                  <a:srgbClr val="0000ff"/>
+                </a:solidFill>
+                <a:effectLst/>
+                <a:uFillTx/>
+                <a:latin typeface="Calibri"/>
+              </a:rPr>
+              <a:t>Your Laptop</a:t>
+            </a:r>
+            <a:endParaRPr b="0" lang="en-US" sz="2400" strike="noStrike" u="none">
+              <a:solidFill>
+                <a:srgbClr val="000000"/>
+              </a:solidFill>
+              <a:effectLst/>
+              <a:uFillTx/>
+              <a:latin typeface="Arial"/>
+            </a:endParaRPr>
+          </a:p>
+          <a:p>
+            <a:pPr marL="343080" indent="-343080" defTabSz="343080">
+              <a:lnSpc>
+                <a:spcPct val="100000"/>
+              </a:lnSpc>
+              <a:spcBef>
+                <a:spcPts val="1191"/>
+              </a:spcBef>
+              <a:spcAft>
+                <a:spcPts val="992"/>
+              </a:spcAft>
+              <a:buClr>
+                <a:srgbClr val="000000"/>
+              </a:buClr>
+              <a:buFont typeface="Arial"/>
+              <a:buChar char="•"/>
+              <a:tabLst>
+                <a:tab algn="l" pos="0"/>
+              </a:tabLst>
+            </a:pPr>
+            <a:r>
+              <a:rPr b="1" lang="fr-FR" sz="2400" strike="noStrike" u="none">
+                <a:solidFill>
+                  <a:srgbClr val="0000ff"/>
+                </a:solidFill>
+                <a:effectLst/>
+                <a:uFillTx/>
+                <a:latin typeface="Calibri"/>
+              </a:rPr>
+              <a:t>High Performance Computing (MesoNET)</a:t>
+            </a:r>
+            <a:endParaRPr b="0" lang="en-US" sz="2400" strike="noStrike" u="none">
+              <a:solidFill>
+                <a:srgbClr val="000000"/>
+              </a:solidFill>
+              <a:effectLst/>
+              <a:uFillTx/>
+              <a:latin typeface="Arial"/>
+            </a:endParaRPr>
+          </a:p>
+          <a:p>
+            <a:pPr marL="343080" indent="-343080" defTabSz="343080">
+              <a:lnSpc>
+                <a:spcPct val="100000"/>
+              </a:lnSpc>
+              <a:spcBef>
+                <a:spcPts val="1191"/>
+              </a:spcBef>
+              <a:spcAft>
+                <a:spcPts val="992"/>
+              </a:spcAft>
+              <a:buClr>
+                <a:srgbClr val="000000"/>
+              </a:buClr>
+              <a:buFont typeface="Arial"/>
+              <a:buChar char="•"/>
+              <a:tabLst>
+                <a:tab algn="l" pos="0"/>
+              </a:tabLst>
+            </a:pPr>
+            <a:r>
+              <a:rPr b="1" lang="fr-FR" sz="2400" strike="noStrike" u="none">
+                <a:solidFill>
+                  <a:srgbClr val="0000ff"/>
+                </a:solidFill>
+                <a:effectLst/>
+                <a:uFillTx/>
+                <a:latin typeface="Calibri"/>
+              </a:rPr>
+              <a:t>Remote Computing Service (</a:t>
+            </a:r>
+            <a:r>
+              <a:rPr b="1" lang="fr-FR" sz="2400" strike="noStrike" u="none">
+                <a:solidFill>
+                  <a:srgbClr val="0000ff"/>
+                </a:solidFill>
+                <a:effectLst/>
+                <a:uFillTx/>
+                <a:latin typeface="Calibri"/>
+                <a:hlinkClick r:id="rId1"/>
+              </a:rPr>
+              <a:t>DARTS@SOLEIL</a:t>
+            </a:r>
+            <a:r>
+              <a:rPr b="1" lang="fr-FR" sz="2400" strike="noStrike" u="none">
+                <a:solidFill>
+                  <a:srgbClr val="0000ff"/>
+                </a:solidFill>
+                <a:effectLst/>
+                <a:uFillTx/>
+                <a:latin typeface="Calibri"/>
+              </a:rPr>
+              <a:t>)</a:t>
+            </a:r>
+            <a:endParaRPr b="0" lang="en-US" sz="2400" strike="noStrike" u="none">
+              <a:solidFill>
+                <a:srgbClr val="000000"/>
+              </a:solidFill>
+              <a:effectLst/>
+              <a:uFillTx/>
+              <a:latin typeface="Arial"/>
+            </a:endParaRPr>
+          </a:p>
+          <a:p>
+            <a:pPr marL="343080" indent="-343080" defTabSz="343080">
+              <a:lnSpc>
+                <a:spcPct val="100000"/>
+              </a:lnSpc>
+              <a:spcBef>
+                <a:spcPts val="1191"/>
+              </a:spcBef>
+              <a:spcAft>
+                <a:spcPts val="992"/>
+              </a:spcAft>
+              <a:buClr>
+                <a:srgbClr val="000000"/>
+              </a:buClr>
+              <a:buFont typeface="Arial"/>
+              <a:buChar char="•"/>
+              <a:tabLst>
+                <a:tab algn="l" pos="0"/>
+              </a:tabLst>
+            </a:pPr>
+            <a:r>
+              <a:rPr b="1" lang="fr-FR" sz="2400" strike="noStrike" u="none">
+                <a:solidFill>
+                  <a:srgbClr val="0000ff"/>
+                </a:solidFill>
+                <a:effectLst/>
+                <a:uFillTx/>
+                <a:latin typeface="Calibri"/>
+              </a:rPr>
+              <a:t>Your Brain</a:t>
+            </a:r>
+            <a:endParaRPr b="0" lang="en-US" sz="2400" strike="noStrike" u="none">
+              <a:solidFill>
+                <a:srgbClr val="000000"/>
+              </a:solidFill>
+              <a:effectLst/>
+              <a:uFillTx/>
+              <a:latin typeface="Arial"/>
+            </a:endParaRPr>
+          </a:p>
+          <a:p>
+            <a:pPr marL="343080" indent="-343080" defTabSz="343080">
+              <a:lnSpc>
+                <a:spcPct val="100000"/>
+              </a:lnSpc>
+              <a:buClr>
+                <a:srgbClr val="000000"/>
+              </a:buClr>
+              <a:buFont typeface="Arial"/>
+              <a:buChar char="•"/>
+              <a:tabLst>
+                <a:tab algn="l" pos="0"/>
+              </a:tabLst>
+            </a:pPr>
+            <a:endParaRPr b="0" lang="en-US" sz="1000" strike="noStrike" u="none">
+              <a:solidFill>
+                <a:srgbClr val="000000"/>
+              </a:solidFill>
+              <a:effectLst/>
+              <a:uFillTx/>
+              <a:latin typeface="Arial"/>
+              <a:ea typeface="Unifont"/>
+            </a:endParaRPr>
+          </a:p>
+        </p:txBody>
+      </p:sp>
+    </p:spTree>
+  </p:cSld>
+  <mc:AlternateContent>
+    <mc:Choice Requires="p14">
+      <p:transition spd="slow" p14:dur="2000"/>
+    </mc:Choice>
+    <mc:Fallback>
+      <p:transition spd="slow"/>
+    </mc:Fallback>
+  </mc:AlternateContent>
+</p:sld>
+</file>
+
+<file path=ppt/slides/slide16.xml><?xml version="1.0" encoding="utf-8"?>
 <p:sld xmlns:a="http://schemas.openxmlformats.org/drawingml/2006/main" xmlns:p="http://schemas.openxmlformats.org/presentationml/2006/main" xmlns:r="http://schemas.openxmlformats.org/officeDocument/2006/relationships" xmlns:p14="http://schemas.microsoft.com/office/powerpoint/2010/main" xmlns:p15="http://schemas.microsoft.com/office/powerpoint/2012/main" xmlns:mc="http://schemas.openxmlformats.org/markup-compatibility/2006">
   <p:cSld>
     <p:bg>
@@ -3515,14 +7945,14 @@
       </p:grpSpPr>
       <p:sp>
         <p:nvSpPr>
-          <p:cNvPr id="63" name="Shape 0"/>
+          <p:cNvPr id="97" name="Shape 0"/>
           <p:cNvSpPr/>
           <p:nvPr/>
         </p:nvSpPr>
         <p:spPr>
           <a:xfrm>
             <a:off x="9410040" y="-1457640"/>
-            <a:ext cx="4754160" cy="4754160"/>
+            <a:ext cx="4753440" cy="4753440"/>
           </a:xfrm>
           <a:prstGeom prst="ellipse">
             <a:avLst/>
@@ -3563,14 +7993,14 @@
       </p:sp>
       <p:sp>
         <p:nvSpPr>
-          <p:cNvPr id="64" name="Shape 1"/>
+          <p:cNvPr id="98" name="Shape 1"/>
           <p:cNvSpPr/>
           <p:nvPr/>
         </p:nvSpPr>
         <p:spPr>
           <a:xfrm>
             <a:off x="-1828800" y="4206240"/>
-            <a:ext cx="4205520" cy="4205520"/>
+            <a:ext cx="4204800" cy="4204800"/>
           </a:xfrm>
           <a:prstGeom prst="ellipse">
             <a:avLst/>
@@ -3611,14 +8041,14 @@
       </p:sp>
       <p:sp>
         <p:nvSpPr>
-          <p:cNvPr id="65" name="Text 2"/>
+          <p:cNvPr id="99" name="Text 2"/>
           <p:cNvSpPr/>
           <p:nvPr/>
         </p:nvSpPr>
         <p:spPr>
           <a:xfrm>
             <a:off x="822960" y="2286000"/>
-            <a:ext cx="9143280" cy="1096560"/>
+            <a:ext cx="9142560" cy="1095840"/>
           </a:xfrm>
           <a:prstGeom prst="rect">
             <a:avLst/>
@@ -3659,7 +8089,7 @@
               </a:rPr>
               <a:t>Thank you</a:t>
             </a:r>
-            <a:endParaRPr b="0" lang="fr-FR" sz="4800" strike="noStrike" u="none">
+            <a:endParaRPr b="0" lang="en-US" sz="4800" strike="noStrike" u="none">
               <a:solidFill>
                 <a:srgbClr val="ffffff"/>
               </a:solidFill>
@@ -3672,14 +8102,14 @@
       </p:sp>
       <p:sp>
         <p:nvSpPr>
-          <p:cNvPr id="66" name="Text 3"/>
+          <p:cNvPr id="100" name="Text 3"/>
           <p:cNvSpPr/>
           <p:nvPr/>
         </p:nvSpPr>
         <p:spPr>
           <a:xfrm>
             <a:off x="822960" y="3246120"/>
-            <a:ext cx="9143280" cy="639360"/>
+            <a:ext cx="9142560" cy="638640"/>
           </a:xfrm>
           <a:prstGeom prst="rect">
             <a:avLst/>
@@ -3720,7 +8150,7 @@
               </a:rPr>
               <a:t>Questions?</a:t>
             </a:r>
-            <a:endParaRPr b="0" lang="fr-FR" sz="2000" strike="noStrike" u="none">
+            <a:endParaRPr b="0" lang="en-US" sz="2000" strike="noStrike" u="none">
               <a:solidFill>
                 <a:srgbClr val="ffffff"/>
               </a:solidFill>
@@ -3733,14 +8163,14 @@
       </p:sp>
       <p:sp>
         <p:nvSpPr>
-          <p:cNvPr id="67" name="Shape 4"/>
+          <p:cNvPr id="101" name="Shape 4"/>
           <p:cNvSpPr/>
           <p:nvPr/>
         </p:nvSpPr>
         <p:spPr>
           <a:xfrm>
             <a:off x="822960" y="4297680"/>
-            <a:ext cx="1416600" cy="310320"/>
+            <a:ext cx="1415880" cy="309600"/>
           </a:xfrm>
           <a:prstGeom prst="roundRect">
             <a:avLst>
@@ -3783,14 +8213,14 @@
       </p:sp>
       <p:sp>
         <p:nvSpPr>
-          <p:cNvPr id="68" name="Text 5"/>
+          <p:cNvPr id="102" name="Text 5"/>
           <p:cNvSpPr/>
           <p:nvPr/>
         </p:nvSpPr>
         <p:spPr>
           <a:xfrm>
             <a:off x="822960" y="4297680"/>
-            <a:ext cx="1416600" cy="310320"/>
+            <a:ext cx="1415880" cy="309600"/>
           </a:xfrm>
           <a:prstGeom prst="rect">
             <a:avLst/>
@@ -3831,7 +8261,7 @@
               </a:rPr>
               <a:t>mcstas.org</a:t>
             </a:r>
-            <a:endParaRPr b="0" lang="fr-FR" sz="1100" strike="noStrike" u="none">
+            <a:endParaRPr b="0" lang="en-US" sz="1100" strike="noStrike" u="none">
               <a:solidFill>
                 <a:srgbClr val="ffffff"/>
               </a:solidFill>
@@ -3844,14 +8274,14 @@
       </p:sp>
       <p:sp>
         <p:nvSpPr>
-          <p:cNvPr id="69" name="Shape 6"/>
+          <p:cNvPr id="103" name="Shape 6"/>
           <p:cNvSpPr/>
           <p:nvPr/>
         </p:nvSpPr>
         <p:spPr>
           <a:xfrm>
             <a:off x="2377440" y="4297680"/>
-            <a:ext cx="1416600" cy="310320"/>
+            <a:ext cx="1415880" cy="309600"/>
           </a:xfrm>
           <a:prstGeom prst="roundRect">
             <a:avLst>
@@ -3894,14 +8324,14 @@
       </p:sp>
       <p:sp>
         <p:nvSpPr>
-          <p:cNvPr id="70" name="Text 7"/>
+          <p:cNvPr id="104" name="Text 7"/>
           <p:cNvSpPr/>
           <p:nvPr/>
         </p:nvSpPr>
         <p:spPr>
           <a:xfrm>
             <a:off x="2377440" y="4297680"/>
-            <a:ext cx="1416600" cy="310320"/>
+            <a:ext cx="1415880" cy="309600"/>
           </a:xfrm>
           <a:prstGeom prst="rect">
             <a:avLst/>
@@ -3942,7 +8372,7 @@
               </a:rPr>
               <a:t>mcxtrace.org</a:t>
             </a:r>
-            <a:endParaRPr b="0" lang="fr-FR" sz="1100" strike="noStrike" u="none">
+            <a:endParaRPr b="0" lang="en-US" sz="1100" strike="noStrike" u="none">
               <a:solidFill>
                 <a:srgbClr val="ffffff"/>
               </a:solidFill>
@@ -3955,7 +8385,7 @@
       </p:sp>
       <p:sp>
         <p:nvSpPr>
-          <p:cNvPr id="71" name="Shape 8"/>
+          <p:cNvPr id="105" name="Shape 8"/>
           <p:cNvSpPr/>
           <p:nvPr/>
         </p:nvSpPr>
@@ -3998,14 +8428,14 @@
       </p:sp>
       <p:sp>
         <p:nvSpPr>
-          <p:cNvPr id="72" name="Text 9"/>
+          <p:cNvPr id="106" name="Text 9"/>
           <p:cNvSpPr/>
           <p:nvPr/>
         </p:nvSpPr>
         <p:spPr>
           <a:xfrm>
             <a:off x="822960" y="5897880"/>
-            <a:ext cx="7314480" cy="319320"/>
+            <a:ext cx="7313760" cy="318600"/>
           </a:xfrm>
           <a:prstGeom prst="rect">
             <a:avLst/>
@@ -4046,7 +8476,7 @@
               </a:rPr>
               <a:t>Peter Willendrup   ·   pkwi@fysik.dtu.dk   ·   DTU Physics</a:t>
             </a:r>
-            <a:endParaRPr b="0" lang="fr-FR" sz="1250" strike="noStrike" u="none">
+            <a:endParaRPr b="0" lang="en-US" sz="1250" strike="noStrike" u="none">
               <a:solidFill>
                 <a:srgbClr val="ffffff"/>
               </a:solidFill>
@@ -4059,14 +8489,14 @@
       </p:sp>
       <p:sp>
         <p:nvSpPr>
-          <p:cNvPr id="73" name="Text 10"/>
+          <p:cNvPr id="107" name="Text 10"/>
           <p:cNvSpPr/>
           <p:nvPr/>
         </p:nvSpPr>
         <p:spPr>
           <a:xfrm>
             <a:off x="548640" y="6446520"/>
-            <a:ext cx="6400080" cy="273600"/>
+            <a:ext cx="6399360" cy="272880"/>
           </a:xfrm>
           <a:prstGeom prst="rect">
             <a:avLst/>
@@ -4107,7 +8537,7 @@
               </a:rPr>
               <a:t>{presentation title</a:t>
             </a:r>
-            <a:endParaRPr b="0" lang="fr-FR" sz="900" strike="noStrike" u="none">
+            <a:endParaRPr b="0" lang="en-US" sz="900" strike="noStrike" u="none">
               <a:solidFill>
                 <a:srgbClr val="ffffff"/>
               </a:solidFill>
@@ -4120,14 +8550,14 @@
       </p:sp>
       <p:sp>
         <p:nvSpPr>
-          <p:cNvPr id="74" name="Text 11"/>
+          <p:cNvPr id="108" name="Text 11"/>
           <p:cNvSpPr/>
           <p:nvPr/>
         </p:nvSpPr>
         <p:spPr>
           <a:xfrm>
             <a:off x="11185920" y="6446520"/>
-            <a:ext cx="456480" cy="273600"/>
+            <a:ext cx="455760" cy="272880"/>
           </a:xfrm>
           <a:prstGeom prst="rect">
             <a:avLst/>
@@ -4168,7 +8598,7 @@
               </a:rPr>
               <a:t>17</a:t>
             </a:r>
-            <a:endParaRPr b="0" lang="fr-FR" sz="900" strike="noStrike" u="none">
+            <a:endParaRPr b="0" lang="en-US" sz="900" strike="noStrike" u="none">
               <a:solidFill>
                 <a:srgbClr val="ffffff"/>
               </a:solidFill>
@@ -4181,14 +8611,14 @@
       </p:sp>
       <p:sp>
         <p:nvSpPr>
-          <p:cNvPr id="75" name="PartnerCard"/>
+          <p:cNvPr id="109" name="PartnerCard"/>
           <p:cNvSpPr/>
           <p:nvPr/>
         </p:nvSpPr>
         <p:spPr>
           <a:xfrm>
             <a:off x="6603840" y="4165560"/>
-            <a:ext cx="4952160" cy="1573920"/>
+            <a:ext cx="4951440" cy="1573200"/>
           </a:xfrm>
           <a:prstGeom prst="roundRect">
             <a:avLst>
@@ -4239,14 +8669,14 @@
       </p:sp>
       <p:sp>
         <p:nvSpPr>
-          <p:cNvPr id="76" name="PartnerLabel"/>
+          <p:cNvPr id="110" name="PartnerLabel"/>
           <p:cNvSpPr/>
           <p:nvPr/>
         </p:nvSpPr>
         <p:spPr>
           <a:xfrm>
             <a:off x="6921360" y="4368960"/>
-            <a:ext cx="4317120" cy="227880"/>
+            <a:ext cx="4316400" cy="227160"/>
           </a:xfrm>
           <a:prstGeom prst="rect">
             <a:avLst/>
@@ -4283,7 +8713,7 @@
               </a:rPr>
               <a:t>SUPPORTED BY</a:t>
             </a:r>
-            <a:endParaRPr b="0" lang="fr-FR" sz="1100" strike="noStrike" u="none">
+            <a:endParaRPr b="0" lang="en-US" sz="1100" strike="noStrike" u="none">
               <a:solidFill>
                 <a:srgbClr val="ffffff"/>
               </a:solidFill>
@@ -4296,7 +8726,7 @@
       </p:sp>
       <p:pic>
         <p:nvPicPr>
-          <p:cNvPr id="77" name="Picture 15" descr=""/>
+          <p:cNvPr id="111" name="Picture 15" descr=""/>
           <p:cNvPicPr/>
           <p:nvPr/>
         </p:nvPicPr>
@@ -4307,7 +8737,7 @@
         <p:spPr>
           <a:xfrm>
             <a:off x="6921360" y="4749840"/>
-            <a:ext cx="4317120" cy="639720"/>
+            <a:ext cx="4316400" cy="639000"/>
           </a:xfrm>
           <a:prstGeom prst="rect">
             <a:avLst/>
@@ -4320,7 +8750,7 @@
       </p:pic>
       <p:pic>
         <p:nvPicPr>
-          <p:cNvPr id="78" name="Copied Picture 17" descr=""/>
+          <p:cNvPr id="112" name="Copied Picture 17" descr=""/>
           <p:cNvPicPr/>
           <p:nvPr/>
         </p:nvPicPr>
@@ -4332,7 +8762,7 @@
         <p:spPr>
           <a:xfrm>
             <a:off x="10375920" y="355680"/>
-            <a:ext cx="1269360" cy="650880"/>
+            <a:ext cx="1268640" cy="650160"/>
           </a:xfrm>
           <a:prstGeom prst="rect">
             <a:avLst/>
@@ -4345,14 +8775,14 @@
       </p:pic>
       <p:sp>
         <p:nvSpPr>
-          <p:cNvPr id="79" name="LogoCard"/>
+          <p:cNvPr id="113" name="LogoCard"/>
           <p:cNvSpPr/>
           <p:nvPr/>
         </p:nvSpPr>
         <p:spPr>
           <a:xfrm>
             <a:off x="7375680" y="2105640"/>
-            <a:ext cx="3809160" cy="1497960"/>
+            <a:ext cx="3808440" cy="1497240"/>
           </a:xfrm>
           <a:prstGeom prst="roundRect">
             <a:avLst>
@@ -4403,35 +8833,35 @@
       </p:sp>
       <p:grpSp>
         <p:nvGrpSpPr>
-          <p:cNvPr id="80" name="Group 18"/>
+          <p:cNvPr id="114" name="Group 18"/>
           <p:cNvGrpSpPr/>
           <p:nvPr/>
         </p:nvGrpSpPr>
         <p:grpSpPr>
           <a:xfrm>
             <a:off x="7882560" y="2194200"/>
-            <a:ext cx="2795760" cy="1320840"/>
+            <a:ext cx="2795040" cy="1320120"/>
             <a:chOff x="7882560" y="2194200"/>
-            <a:chExt cx="2795760" cy="1320840"/>
+            <a:chExt cx="2795040" cy="1320120"/>
           </a:xfrm>
         </p:grpSpPr>
         <p:grpSp>
           <p:nvGrpSpPr>
-            <p:cNvPr id="81" name="Group 19"/>
+            <p:cNvPr id="115" name="Group 19"/>
             <p:cNvGrpSpPr/>
             <p:nvPr/>
           </p:nvGrpSpPr>
           <p:grpSpPr>
             <a:xfrm>
               <a:off x="9289440" y="2194200"/>
-              <a:ext cx="1388880" cy="1257840"/>
+              <a:ext cx="1388160" cy="1257120"/>
               <a:chOff x="9289440" y="2194200"/>
-              <a:chExt cx="1388880" cy="1257840"/>
+              <a:chExt cx="1388160" cy="1257120"/>
             </a:xfrm>
           </p:grpSpPr>
           <p:pic>
             <p:nvPicPr>
-              <p:cNvPr id="82" name="Picture 21" descr=""/>
+              <p:cNvPr id="116" name="Picture 21" descr=""/>
               <p:cNvPicPr/>
               <p:nvPr/>
             </p:nvPicPr>
@@ -4443,7 +8873,7 @@
             <p:spPr>
               <a:xfrm>
                 <a:off x="9339120" y="2194200"/>
-                <a:ext cx="1293840" cy="775440"/>
+                <a:ext cx="1293120" cy="774720"/>
               </a:xfrm>
               <a:prstGeom prst="rect">
                 <a:avLst/>
@@ -4456,7 +8886,7 @@
           </p:pic>
           <p:pic>
             <p:nvPicPr>
-              <p:cNvPr id="83" name="Picture 22" descr="Synchrotron SOLEIL"/>
+              <p:cNvPr id="117" name="Picture 22" descr="Synchrotron SOLEIL"/>
               <p:cNvPicPr/>
               <p:nvPr/>
             </p:nvPicPr>
@@ -4467,7 +8897,7 @@
             <p:spPr>
               <a:xfrm>
                 <a:off x="9289440" y="2922840"/>
-                <a:ext cx="962640" cy="464760"/>
+                <a:ext cx="961920" cy="464040"/>
               </a:xfrm>
               <a:prstGeom prst="rect">
                 <a:avLst/>
@@ -4480,7 +8910,7 @@
           </p:pic>
           <p:pic>
             <p:nvPicPr>
-              <p:cNvPr id="84" name="Picture 23" descr="DTU Physics"/>
+              <p:cNvPr id="118" name="Picture 23" descr="DTU Physics"/>
               <p:cNvPicPr/>
               <p:nvPr/>
             </p:nvPicPr>
@@ -4491,7 +8921,7 @@
             <p:spPr>
               <a:xfrm>
                 <a:off x="10325160" y="2931480"/>
-                <a:ext cx="353160" cy="520560"/>
+                <a:ext cx="352440" cy="519840"/>
               </a:xfrm>
               <a:prstGeom prst="rect">
                 <a:avLst/>
@@ -4505,7 +8935,7 @@
         </p:grpSp>
         <p:pic>
           <p:nvPicPr>
-            <p:cNvPr id="85" name="Picture 20" descr=""/>
+            <p:cNvPr id="119" name="Picture 20" descr=""/>
             <p:cNvPicPr/>
             <p:nvPr/>
           </p:nvPicPr>
@@ -4516,7 +8946,7 @@
           <p:spPr>
             <a:xfrm>
               <a:off x="7882560" y="2198880"/>
-              <a:ext cx="1293840" cy="1316160"/>
+              <a:ext cx="1293120" cy="1315440"/>
             </a:xfrm>
             <a:prstGeom prst="rect">
               <a:avLst/>
@@ -4567,14 +8997,14 @@
       </p:grpSpPr>
       <p:sp>
         <p:nvSpPr>
-          <p:cNvPr id="31" name="Text 0"/>
+          <p:cNvPr id="41" name="Text 0"/>
           <p:cNvSpPr/>
           <p:nvPr/>
         </p:nvSpPr>
         <p:spPr>
           <a:xfrm>
             <a:off x="548640" y="384120"/>
-            <a:ext cx="9143280" cy="291960"/>
+            <a:ext cx="9142560" cy="291240"/>
           </a:xfrm>
           <a:prstGeom prst="rect">
             <a:avLst/>
@@ -4614,7 +9044,7 @@
               </a:rPr>
               <a:t>TARGET</a:t>
             </a:r>
-            <a:endParaRPr b="0" lang="fr-FR" sz="1200" strike="noStrike" u="none">
+            <a:endParaRPr b="0" lang="en-US" sz="1200" strike="noStrike" u="none">
               <a:solidFill>
                 <a:srgbClr val="000000"/>
               </a:solidFill>
@@ -4627,14 +9057,14 @@
       </p:sp>
       <p:sp>
         <p:nvSpPr>
-          <p:cNvPr id="32" name="Text 1"/>
+          <p:cNvPr id="42" name="Text 1"/>
           <p:cNvSpPr/>
           <p:nvPr/>
         </p:nvSpPr>
         <p:spPr>
           <a:xfrm>
             <a:off x="548640" y="658440"/>
-            <a:ext cx="11063520" cy="822240"/>
+            <a:ext cx="11062800" cy="821520"/>
           </a:xfrm>
           <a:prstGeom prst="rect">
             <a:avLst/>
@@ -4680,7 +9110,7 @@
               </a:rPr>
               <a:t>This school’s objective</a:t>
             </a:r>
-            <a:endParaRPr b="0" lang="fr-FR" sz="3000" strike="noStrike" u="none">
+            <a:endParaRPr b="0" lang="en-US" sz="3000" strike="noStrike" u="none">
               <a:solidFill>
                 <a:srgbClr val="000000"/>
               </a:solidFill>
@@ -4693,14 +9123,14 @@
       </p:sp>
       <p:sp>
         <p:nvSpPr>
-          <p:cNvPr id="33" name="Text 27"/>
+          <p:cNvPr id="43" name="Text 27"/>
           <p:cNvSpPr/>
           <p:nvPr/>
         </p:nvSpPr>
         <p:spPr>
           <a:xfrm>
             <a:off x="11185920" y="6446520"/>
-            <a:ext cx="456480" cy="273600"/>
+            <a:ext cx="455760" cy="272880"/>
           </a:xfrm>
           <a:prstGeom prst="rect">
             <a:avLst/>
@@ -4741,7 +9171,7 @@
               </a:rPr>
               <a:t>2</a:t>
             </a:r>
-            <a:endParaRPr b="0" lang="fr-FR" sz="900" strike="noStrike" u="none">
+            <a:endParaRPr b="0" lang="en-US" sz="900" strike="noStrike" u="none">
               <a:solidFill>
                 <a:srgbClr val="000000"/>
               </a:solidFill>
@@ -4754,14 +9184,14 @@
       </p:sp>
       <p:sp>
         <p:nvSpPr>
-          <p:cNvPr id="34" name=""/>
-          <p:cNvSpPr txBox="1"/>
+          <p:cNvPr id="44" name=""/>
+          <p:cNvSpPr/>
           <p:nvPr/>
         </p:nvSpPr>
         <p:spPr>
           <a:xfrm>
             <a:off x="540000" y="1480680"/>
-            <a:ext cx="11520000" cy="4639320"/>
+            <a:ext cx="11519280" cy="3015720"/>
           </a:xfrm>
           <a:prstGeom prst="rect">
             <a:avLst/>
@@ -4771,6 +9201,12 @@
             <a:noFill/>
           </a:ln>
         </p:spPr>
+        <p:style>
+          <a:lnRef idx="0"/>
+          <a:fillRef idx="0"/>
+          <a:effectRef idx="0"/>
+          <a:fontRef idx="minor"/>
+        </p:style>
         <p:txBody>
           <a:bodyPr lIns="90000" rIns="90000" tIns="45000" bIns="45000" anchor="t">
             <a:spAutoFit/>
@@ -4796,9 +9232,9 @@
                 <a:uFillTx/>
                 <a:latin typeface="Calibri"/>
               </a:rPr>
-              <a:t>Explore how AI can leverage simulated photon and neutron datasets to :</a:t>
-            </a:r>
-            <a:endParaRPr b="0" lang="fr-FR" sz="2400" strike="noStrike" u="none">
+              <a:t>Explore how AI can leverage simulated photon and neutron datasets to:</a:t>
+            </a:r>
+            <a:endParaRPr b="0" lang="en-US" sz="2400" strike="noStrike" u="none">
               <a:solidFill>
                 <a:srgbClr val="000000"/>
               </a:solidFill>
@@ -4819,7 +9255,7 @@
                 <a:tab algn="l" pos="0"/>
               </a:tabLst>
             </a:pPr>
-            <a:endParaRPr b="0" lang="fr-FR" sz="2400" strike="noStrike" u="none">
+            <a:endParaRPr b="0" lang="en-US" sz="2400" strike="noStrike" u="none">
               <a:solidFill>
                 <a:srgbClr val="000000"/>
               </a:solidFill>
@@ -4840,7 +9276,7 @@
                 <a:srgbClr val="000000"/>
               </a:buClr>
               <a:buFont typeface="OpenSymbol"/>
-              <a:buAutoNum type="arabicParenR"/>
+              <a:buAutoNum type="arabicPeriod"/>
               <a:tabLst>
                 <a:tab algn="l" pos="0"/>
               </a:tabLst>
@@ -4854,9 +9290,9 @@
                 <a:uFillTx/>
                 <a:latin typeface="Calibri"/>
               </a:rPr>
-              <a:t>solve inverse problems (measurement → parameters)</a:t>
-            </a:r>
-            <a:endParaRPr b="0" lang="fr-FR" sz="2400" strike="noStrike" u="none">
+              <a:t>Solve inverse problems (measurement → parameters)</a:t>
+            </a:r>
+            <a:endParaRPr b="0" lang="en-US" sz="2400" strike="noStrike" u="none">
               <a:solidFill>
                 <a:srgbClr val="000000"/>
               </a:solidFill>
@@ -4877,7 +9313,7 @@
                 <a:srgbClr val="000000"/>
               </a:buClr>
               <a:buFont typeface="OpenSymbol"/>
-              <a:buAutoNum type="arabicParenR"/>
+              <a:buAutoNum type="arabicPeriod"/>
               <a:tabLst>
                 <a:tab algn="l" pos="0"/>
               </a:tabLst>
@@ -4891,9 +9327,9 @@
                 <a:uFillTx/>
                 <a:latin typeface="Calibri"/>
               </a:rPr>
-              <a:t>optimize experiments (find best parameters)</a:t>
-            </a:r>
-            <a:endParaRPr b="0" lang="fr-FR" sz="2400" strike="noStrike" u="none">
+              <a:t>Optimize experiments (find best parameters)</a:t>
+            </a:r>
+            <a:endParaRPr b="0" lang="en-US" sz="2400" strike="noStrike" u="none">
               <a:solidFill>
                 <a:srgbClr val="000000"/>
               </a:solidFill>
@@ -4914,7 +9350,7 @@
                 <a:srgbClr val="000000"/>
               </a:buClr>
               <a:buFont typeface="OpenSymbol"/>
-              <a:buAutoNum type="arabicParenR"/>
+              <a:buAutoNum type="arabicPeriod"/>
               <a:tabLst>
                 <a:tab algn="l" pos="0"/>
               </a:tabLst>
@@ -4928,9 +9364,9 @@
                 <a:uFillTx/>
                 <a:latin typeface="Calibri"/>
               </a:rPr>
-              <a:t>train surrogate models (parameters → measurement)</a:t>
-            </a:r>
-            <a:endParaRPr b="0" lang="fr-FR" sz="2400" strike="noStrike" u="none">
+              <a:t>Train surrogate models (parameters → measurement)</a:t>
+            </a:r>
+            <a:endParaRPr b="0" lang="en-US" sz="2400" strike="noStrike" u="none">
               <a:solidFill>
                 <a:srgbClr val="000000"/>
               </a:solidFill>
@@ -4951,7 +9387,7 @@
                 <a:tab algn="l" pos="0"/>
               </a:tabLst>
             </a:pPr>
-            <a:endParaRPr b="0" lang="fr-FR" sz="2400" strike="noStrike" u="none">
+            <a:endParaRPr b="0" lang="en-US" sz="2400" strike="noStrike" u="none">
               <a:solidFill>
                 <a:srgbClr val="000000"/>
               </a:solidFill>
@@ -4981,9 +9417,9 @@
                 <a:uFillTx/>
                 <a:latin typeface="Calibri"/>
               </a:rPr>
-              <a:t>For all this, we encourage you to use AI chats.</a:t>
-            </a:r>
-            <a:endParaRPr b="0" lang="fr-FR" sz="2400" strike="noStrike" u="none">
+              <a:t>For all this, we encourage you to use AI chats/agents.</a:t>
+            </a:r>
+            <a:endParaRPr b="0" lang="en-US" sz="2400" strike="noStrike" u="none">
               <a:solidFill>
                 <a:srgbClr val="000000"/>
               </a:solidFill>
@@ -5033,14 +9469,14 @@
       </p:grpSpPr>
       <p:sp>
         <p:nvSpPr>
-          <p:cNvPr id="35" name="Text 12"/>
+          <p:cNvPr id="45" name="Text 12"/>
           <p:cNvSpPr/>
           <p:nvPr/>
         </p:nvSpPr>
         <p:spPr>
           <a:xfrm>
             <a:off x="548640" y="384120"/>
-            <a:ext cx="9143280" cy="291960"/>
+            <a:ext cx="9142560" cy="291240"/>
           </a:xfrm>
           <a:prstGeom prst="rect">
             <a:avLst/>
@@ -5080,7 +9516,7 @@
               </a:rPr>
               <a:t>X/n</a:t>
             </a:r>
-            <a:endParaRPr b="0" lang="fr-FR" sz="1200" strike="noStrike" u="none">
+            <a:endParaRPr b="0" lang="en-US" sz="1200" strike="noStrike" u="none">
               <a:solidFill>
                 <a:srgbClr val="000000"/>
               </a:solidFill>
@@ -5093,14 +9529,14 @@
       </p:sp>
       <p:sp>
         <p:nvSpPr>
-          <p:cNvPr id="36" name="Text 13"/>
+          <p:cNvPr id="46" name="Text 13"/>
           <p:cNvSpPr/>
           <p:nvPr/>
         </p:nvSpPr>
         <p:spPr>
           <a:xfrm>
             <a:off x="548640" y="658440"/>
-            <a:ext cx="11063520" cy="822240"/>
+            <a:ext cx="11062800" cy="821520"/>
           </a:xfrm>
           <a:prstGeom prst="rect">
             <a:avLst/>
@@ -5146,7 +9582,7 @@
               </a:rPr>
               <a:t>Why "Photons and Neutrons"?</a:t>
             </a:r>
-            <a:endParaRPr b="0" lang="fr-FR" sz="3000" strike="noStrike" u="none">
+            <a:endParaRPr b="0" lang="en-US" sz="3000" strike="noStrike" u="none">
               <a:solidFill>
                 <a:srgbClr val="000000"/>
               </a:solidFill>
@@ -5159,14 +9595,14 @@
       </p:sp>
       <p:sp>
         <p:nvSpPr>
-          <p:cNvPr id="37" name="Text 14"/>
+          <p:cNvPr id="47" name="Text 14"/>
           <p:cNvSpPr/>
           <p:nvPr/>
         </p:nvSpPr>
         <p:spPr>
           <a:xfrm>
             <a:off x="11185920" y="6446520"/>
-            <a:ext cx="456480" cy="273600"/>
+            <a:ext cx="455760" cy="272880"/>
           </a:xfrm>
           <a:prstGeom prst="rect">
             <a:avLst/>
@@ -5207,7 +9643,7 @@
               </a:rPr>
               <a:t>2</a:t>
             </a:r>
-            <a:endParaRPr b="0" lang="fr-FR" sz="900" strike="noStrike" u="none">
+            <a:endParaRPr b="0" lang="en-US" sz="900" strike="noStrike" u="none">
               <a:solidFill>
                 <a:srgbClr val="000000"/>
               </a:solidFill>
@@ -5220,14 +9656,14 @@
       </p:sp>
       <p:sp>
         <p:nvSpPr>
-          <p:cNvPr id="38" name=""/>
-          <p:cNvSpPr txBox="1"/>
+          <p:cNvPr id="48" name=""/>
+          <p:cNvSpPr/>
           <p:nvPr/>
         </p:nvSpPr>
         <p:spPr>
           <a:xfrm>
             <a:off x="476280" y="1930680"/>
-            <a:ext cx="11239560" cy="3412440"/>
+            <a:ext cx="11238840" cy="3381480"/>
           </a:xfrm>
           <a:prstGeom prst="rect">
             <a:avLst/>
@@ -5237,11 +9673,22 @@
             <a:noFill/>
           </a:ln>
         </p:spPr>
+        <p:style>
+          <a:lnRef idx="0"/>
+          <a:fillRef idx="0"/>
+          <a:effectRef idx="0"/>
+          <a:fontRef idx="minor"/>
+        </p:style>
         <p:txBody>
           <a:bodyPr lIns="90000" rIns="90000" tIns="45000" bIns="45000" anchor="t">
             <a:spAutoFit/>
           </a:bodyPr>
           <a:p>
+            <a:pPr>
+              <a:lnSpc>
+                <a:spcPct val="100000"/>
+              </a:lnSpc>
+            </a:pPr>
             <a:r>
               <a:rPr b="1" lang="fr-FR" sz="2400" strike="noStrike" u="none">
                 <a:solidFill>
@@ -5253,26 +9700,36 @@
               </a:rPr>
               <a:t>Shared X/n Physics and Simulation Capabilities</a:t>
             </a:r>
-            <a:endParaRPr b="0" lang="fr-FR" sz="2400" strike="noStrike" u="none">
-              <a:solidFill>
-                <a:srgbClr val="000000"/>
-              </a:solidFill>
-              <a:effectLst/>
-              <a:uFillTx/>
-              <a:latin typeface="Arial"/>
-            </a:endParaRPr>
-          </a:p>
-          <a:p>
-            <a:endParaRPr b="0" lang="fr-FR" sz="2400" strike="noStrike" u="none">
-              <a:solidFill>
-                <a:srgbClr val="000000"/>
-              </a:solidFill>
-              <a:effectLst/>
-              <a:uFillTx/>
-              <a:latin typeface="Arial"/>
-            </a:endParaRPr>
-          </a:p>
-          <a:p>
+            <a:endParaRPr b="0" lang="en-US" sz="2400" strike="noStrike" u="none">
+              <a:solidFill>
+                <a:srgbClr val="000000"/>
+              </a:solidFill>
+              <a:effectLst/>
+              <a:uFillTx/>
+              <a:latin typeface="Arial"/>
+            </a:endParaRPr>
+          </a:p>
+          <a:p>
+            <a:pPr>
+              <a:lnSpc>
+                <a:spcPct val="100000"/>
+              </a:lnSpc>
+            </a:pPr>
+            <a:endParaRPr b="0" lang="en-US" sz="2400" strike="noStrike" u="none">
+              <a:solidFill>
+                <a:srgbClr val="000000"/>
+              </a:solidFill>
+              <a:effectLst/>
+              <a:uFillTx/>
+              <a:latin typeface="Arial"/>
+            </a:endParaRPr>
+          </a:p>
+          <a:p>
+            <a:pPr>
+              <a:lnSpc>
+                <a:spcPct val="100000"/>
+              </a:lnSpc>
+            </a:pPr>
             <a:r>
               <a:rPr b="1" lang="fr-FR" sz="2400" strike="noStrike" u="none">
                 <a:solidFill>
@@ -5295,16 +9752,29 @@
               </a:rPr>
               <a:t>:</a:t>
             </a:r>
-            <a:endParaRPr b="0" lang="fr-FR" sz="2400" strike="noStrike" u="none">
-              <a:solidFill>
-                <a:srgbClr val="000000"/>
-              </a:solidFill>
-              <a:effectLst/>
-              <a:uFillTx/>
-              <a:latin typeface="Arial"/>
-            </a:endParaRPr>
-          </a:p>
-          <a:p>
+            <a:br>
+              <a:rPr sz="2400"/>
+            </a:br>
+            <a:endParaRPr b="0" lang="en-US" sz="2400" strike="noStrike" u="none">
+              <a:solidFill>
+                <a:srgbClr val="000000"/>
+              </a:solidFill>
+              <a:effectLst/>
+              <a:uFillTx/>
+              <a:latin typeface="Arial"/>
+            </a:endParaRPr>
+          </a:p>
+          <a:p>
+            <a:pPr marL="216000" indent="-216000">
+              <a:lnSpc>
+                <a:spcPct val="100000"/>
+              </a:lnSpc>
+              <a:buClr>
+                <a:srgbClr val="000000"/>
+              </a:buClr>
+              <a:buFont typeface="Wingdings" charset="2"/>
+              <a:buChar char=""/>
+            </a:pPr>
             <a:r>
               <a:rPr b="1" lang="fr-FR" sz="2100" strike="noStrike" u="none">
                 <a:solidFill>
@@ -5327,16 +9797,26 @@
               </a:rPr>
               <a:t>: Energy transfer to the material (e.g., photoelectric effect for X-rays, neutron capture).</a:t>
             </a:r>
-            <a:endParaRPr b="0" lang="fr-FR" sz="2100" strike="noStrike" u="none">
-              <a:solidFill>
-                <a:srgbClr val="000000"/>
-              </a:solidFill>
-              <a:effectLst/>
-              <a:uFillTx/>
-              <a:latin typeface="Arial"/>
-            </a:endParaRPr>
-          </a:p>
-          <a:p>
+            <a:endParaRPr b="0" lang="en-US" sz="2100" strike="noStrike" u="none">
+              <a:solidFill>
+                <a:srgbClr val="000000"/>
+              </a:solidFill>
+              <a:effectLst/>
+              <a:uFillTx/>
+              <a:latin typeface="Arial"/>
+            </a:endParaRPr>
+          </a:p>
+          <a:p>
+            <a:pPr marL="216000" indent="-216000">
+              <a:lnSpc>
+                <a:spcPct val="100000"/>
+              </a:lnSpc>
+              <a:buClr>
+                <a:srgbClr val="000000"/>
+              </a:buClr>
+              <a:buFont typeface="Wingdings" charset="2"/>
+              <a:buChar char=""/>
+            </a:pPr>
             <a:r>
               <a:rPr b="1" lang="fr-FR" sz="2100" strike="noStrike" u="none">
                 <a:solidFill>
@@ -5359,16 +9839,26 @@
               </a:rPr>
               <a:t>:</a:t>
             </a:r>
-            <a:endParaRPr b="0" lang="fr-FR" sz="2100" strike="noStrike" u="none">
-              <a:solidFill>
-                <a:srgbClr val="000000"/>
-              </a:solidFill>
-              <a:effectLst/>
-              <a:uFillTx/>
-              <a:latin typeface="Arial"/>
-            </a:endParaRPr>
-          </a:p>
-          <a:p>
+            <a:endParaRPr b="0" lang="en-US" sz="2100" strike="noStrike" u="none">
+              <a:solidFill>
+                <a:srgbClr val="000000"/>
+              </a:solidFill>
+              <a:effectLst/>
+              <a:uFillTx/>
+              <a:latin typeface="Arial"/>
+            </a:endParaRPr>
+          </a:p>
+          <a:p>
+            <a:pPr marL="360000">
+              <a:lnSpc>
+                <a:spcPct val="100000"/>
+              </a:lnSpc>
+              <a:buClr>
+                <a:srgbClr val="000000"/>
+              </a:buClr>
+              <a:buFont typeface="OpenSymbol"/>
+              <a:buChar char="►"/>
+            </a:pPr>
             <a:r>
               <a:rPr b="0" i="1" lang="fr-FR" sz="1800" strike="noStrike" u="none">
                 <a:solidFill>
@@ -5391,16 +9881,27 @@
               </a:rPr>
               <a:t>: Structure analysis (e.g., Bragg diffraction for X-rays, neutron diffraction).</a:t>
             </a:r>
-            <a:endParaRPr b="0" lang="fr-FR" sz="1800" strike="noStrike" u="none">
-              <a:solidFill>
-                <a:srgbClr val="000000"/>
-              </a:solidFill>
-              <a:effectLst/>
-              <a:uFillTx/>
-              <a:latin typeface="Arial"/>
-            </a:endParaRPr>
-          </a:p>
-          <a:p>
+            <a:endParaRPr b="0" lang="en-US" sz="1800" strike="noStrike" u="none">
+              <a:solidFill>
+                <a:srgbClr val="000000"/>
+              </a:solidFill>
+              <a:effectLst/>
+              <a:uFillTx/>
+              <a:latin typeface="Arial"/>
+              <a:ea typeface="Unifont"/>
+            </a:endParaRPr>
+          </a:p>
+          <a:p>
+            <a:pPr marL="360000">
+              <a:lnSpc>
+                <a:spcPct val="100000"/>
+              </a:lnSpc>
+              <a:buClr>
+                <a:srgbClr val="000000"/>
+              </a:buClr>
+              <a:buFont typeface="OpenSymbol"/>
+              <a:buChar char="►"/>
+            </a:pPr>
             <a:r>
               <a:rPr b="0" i="1" lang="fr-FR" sz="1800" strike="noStrike" u="none">
                 <a:solidFill>
@@ -5423,16 +9924,27 @@
               </a:rPr>
               <a:t>: Dynamics analysis (e.g., Raman scattering for X-rays, neutron inelastic scattering).</a:t>
             </a:r>
-            <a:endParaRPr b="0" lang="fr-FR" sz="1800" strike="noStrike" u="none">
-              <a:solidFill>
-                <a:srgbClr val="000000"/>
-              </a:solidFill>
-              <a:effectLst/>
-              <a:uFillTx/>
-              <a:latin typeface="Arial"/>
-            </a:endParaRPr>
-          </a:p>
-          <a:p>
+            <a:endParaRPr b="0" lang="en-US" sz="1800" strike="noStrike" u="none">
+              <a:solidFill>
+                <a:srgbClr val="000000"/>
+              </a:solidFill>
+              <a:effectLst/>
+              <a:uFillTx/>
+              <a:latin typeface="Arial"/>
+              <a:ea typeface="Unifont"/>
+            </a:endParaRPr>
+          </a:p>
+          <a:p>
+            <a:pPr marL="216000" indent="-216000">
+              <a:lnSpc>
+                <a:spcPct val="100000"/>
+              </a:lnSpc>
+              <a:buClr>
+                <a:srgbClr val="000000"/>
+              </a:buClr>
+              <a:buFont typeface="Wingdings" charset="2"/>
+              <a:buChar char=""/>
+            </a:pPr>
             <a:r>
               <a:rPr b="1" lang="fr-FR" sz="2100" strike="noStrike" u="none">
                 <a:solidFill>
@@ -5455,7 +9967,7 @@
               </a:rPr>
               <a:t>: Time-resolved studies (e.g., fluorescence, neutron activation).</a:t>
             </a:r>
-            <a:endParaRPr b="0" lang="fr-FR" sz="2100" strike="noStrike" u="none">
+            <a:endParaRPr b="0" lang="en-US" sz="2100" strike="noStrike" u="none">
               <a:solidFill>
                 <a:srgbClr val="000000"/>
               </a:solidFill>
@@ -5505,14 +10017,14 @@
       </p:grpSpPr>
       <p:sp>
         <p:nvSpPr>
-          <p:cNvPr id="39" name="Text 15"/>
+          <p:cNvPr id="49" name="Text 15"/>
           <p:cNvSpPr/>
           <p:nvPr/>
         </p:nvSpPr>
         <p:spPr>
           <a:xfrm>
             <a:off x="548640" y="384120"/>
-            <a:ext cx="9143280" cy="291960"/>
+            <a:ext cx="9142560" cy="291240"/>
           </a:xfrm>
           <a:prstGeom prst="rect">
             <a:avLst/>
@@ -5552,7 +10064,7 @@
               </a:rPr>
               <a:t>X/n</a:t>
             </a:r>
-            <a:endParaRPr b="0" lang="fr-FR" sz="1200" strike="noStrike" u="none">
+            <a:endParaRPr b="0" lang="en-US" sz="1200" strike="noStrike" u="none">
               <a:solidFill>
                 <a:srgbClr val="000000"/>
               </a:solidFill>
@@ -5565,14 +10077,14 @@
       </p:sp>
       <p:sp>
         <p:nvSpPr>
-          <p:cNvPr id="40" name="Text 16"/>
+          <p:cNvPr id="50" name="Text 16"/>
           <p:cNvSpPr/>
           <p:nvPr/>
         </p:nvSpPr>
         <p:spPr>
           <a:xfrm>
             <a:off x="548640" y="658440"/>
-            <a:ext cx="11063520" cy="822240"/>
+            <a:ext cx="11062800" cy="821520"/>
           </a:xfrm>
           <a:prstGeom prst="rect">
             <a:avLst/>
@@ -5618,7 +10130,7 @@
               </a:rPr>
               <a:t>Why "Photons and Neutrons"?</a:t>
             </a:r>
-            <a:endParaRPr b="0" lang="fr-FR" sz="3000" strike="noStrike" u="none">
+            <a:endParaRPr b="0" lang="en-US" sz="3000" strike="noStrike" u="none">
               <a:solidFill>
                 <a:srgbClr val="000000"/>
               </a:solidFill>
@@ -5631,14 +10143,14 @@
       </p:sp>
       <p:sp>
         <p:nvSpPr>
-          <p:cNvPr id="41" name="Text 17"/>
+          <p:cNvPr id="51" name="Text 17"/>
           <p:cNvSpPr/>
           <p:nvPr/>
         </p:nvSpPr>
         <p:spPr>
           <a:xfrm>
             <a:off x="11185920" y="6446520"/>
-            <a:ext cx="456480" cy="273600"/>
+            <a:ext cx="455760" cy="272880"/>
           </a:xfrm>
           <a:prstGeom prst="rect">
             <a:avLst/>
@@ -5679,7 +10191,7 @@
               </a:rPr>
               <a:t>2</a:t>
             </a:r>
-            <a:endParaRPr b="0" lang="fr-FR" sz="900" strike="noStrike" u="none">
+            <a:endParaRPr b="0" lang="en-US" sz="900" strike="noStrike" u="none">
               <a:solidFill>
                 <a:srgbClr val="000000"/>
               </a:solidFill>
@@ -5692,14 +10204,14 @@
       </p:sp>
       <p:sp>
         <p:nvSpPr>
-          <p:cNvPr id="42" name=""/>
-          <p:cNvSpPr txBox="1"/>
+          <p:cNvPr id="52" name=""/>
+          <p:cNvSpPr/>
           <p:nvPr/>
         </p:nvSpPr>
         <p:spPr>
           <a:xfrm>
             <a:off x="540000" y="1800000"/>
-            <a:ext cx="9477360" cy="4828680"/>
+            <a:ext cx="11118600" cy="4113000"/>
           </a:xfrm>
           <a:prstGeom prst="rect">
             <a:avLst/>
@@ -5709,11 +10221,22 @@
             <a:noFill/>
           </a:ln>
         </p:spPr>
+        <p:style>
+          <a:lnRef idx="0"/>
+          <a:fillRef idx="0"/>
+          <a:effectRef idx="0"/>
+          <a:fontRef idx="minor"/>
+        </p:style>
         <p:txBody>
           <a:bodyPr lIns="90000" rIns="90000" tIns="45000" bIns="45000" anchor="t">
             <a:spAutoFit/>
           </a:bodyPr>
           <a:p>
+            <a:pPr>
+              <a:lnSpc>
+                <a:spcPct val="100000"/>
+              </a:lnSpc>
+            </a:pPr>
             <a:r>
               <a:rPr b="1" lang="fr-FR" sz="2400" strike="noStrike" u="none">
                 <a:solidFill>
@@ -5736,16 +10259,29 @@
               </a:rPr>
               <a:t>:</a:t>
             </a:r>
-            <a:endParaRPr b="0" lang="fr-FR" sz="2400" strike="noStrike" u="none">
-              <a:solidFill>
-                <a:srgbClr val="000000"/>
-              </a:solidFill>
-              <a:effectLst/>
-              <a:uFillTx/>
-              <a:latin typeface="Arial"/>
-            </a:endParaRPr>
-          </a:p>
-          <a:p>
+            <a:br>
+              <a:rPr sz="2400"/>
+            </a:br>
+            <a:endParaRPr b="0" lang="en-US" sz="2400" strike="noStrike" u="none">
+              <a:solidFill>
+                <a:srgbClr val="000000"/>
+              </a:solidFill>
+              <a:effectLst/>
+              <a:uFillTx/>
+              <a:latin typeface="Arial"/>
+            </a:endParaRPr>
+          </a:p>
+          <a:p>
+            <a:pPr marL="216000" indent="-216000">
+              <a:lnSpc>
+                <a:spcPct val="100000"/>
+              </a:lnSpc>
+              <a:buClr>
+                <a:srgbClr val="000000"/>
+              </a:buClr>
+              <a:buFont typeface="Wingdings" charset="2"/>
+              <a:buChar char=""/>
+            </a:pPr>
             <a:r>
               <a:rPr b="1" lang="fr-FR" sz="2100" strike="noStrike" u="none">
                 <a:solidFill>
@@ -5768,16 +10304,26 @@
               </a:rPr>
               <a:t>: Monte Carlo simulator for neutron scattering instruments.</a:t>
             </a:r>
-            <a:endParaRPr b="0" lang="fr-FR" sz="2100" strike="noStrike" u="none">
-              <a:solidFill>
-                <a:srgbClr val="000000"/>
-              </a:solidFill>
-              <a:effectLst/>
-              <a:uFillTx/>
-              <a:latin typeface="Arial"/>
-            </a:endParaRPr>
-          </a:p>
-          <a:p>
+            <a:endParaRPr b="0" lang="en-US" sz="2100" strike="noStrike" u="none">
+              <a:solidFill>
+                <a:srgbClr val="000000"/>
+              </a:solidFill>
+              <a:effectLst/>
+              <a:uFillTx/>
+              <a:latin typeface="Arial"/>
+            </a:endParaRPr>
+          </a:p>
+          <a:p>
+            <a:pPr marL="216000" indent="-216000">
+              <a:lnSpc>
+                <a:spcPct val="100000"/>
+              </a:lnSpc>
+              <a:buClr>
+                <a:srgbClr val="000000"/>
+              </a:buClr>
+              <a:buFont typeface="Wingdings" charset="2"/>
+              <a:buChar char=""/>
+            </a:pPr>
             <a:r>
               <a:rPr b="1" lang="fr-FR" sz="2100" strike="noStrike" u="none">
                 <a:solidFill>
@@ -5800,16 +10346,26 @@
               </a:rPr>
               <a:t>: Monte Carlo simulator for X-ray instruments.</a:t>
             </a:r>
-            <a:endParaRPr b="0" lang="fr-FR" sz="2100" strike="noStrike" u="none">
-              <a:solidFill>
-                <a:srgbClr val="000000"/>
-              </a:solidFill>
-              <a:effectLst/>
-              <a:uFillTx/>
-              <a:latin typeface="Arial"/>
-            </a:endParaRPr>
-          </a:p>
-          <a:p>
+            <a:endParaRPr b="0" lang="en-US" sz="2100" strike="noStrike" u="none">
+              <a:solidFill>
+                <a:srgbClr val="000000"/>
+              </a:solidFill>
+              <a:effectLst/>
+              <a:uFillTx/>
+              <a:latin typeface="Arial"/>
+            </a:endParaRPr>
+          </a:p>
+          <a:p>
+            <a:pPr marL="216000" indent="-216000">
+              <a:lnSpc>
+                <a:spcPct val="100000"/>
+              </a:lnSpc>
+              <a:buClr>
+                <a:srgbClr val="000000"/>
+              </a:buClr>
+              <a:buFont typeface="Wingdings" charset="2"/>
+              <a:buChar char=""/>
+            </a:pPr>
             <a:r>
               <a:rPr b="0" lang="fr-FR" sz="2100" strike="noStrike" u="none">
                 <a:solidFill>
@@ -5821,26 +10377,36 @@
               </a:rPr>
               <a:t>Both enable realistic modeling of beamlines, detectors, and sample interactions.</a:t>
             </a:r>
-            <a:endParaRPr b="0" lang="fr-FR" sz="2100" strike="noStrike" u="none">
-              <a:solidFill>
-                <a:srgbClr val="000000"/>
-              </a:solidFill>
-              <a:effectLst/>
-              <a:uFillTx/>
-              <a:latin typeface="Arial"/>
-            </a:endParaRPr>
-          </a:p>
-          <a:p>
-            <a:endParaRPr b="0" lang="fr-FR" sz="2100" strike="noStrike" u="none">
-              <a:solidFill>
-                <a:srgbClr val="000000"/>
-              </a:solidFill>
-              <a:effectLst/>
-              <a:uFillTx/>
-              <a:latin typeface="Arial"/>
-            </a:endParaRPr>
-          </a:p>
-          <a:p>
+            <a:endParaRPr b="0" lang="en-US" sz="2100" strike="noStrike" u="none">
+              <a:solidFill>
+                <a:srgbClr val="000000"/>
+              </a:solidFill>
+              <a:effectLst/>
+              <a:uFillTx/>
+              <a:latin typeface="Arial"/>
+            </a:endParaRPr>
+          </a:p>
+          <a:p>
+            <a:pPr>
+              <a:lnSpc>
+                <a:spcPct val="100000"/>
+              </a:lnSpc>
+            </a:pPr>
+            <a:endParaRPr b="0" lang="en-US" sz="2100" strike="noStrike" u="none">
+              <a:solidFill>
+                <a:srgbClr val="000000"/>
+              </a:solidFill>
+              <a:effectLst/>
+              <a:uFillTx/>
+              <a:latin typeface="Arial"/>
+            </a:endParaRPr>
+          </a:p>
+          <a:p>
+            <a:pPr>
+              <a:lnSpc>
+                <a:spcPct val="100000"/>
+              </a:lnSpc>
+            </a:pPr>
             <a:r>
               <a:rPr b="1" lang="fr-FR" sz="2400" strike="noStrike" u="none">
                 <a:solidFill>
@@ -5863,16 +10429,29 @@
               </a:rPr>
               <a:t>:</a:t>
             </a:r>
-            <a:endParaRPr b="0" lang="fr-FR" sz="2400" strike="noStrike" u="none">
-              <a:solidFill>
-                <a:srgbClr val="000000"/>
-              </a:solidFill>
-              <a:effectLst/>
-              <a:uFillTx/>
-              <a:latin typeface="Arial"/>
-            </a:endParaRPr>
-          </a:p>
-          <a:p>
+            <a:br>
+              <a:rPr sz="2400"/>
+            </a:br>
+            <a:endParaRPr b="0" lang="en-US" sz="2400" strike="noStrike" u="none">
+              <a:solidFill>
+                <a:srgbClr val="000000"/>
+              </a:solidFill>
+              <a:effectLst/>
+              <a:uFillTx/>
+              <a:latin typeface="Arial"/>
+            </a:endParaRPr>
+          </a:p>
+          <a:p>
+            <a:pPr marL="216000" indent="-216000">
+              <a:lnSpc>
+                <a:spcPct val="100000"/>
+              </a:lnSpc>
+              <a:buClr>
+                <a:srgbClr val="000000"/>
+              </a:buClr>
+              <a:buFont typeface="Wingdings" charset="2"/>
+              <a:buChar char=""/>
+            </a:pPr>
             <a:r>
               <a:rPr b="1" lang="fr-FR" sz="2100" strike="noStrike" u="none">
                 <a:solidFill>
@@ -5895,16 +10474,26 @@
               </a:rPr>
               <a:t>: Capture complex instrument geometries and material responses.</a:t>
             </a:r>
-            <a:endParaRPr b="0" lang="fr-FR" sz="2100" strike="noStrike" u="none">
-              <a:solidFill>
-                <a:srgbClr val="000000"/>
-              </a:solidFill>
-              <a:effectLst/>
-              <a:uFillTx/>
-              <a:latin typeface="Arial"/>
-            </a:endParaRPr>
-          </a:p>
-          <a:p>
+            <a:endParaRPr b="0" lang="en-US" sz="2100" strike="noStrike" u="none">
+              <a:solidFill>
+                <a:srgbClr val="000000"/>
+              </a:solidFill>
+              <a:effectLst/>
+              <a:uFillTx/>
+              <a:latin typeface="Arial"/>
+            </a:endParaRPr>
+          </a:p>
+          <a:p>
+            <a:pPr marL="216000" indent="-216000">
+              <a:lnSpc>
+                <a:spcPct val="100000"/>
+              </a:lnSpc>
+              <a:buClr>
+                <a:srgbClr val="000000"/>
+              </a:buClr>
+              <a:buFont typeface="Wingdings" charset="2"/>
+              <a:buChar char=""/>
+            </a:pPr>
             <a:r>
               <a:rPr b="1" lang="fr-FR" sz="2100" strike="noStrike" u="none">
                 <a:solidFill>
@@ -5927,16 +10516,26 @@
               </a:rPr>
               <a:t>: Test hypothetical setups.</a:t>
             </a:r>
-            <a:endParaRPr b="0" lang="fr-FR" sz="2100" strike="noStrike" u="none">
-              <a:solidFill>
-                <a:srgbClr val="000000"/>
-              </a:solidFill>
-              <a:effectLst/>
-              <a:uFillTx/>
-              <a:latin typeface="Arial"/>
-            </a:endParaRPr>
-          </a:p>
-          <a:p>
+            <a:endParaRPr b="0" lang="en-US" sz="2100" strike="noStrike" u="none">
+              <a:solidFill>
+                <a:srgbClr val="000000"/>
+              </a:solidFill>
+              <a:effectLst/>
+              <a:uFillTx/>
+              <a:latin typeface="Arial"/>
+            </a:endParaRPr>
+          </a:p>
+          <a:p>
+            <a:pPr marL="216000" indent="-216000">
+              <a:lnSpc>
+                <a:spcPct val="100000"/>
+              </a:lnSpc>
+              <a:buClr>
+                <a:srgbClr val="000000"/>
+              </a:buClr>
+              <a:buFont typeface="Wingdings" charset="2"/>
+              <a:buChar char=""/>
+            </a:pPr>
             <a:r>
               <a:rPr b="1" lang="fr-FR" sz="2100" strike="noStrike" u="none">
                 <a:solidFill>
@@ -5959,17 +10558,22 @@
               </a:rPr>
               <a:t>: Avoid expensive trial-and-error on real instruments/BL.</a:t>
             </a:r>
-            <a:endParaRPr b="0" lang="fr-FR" sz="2100" strike="noStrike" u="none">
-              <a:solidFill>
-                <a:srgbClr val="000000"/>
-              </a:solidFill>
-              <a:effectLst/>
-              <a:uFillTx/>
-              <a:latin typeface="Arial"/>
-            </a:endParaRPr>
-          </a:p>
-          <a:p>
-            <a:endParaRPr b="0" lang="fr-FR" sz="2100" strike="noStrike" u="none">
+            <a:endParaRPr b="0" lang="en-US" sz="2100" strike="noStrike" u="none">
+              <a:solidFill>
+                <a:srgbClr val="000000"/>
+              </a:solidFill>
+              <a:effectLst/>
+              <a:uFillTx/>
+              <a:latin typeface="Arial"/>
+            </a:endParaRPr>
+          </a:p>
+          <a:p>
+            <a:pPr>
+              <a:lnSpc>
+                <a:spcPct val="100000"/>
+              </a:lnSpc>
+            </a:pPr>
+            <a:endParaRPr b="0" lang="en-US" sz="2100" strike="noStrike" u="none">
               <a:solidFill>
                 <a:srgbClr val="000000"/>
               </a:solidFill>
@@ -6019,14 +10623,14 @@
       </p:grpSpPr>
       <p:sp>
         <p:nvSpPr>
-          <p:cNvPr id="43" name="Text 18"/>
+          <p:cNvPr id="53" name="Text 18"/>
           <p:cNvSpPr/>
           <p:nvPr/>
         </p:nvSpPr>
         <p:spPr>
           <a:xfrm>
             <a:off x="548640" y="384120"/>
-            <a:ext cx="9143280" cy="291960"/>
+            <a:ext cx="9142560" cy="291240"/>
           </a:xfrm>
           <a:prstGeom prst="rect">
             <a:avLst/>
@@ -6066,7 +10670,7 @@
               </a:rPr>
               <a:t>Realistic datasets</a:t>
             </a:r>
-            <a:endParaRPr b="0" lang="fr-FR" sz="1200" strike="noStrike" u="none">
+            <a:endParaRPr b="0" lang="en-US" sz="1200" strike="noStrike" u="none">
               <a:solidFill>
                 <a:srgbClr val="000000"/>
               </a:solidFill>
@@ -6079,14 +10683,14 @@
       </p:sp>
       <p:sp>
         <p:nvSpPr>
-          <p:cNvPr id="44" name="Text 19"/>
+          <p:cNvPr id="54" name="Text 19"/>
           <p:cNvSpPr/>
           <p:nvPr/>
         </p:nvSpPr>
         <p:spPr>
           <a:xfrm>
             <a:off x="548640" y="658440"/>
-            <a:ext cx="11063520" cy="822240"/>
+            <a:ext cx="11062800" cy="821520"/>
           </a:xfrm>
           <a:prstGeom prst="rect">
             <a:avLst/>
@@ -6132,7 +10736,7 @@
               </a:rPr>
               <a:t>Why Realistic AI Datasets?</a:t>
             </a:r>
-            <a:endParaRPr b="0" lang="fr-FR" sz="3000" strike="noStrike" u="none">
+            <a:endParaRPr b="0" lang="en-US" sz="3000" strike="noStrike" u="none">
               <a:solidFill>
                 <a:srgbClr val="000000"/>
               </a:solidFill>
@@ -6145,14 +10749,14 @@
       </p:sp>
       <p:sp>
         <p:nvSpPr>
-          <p:cNvPr id="45" name="Text 20"/>
+          <p:cNvPr id="55" name="Text 20"/>
           <p:cNvSpPr/>
           <p:nvPr/>
         </p:nvSpPr>
         <p:spPr>
           <a:xfrm>
             <a:off x="11185920" y="6446520"/>
-            <a:ext cx="456480" cy="273600"/>
+            <a:ext cx="455760" cy="272880"/>
           </a:xfrm>
           <a:prstGeom prst="rect">
             <a:avLst/>
@@ -6193,7 +10797,7 @@
               </a:rPr>
               <a:t>2</a:t>
             </a:r>
-            <a:endParaRPr b="0" lang="fr-FR" sz="900" strike="noStrike" u="none">
+            <a:endParaRPr b="0" lang="en-US" sz="900" strike="noStrike" u="none">
               <a:solidFill>
                 <a:srgbClr val="000000"/>
               </a:solidFill>
@@ -6206,14 +10810,14 @@
       </p:sp>
       <p:sp>
         <p:nvSpPr>
-          <p:cNvPr id="46" name=""/>
-          <p:cNvSpPr txBox="1"/>
+          <p:cNvPr id="56" name=""/>
+          <p:cNvSpPr/>
           <p:nvPr/>
         </p:nvSpPr>
         <p:spPr>
           <a:xfrm>
             <a:off x="540000" y="1800000"/>
-            <a:ext cx="9477360" cy="3488040"/>
+            <a:ext cx="10661400" cy="3807720"/>
           </a:xfrm>
           <a:prstGeom prst="rect">
             <a:avLst/>
@@ -6223,6 +10827,12 @@
             <a:noFill/>
           </a:ln>
         </p:spPr>
+        <p:style>
+          <a:lnRef idx="0"/>
+          <a:fillRef idx="0"/>
+          <a:effectRef idx="0"/>
+          <a:fontRef idx="minor"/>
+        </p:style>
         <p:txBody>
           <a:bodyPr lIns="90000" rIns="90000" tIns="45000" bIns="45000" anchor="t">
             <a:spAutoFit/>
@@ -6250,7 +10860,10 @@
               </a:rPr>
               <a:t>The Problem with Experimental Data</a:t>
             </a:r>
-            <a:endParaRPr b="0" lang="fr-FR" sz="2400" strike="noStrike" u="none">
+            <a:br>
+              <a:rPr sz="2400"/>
+            </a:br>
+            <a:endParaRPr b="0" lang="en-US" sz="2400" strike="noStrike" u="none">
               <a:solidFill>
                 <a:srgbClr val="000000"/>
               </a:solidFill>
@@ -6298,7 +10911,7 @@
               </a:rPr>
               <a:t>:</a:t>
             </a:r>
-            <a:endParaRPr b="0" lang="fr-FR" sz="2400" strike="noStrike" u="none">
+            <a:endParaRPr b="0" lang="en-US" sz="2400" strike="noStrike" u="none">
               <a:solidFill>
                 <a:srgbClr val="000000"/>
               </a:solidFill>
@@ -6335,7 +10948,7 @@
               </a:rPr>
               <a:t>Raw data often lacks metadata (e.g., sample composition, instrument settings).</a:t>
             </a:r>
-            <a:endParaRPr b="0" lang="fr-FR" sz="2100" strike="noStrike" u="none">
+            <a:endParaRPr b="0" lang="en-US" sz="2100" strike="noStrike" u="none">
               <a:solidFill>
                 <a:srgbClr val="000000"/>
               </a:solidFill>
@@ -6372,7 +10985,21 @@
               </a:rPr>
               <a:t>Manual annotation is time-consuming and error-prone.</a:t>
             </a:r>
-            <a:endParaRPr b="0" lang="fr-FR" sz="2100" strike="noStrike" u="none">
+            <a:br>
+              <a:rPr sz="2100"/>
+            </a:br>
+            <a:r>
+              <a:rPr b="0" lang="fr-FR" sz="2100" strike="noStrike" u="none">
+                <a:solidFill>
+                  <a:schemeClr val="dk1"/>
+                </a:solidFill>
+                <a:effectLst/>
+                <a:uFillTx/>
+                <a:latin typeface="Calibri"/>
+              </a:rPr>
+              <a:t> </a:t>
+            </a:r>
+            <a:endParaRPr b="0" lang="en-US" sz="2100" strike="noStrike" u="none">
               <a:solidFill>
                 <a:srgbClr val="000000"/>
               </a:solidFill>
@@ -6420,7 +11047,7 @@
               </a:rPr>
               <a:t>:</a:t>
             </a:r>
-            <a:endParaRPr b="0" lang="fr-FR" sz="2400" strike="noStrike" u="none">
+            <a:endParaRPr b="0" lang="en-US" sz="2400" strike="noStrike" u="none">
               <a:solidFill>
                 <a:srgbClr val="000000"/>
               </a:solidFill>
@@ -6455,9 +11082,9 @@
                 <a:uFillTx/>
                 <a:latin typeface="Calibri"/>
               </a:rPr>
-              <a:t>Papers describe experimental conditions, but formats vary widely.</a:t>
-            </a:r>
-            <a:endParaRPr b="0" lang="fr-FR" sz="2100" strike="noStrike" u="none">
+              <a:t>Publications describe experimental conditions, but formats vary widely.</a:t>
+            </a:r>
+            <a:endParaRPr b="0" lang="en-US" sz="2100" strike="noStrike" u="none">
               <a:solidFill>
                 <a:srgbClr val="000000"/>
               </a:solidFill>
@@ -6494,7 +11121,7 @@
               </a:rPr>
               <a:t>Not machine-readable or standardized for AI training.</a:t>
             </a:r>
-            <a:endParaRPr b="0" lang="fr-FR" sz="2100" strike="noStrike" u="none">
+            <a:endParaRPr b="0" lang="en-US" sz="2100" strike="noStrike" u="none">
               <a:solidFill>
                 <a:srgbClr val="000000"/>
               </a:solidFill>
@@ -6544,14 +11171,14 @@
       </p:grpSpPr>
       <p:sp>
         <p:nvSpPr>
-          <p:cNvPr id="47" name="Text 21"/>
+          <p:cNvPr id="57" name="Text 21"/>
           <p:cNvSpPr/>
           <p:nvPr/>
         </p:nvSpPr>
         <p:spPr>
           <a:xfrm>
             <a:off x="548640" y="384120"/>
-            <a:ext cx="9143280" cy="291960"/>
+            <a:ext cx="9142560" cy="291240"/>
           </a:xfrm>
           <a:prstGeom prst="rect">
             <a:avLst/>
@@ -6591,7 +11218,7 @@
               </a:rPr>
               <a:t>Realistic datasets</a:t>
             </a:r>
-            <a:endParaRPr b="0" lang="fr-FR" sz="1200" strike="noStrike" u="none">
+            <a:endParaRPr b="0" lang="en-US" sz="1200" strike="noStrike" u="none">
               <a:solidFill>
                 <a:srgbClr val="000000"/>
               </a:solidFill>
@@ -6604,14 +11231,14 @@
       </p:sp>
       <p:sp>
         <p:nvSpPr>
-          <p:cNvPr id="48" name="Text 22"/>
+          <p:cNvPr id="58" name="Text 22"/>
           <p:cNvSpPr/>
           <p:nvPr/>
         </p:nvSpPr>
         <p:spPr>
           <a:xfrm>
             <a:off x="548640" y="658440"/>
-            <a:ext cx="11063520" cy="822240"/>
+            <a:ext cx="11062800" cy="821520"/>
           </a:xfrm>
           <a:prstGeom prst="rect">
             <a:avLst/>
@@ -6657,7 +11284,7 @@
               </a:rPr>
               <a:t>Why Realistic AI Datasets?</a:t>
             </a:r>
-            <a:endParaRPr b="0" lang="fr-FR" sz="3000" strike="noStrike" u="none">
+            <a:endParaRPr b="0" lang="en-US" sz="3000" strike="noStrike" u="none">
               <a:solidFill>
                 <a:srgbClr val="000000"/>
               </a:solidFill>
@@ -6670,14 +11297,14 @@
       </p:sp>
       <p:sp>
         <p:nvSpPr>
-          <p:cNvPr id="49" name="Text 23"/>
+          <p:cNvPr id="59" name="Text 23"/>
           <p:cNvSpPr/>
           <p:nvPr/>
         </p:nvSpPr>
         <p:spPr>
           <a:xfrm>
             <a:off x="11185920" y="6446520"/>
-            <a:ext cx="456480" cy="273600"/>
+            <a:ext cx="455760" cy="272880"/>
           </a:xfrm>
           <a:prstGeom prst="rect">
             <a:avLst/>
@@ -6718,7 +11345,7 @@
               </a:rPr>
               <a:t>2</a:t>
             </a:r>
-            <a:endParaRPr b="0" lang="fr-FR" sz="900" strike="noStrike" u="none">
+            <a:endParaRPr b="0" lang="en-US" sz="900" strike="noStrike" u="none">
               <a:solidFill>
                 <a:srgbClr val="000000"/>
               </a:solidFill>
@@ -6731,14 +11358,14 @@
       </p:sp>
       <p:sp>
         <p:nvSpPr>
-          <p:cNvPr id="50" name=""/>
-          <p:cNvSpPr txBox="1"/>
+          <p:cNvPr id="60" name=""/>
+          <p:cNvSpPr/>
           <p:nvPr/>
         </p:nvSpPr>
         <p:spPr>
           <a:xfrm>
             <a:off x="540000" y="1800000"/>
-            <a:ext cx="9477360" cy="4605120"/>
+            <a:ext cx="9476640" cy="4661640"/>
           </a:xfrm>
           <a:prstGeom prst="rect">
             <a:avLst/>
@@ -6748,6 +11375,12 @@
             <a:noFill/>
           </a:ln>
         </p:spPr>
+        <p:style>
+          <a:lnRef idx="0"/>
+          <a:fillRef idx="0"/>
+          <a:effectRef idx="0"/>
+          <a:fontRef idx="minor"/>
+        </p:style>
         <p:txBody>
           <a:bodyPr lIns="90000" rIns="90000" tIns="45000" bIns="45000" anchor="t">
             <a:spAutoFit/>
@@ -6775,7 +11408,10 @@
               </a:rPr>
               <a:t>The Power of Simulated Data</a:t>
             </a:r>
-            <a:endParaRPr b="0" lang="fr-FR" sz="2400" strike="noStrike" u="none">
+            <a:br>
+              <a:rPr sz="2400"/>
+            </a:br>
+            <a:endParaRPr b="0" lang="en-US" sz="2400" strike="noStrike" u="none">
               <a:solidFill>
                 <a:srgbClr val="000000"/>
               </a:solidFill>
@@ -6823,7 +11459,7 @@
               </a:rPr>
               <a:t>:</a:t>
             </a:r>
-            <a:endParaRPr b="0" lang="fr-FR" sz="2400" strike="noStrike" u="none">
+            <a:endParaRPr b="0" lang="en-US" sz="2400" strike="noStrike" u="none">
               <a:solidFill>
                 <a:srgbClr val="000000"/>
               </a:solidFill>
@@ -6860,7 +11496,7 @@
               </a:rPr>
               <a:t>Every input (e.g., sample thickness, detector angle) is known and adjustable.</a:t>
             </a:r>
-            <a:endParaRPr b="0" lang="fr-FR" sz="2100" strike="noStrike" u="none">
+            <a:endParaRPr b="0" lang="en-US" sz="2100" strike="noStrike" u="none">
               <a:solidFill>
                 <a:srgbClr val="000000"/>
               </a:solidFill>
@@ -6897,7 +11533,7 @@
               </a:rPr>
               <a:t>Outputs (e.g., scattering patterns, spectra) are directly linked to inputs.</a:t>
             </a:r>
-            <a:endParaRPr b="0" lang="fr-FR" sz="2100" strike="noStrike" u="none">
+            <a:endParaRPr b="0" lang="en-US" sz="2100" strike="noStrike" u="none">
               <a:solidFill>
                 <a:srgbClr val="000000"/>
               </a:solidFill>
@@ -6945,7 +11581,28 @@
               </a:rPr>
               <a:t>:</a:t>
             </a:r>
-            <a:endParaRPr b="0" lang="fr-FR" sz="2400" strike="noStrike" u="none">
+            <a:endParaRPr b="0" lang="en-US" sz="2400" strike="noStrike" u="none">
+              <a:solidFill>
+                <a:srgbClr val="000000"/>
+              </a:solidFill>
+              <a:effectLst/>
+              <a:uFillTx/>
+              <a:latin typeface="Arial"/>
+            </a:endParaRPr>
+          </a:p>
+          <a:p>
+            <a:pPr defTabSz="343080">
+              <a:lnSpc>
+                <a:spcPct val="100000"/>
+              </a:lnSpc>
+              <a:spcBef>
+                <a:spcPts val="479"/>
+              </a:spcBef>
+              <a:tabLst>
+                <a:tab algn="l" pos="0"/>
+              </a:tabLst>
+            </a:pPr>
+            <a:endParaRPr b="0" lang="en-US" sz="2400" strike="noStrike" u="none">
               <a:solidFill>
                 <a:srgbClr val="000000"/>
               </a:solidFill>
@@ -6972,27 +11629,27 @@
               </a:tabLst>
             </a:pPr>
             <a:r>
-              <a:rPr b="0" lang="fr-FR" sz="2100" strike="noStrike" u="none">
-                <a:solidFill>
-                  <a:schemeClr val="dk1"/>
+              <a:rPr b="1" lang="fr-FR" sz="2100" strike="noStrike" u="none">
+                <a:solidFill>
+                  <a:srgbClr val="ff00ff"/>
                 </a:solidFill>
                 <a:effectLst/>
                 <a:uFillTx/>
                 <a:latin typeface="Courier New"/>
               </a:rPr>
-              <a:t>Parameters → [Simulation (McStas/McXtrace)] → Virtual “Measurement”</a:t>
-            </a:r>
-            <a:endParaRPr b="0" lang="fr-FR" sz="2100" strike="noStrike" u="none">
-              <a:solidFill>
-                <a:srgbClr val="000000"/>
-              </a:solidFill>
-              <a:effectLst/>
-              <a:uFillTx/>
-              <a:latin typeface="Arial"/>
-            </a:endParaRPr>
-          </a:p>
-          <a:p>
-            <a:pPr marL="343080" defTabSz="343080">
+              <a:t>Parameters → [Simulation] → Virtual “Measurement”</a:t>
+            </a:r>
+            <a:endParaRPr b="0" lang="en-US" sz="2100" strike="noStrike" u="none">
+              <a:solidFill>
+                <a:srgbClr val="000000"/>
+              </a:solidFill>
+              <a:effectLst/>
+              <a:uFillTx/>
+              <a:latin typeface="Arial"/>
+            </a:endParaRPr>
+          </a:p>
+          <a:p>
+            <a:pPr defTabSz="343080">
               <a:lnSpc>
                 <a:spcPct val="100000"/>
               </a:lnSpc>
@@ -7003,18 +11660,7 @@
                 <a:tab algn="l" pos="0"/>
               </a:tabLst>
             </a:pPr>
-            <a:r>
-              <a:rPr b="0" lang="fr-FR" sz="2100" strike="noStrike" u="none">
-                <a:solidFill>
-                  <a:schemeClr val="dk1"/>
-                </a:solidFill>
-                <a:effectLst/>
-                <a:uFillTx/>
-                <a:latin typeface="Calibri"/>
-              </a:rPr>
-              <a:t>Example: Simulate an experiment with varying incident energy.</a:t>
-            </a:r>
-            <a:endParaRPr b="0" lang="fr-FR" sz="2100" strike="noStrike" u="none">
+            <a:endParaRPr b="0" lang="en-US" sz="2100" strike="noStrike" u="none">
               <a:solidFill>
                 <a:srgbClr val="000000"/>
               </a:solidFill>
@@ -7041,6 +11687,17 @@
               </a:tabLst>
             </a:pPr>
             <a:r>
+              <a:rPr b="0" lang="fr-FR" sz="2100" strike="noStrike" u="none">
+                <a:solidFill>
+                  <a:schemeClr val="dk1"/>
+                </a:solidFill>
+                <a:effectLst/>
+                <a:uFillTx/>
+                <a:latin typeface="Calibri"/>
+              </a:rPr>
+              <a:t>Example: Simulate an experiment with varying incident energy.</a:t>
+            </a:r>
+            <a:r>
               <a:rPr b="0" lang="fr-FR" sz="2400" strike="noStrike" u="none">
                 <a:solidFill>
                   <a:schemeClr val="dk1"/>
@@ -7051,7 +11708,7 @@
               </a:rPr>
               <a:t> </a:t>
             </a:r>
-            <a:endParaRPr b="0" lang="fr-FR" sz="2400" strike="noStrike" u="none">
+            <a:endParaRPr b="0" lang="en-US" sz="2400" strike="noStrike" u="none">
               <a:solidFill>
                 <a:srgbClr val="000000"/>
               </a:solidFill>
@@ -7101,14 +11758,14 @@
       </p:grpSpPr>
       <p:sp>
         <p:nvSpPr>
-          <p:cNvPr id="51" name="Text 24"/>
+          <p:cNvPr id="61" name="Text 24"/>
           <p:cNvSpPr/>
           <p:nvPr/>
         </p:nvSpPr>
         <p:spPr>
           <a:xfrm>
             <a:off x="548640" y="384120"/>
-            <a:ext cx="9143280" cy="291960"/>
+            <a:ext cx="9142560" cy="291240"/>
           </a:xfrm>
           <a:prstGeom prst="rect">
             <a:avLst/>
@@ -7148,7 +11805,7 @@
               </a:rPr>
               <a:t>Realistic datasets</a:t>
             </a:r>
-            <a:endParaRPr b="0" lang="fr-FR" sz="1200" strike="noStrike" u="none">
+            <a:endParaRPr b="0" lang="en-US" sz="1200" strike="noStrike" u="none">
               <a:solidFill>
                 <a:srgbClr val="000000"/>
               </a:solidFill>
@@ -7161,14 +11818,14 @@
       </p:sp>
       <p:sp>
         <p:nvSpPr>
-          <p:cNvPr id="52" name="Text 25"/>
+          <p:cNvPr id="62" name="Text 25"/>
           <p:cNvSpPr/>
           <p:nvPr/>
         </p:nvSpPr>
         <p:spPr>
           <a:xfrm>
             <a:off x="548640" y="658440"/>
-            <a:ext cx="11063520" cy="822240"/>
+            <a:ext cx="11062800" cy="821520"/>
           </a:xfrm>
           <a:prstGeom prst="rect">
             <a:avLst/>
@@ -7214,7 +11871,7 @@
               </a:rPr>
               <a:t>Why Realistic AI Datasets?</a:t>
             </a:r>
-            <a:endParaRPr b="0" lang="fr-FR" sz="3000" strike="noStrike" u="none">
+            <a:endParaRPr b="0" lang="en-US" sz="3000" strike="noStrike" u="none">
               <a:solidFill>
                 <a:srgbClr val="000000"/>
               </a:solidFill>
@@ -7227,14 +11884,14 @@
       </p:sp>
       <p:sp>
         <p:nvSpPr>
-          <p:cNvPr id="53" name="Text 26"/>
+          <p:cNvPr id="63" name="Text 26"/>
           <p:cNvSpPr/>
           <p:nvPr/>
         </p:nvSpPr>
         <p:spPr>
           <a:xfrm>
             <a:off x="11185920" y="6446520"/>
-            <a:ext cx="456480" cy="273600"/>
+            <a:ext cx="455760" cy="272880"/>
           </a:xfrm>
           <a:prstGeom prst="rect">
             <a:avLst/>
@@ -7275,7 +11932,7 @@
               </a:rPr>
               <a:t>2</a:t>
             </a:r>
-            <a:endParaRPr b="0" lang="fr-FR" sz="900" strike="noStrike" u="none">
+            <a:endParaRPr b="0" lang="en-US" sz="900" strike="noStrike" u="none">
               <a:solidFill>
                 <a:srgbClr val="000000"/>
               </a:solidFill>
@@ -7288,14 +11945,14 @@
       </p:sp>
       <p:sp>
         <p:nvSpPr>
-          <p:cNvPr id="54" name=""/>
-          <p:cNvSpPr txBox="1"/>
+          <p:cNvPr id="64" name=""/>
+          <p:cNvSpPr/>
           <p:nvPr/>
         </p:nvSpPr>
         <p:spPr>
           <a:xfrm>
             <a:off x="540000" y="1800000"/>
-            <a:ext cx="9477360" cy="3100320"/>
+            <a:ext cx="9476640" cy="3525840"/>
           </a:xfrm>
           <a:prstGeom prst="rect">
             <a:avLst/>
@@ -7305,11 +11962,63 @@
             <a:noFill/>
           </a:ln>
         </p:spPr>
+        <p:style>
+          <a:lnRef idx="0"/>
+          <a:fillRef idx="0"/>
+          <a:effectRef idx="0"/>
+          <a:fontRef idx="minor"/>
+        </p:style>
         <p:txBody>
           <a:bodyPr lIns="90000" rIns="90000" tIns="45000" bIns="45000" anchor="t">
             <a:spAutoFit/>
           </a:bodyPr>
           <a:p>
+            <a:pPr defTabSz="343080">
+              <a:lnSpc>
+                <a:spcPct val="100000"/>
+              </a:lnSpc>
+              <a:spcBef>
+                <a:spcPts val="479"/>
+              </a:spcBef>
+              <a:tabLst>
+                <a:tab algn="l" pos="0"/>
+              </a:tabLst>
+            </a:pPr>
+            <a:r>
+              <a:rPr b="1" lang="fr-FR" sz="2400" strike="noStrike" u="none">
+                <a:solidFill>
+                  <a:srgbClr val="0000ff"/>
+                </a:solidFill>
+                <a:effectLst/>
+                <a:uFillTx/>
+                <a:latin typeface="Calibri"/>
+              </a:rPr>
+              <a:t>Inverse Problem</a:t>
+            </a:r>
+            <a:r>
+              <a:rPr b="0" lang="fr-FR" sz="2400" strike="noStrike" u="none">
+                <a:solidFill>
+                  <a:srgbClr val="0000ff"/>
+                </a:solidFill>
+                <a:effectLst/>
+                <a:uFillTx/>
+                <a:latin typeface="Calibri"/>
+              </a:rPr>
+              <a:t>:</a:t>
+            </a:r>
+            <a:br>
+              <a:rPr sz="2400"/>
+            </a:br>
+            <a:endParaRPr b="0" lang="en-US" sz="2400" strike="noStrike" u="none">
+              <a:solidFill>
+                <a:srgbClr val="000000"/>
+              </a:solidFill>
+              <a:effectLst/>
+              <a:uFillTx/>
+              <a:latin typeface="Arial"/>
+            </a:endParaRPr>
+          </a:p>
+          <a:p>
             <a:pPr marL="343080" indent="-343080" defTabSz="343080">
               <a:lnSpc>
                 <a:spcPct val="100000"/>
@@ -7329,26 +12038,26 @@
             <a:r>
               <a:rPr b="1" lang="fr-FR" sz="2400" strike="noStrike" u="none">
                 <a:solidFill>
-                  <a:srgbClr val="0000ff"/>
-                </a:solidFill>
-                <a:effectLst/>
-                <a:uFillTx/>
-                <a:latin typeface="Calibri"/>
-              </a:rPr>
-              <a:t>Inverse Problem</a:t>
+                  <a:schemeClr val="dk1"/>
+                </a:solidFill>
+                <a:effectLst/>
+                <a:uFillTx/>
+                <a:latin typeface="Calibri"/>
+              </a:rPr>
+              <a:t>Goal</a:t>
             </a:r>
             <a:r>
               <a:rPr b="0" lang="fr-FR" sz="2400" strike="noStrike" u="none">
                 <a:solidFill>
-                  <a:srgbClr val="0000ff"/>
-                </a:solidFill>
-                <a:effectLst/>
-                <a:uFillTx/>
-                <a:latin typeface="Calibri"/>
-              </a:rPr>
-              <a:t>:</a:t>
-            </a:r>
-            <a:endParaRPr b="0" lang="fr-FR" sz="2400" strike="noStrike" u="none">
+                  <a:schemeClr val="dk1"/>
+                </a:solidFill>
+                <a:effectLst/>
+                <a:uFillTx/>
+                <a:latin typeface="Calibri"/>
+              </a:rPr>
+              <a:t>: Reconstruct input parameters from measured data.</a:t>
+            </a:r>
+            <a:endParaRPr b="0" lang="en-US" sz="2400" strike="noStrike" u="none">
               <a:solidFill>
                 <a:srgbClr val="000000"/>
               </a:solidFill>
@@ -7383,7 +12092,7 @@
                 <a:uFillTx/>
                 <a:latin typeface="Calibri"/>
               </a:rPr>
-              <a:t>Goal</a:t>
+              <a:t>AI Approach</a:t>
             </a:r>
             <a:r>
               <a:rPr b="0" lang="fr-FR" sz="2400" strike="noStrike" u="none">
@@ -7394,9 +12103,58 @@
                 <a:uFillTx/>
                 <a:latin typeface="Calibri"/>
               </a:rPr>
-              <a:t>: Reconstruct input parameters from measured data.</a:t>
-            </a:r>
-            <a:endParaRPr b="0" lang="fr-FR" sz="2400" strike="noStrike" u="none">
+              <a:t>:</a:t>
+            </a:r>
+            <a:br>
+              <a:rPr sz="2400"/>
+            </a:br>
+            <a:r>
+              <a:rPr b="0" lang="fr-FR" sz="2400" strike="noStrike" u="none">
+                <a:solidFill>
+                  <a:schemeClr val="dk1"/>
+                </a:solidFill>
+                <a:effectLst/>
+                <a:uFillTx/>
+                <a:latin typeface="Calibri"/>
+              </a:rPr>
+              <a:t> </a:t>
+            </a:r>
+            <a:endParaRPr b="0" lang="en-US" sz="2400" strike="noStrike" u="none">
+              <a:solidFill>
+                <a:srgbClr val="000000"/>
+              </a:solidFill>
+              <a:effectLst/>
+              <a:uFillTx/>
+              <a:latin typeface="Arial"/>
+            </a:endParaRPr>
+          </a:p>
+          <a:p>
+            <a:pPr marL="685800" defTabSz="343080">
+              <a:lnSpc>
+                <a:spcPct val="100000"/>
+              </a:lnSpc>
+              <a:spcBef>
+                <a:spcPts val="420"/>
+              </a:spcBef>
+              <a:tabLst>
+                <a:tab algn="l" pos="0"/>
+              </a:tabLst>
+            </a:pPr>
+            <a:r>
+              <a:rPr b="1" lang="fr-FR" sz="2100" strike="noStrike" u="none">
+                <a:solidFill>
+                  <a:srgbClr val="ff00ff"/>
+                </a:solidFill>
+                <a:effectLst/>
+                <a:uFillTx/>
+                <a:latin typeface="Courier New"/>
+              </a:rPr>
+              <a:t>Measurement → [AI Algorithm] → Parameters</a:t>
+            </a:r>
+            <a:br>
+              <a:rPr sz="2100"/>
+            </a:br>
+            <a:endParaRPr b="0" lang="en-US" sz="2100" strike="noStrike" u="none">
               <a:solidFill>
                 <a:srgbClr val="000000"/>
               </a:solidFill>
@@ -7423,7 +12181,7 @@
               </a:tabLst>
             </a:pPr>
             <a:r>
-              <a:rPr b="1" lang="fr-FR" sz="2400" strike="noStrike" u="none">
+              <a:rPr b="0" lang="fr-FR" sz="2400" strike="noStrike" u="none">
                 <a:solidFill>
                   <a:schemeClr val="dk1"/>
                 </a:solidFill>
@@ -7431,89 +12189,9 @@
                 <a:uFillTx/>
                 <a:latin typeface="Calibri"/>
               </a:rPr>
-              <a:t>AI Approach</a:t>
-            </a:r>
-            <a:r>
-              <a:rPr b="0" lang="fr-FR" sz="2400" strike="noStrike" u="none">
-                <a:solidFill>
-                  <a:schemeClr val="dk1"/>
-                </a:solidFill>
-                <a:effectLst/>
-                <a:uFillTx/>
-                <a:latin typeface="Calibri"/>
-              </a:rPr>
-              <a:t>:</a:t>
-            </a:r>
-            <a:endParaRPr b="0" lang="fr-FR" sz="2400" strike="noStrike" u="none">
-              <a:solidFill>
-                <a:srgbClr val="000000"/>
-              </a:solidFill>
-              <a:effectLst/>
-              <a:uFillTx/>
-              <a:latin typeface="Arial"/>
-            </a:endParaRPr>
-          </a:p>
-          <a:p>
-            <a:pPr marL="685800" defTabSz="343080">
-              <a:lnSpc>
-                <a:spcPct val="100000"/>
-              </a:lnSpc>
-              <a:spcBef>
-                <a:spcPts val="420"/>
-              </a:spcBef>
-              <a:tabLst>
-                <a:tab algn="l" pos="0"/>
-              </a:tabLst>
-            </a:pPr>
-            <a:r>
-              <a:rPr b="0" lang="fr-FR" sz="2100" strike="noStrike" u="none">
-                <a:solidFill>
-                  <a:schemeClr val="dk1"/>
-                </a:solidFill>
-                <a:effectLst/>
-                <a:uFillTx/>
-                <a:latin typeface="Courier New"/>
-              </a:rPr>
-              <a:t>Measurement → [AI Algorithm] → Parameters</a:t>
-            </a:r>
-            <a:endParaRPr b="0" lang="fr-FR" sz="2100" strike="noStrike" u="none">
-              <a:solidFill>
-                <a:srgbClr val="000000"/>
-              </a:solidFill>
-              <a:effectLst/>
-              <a:uFillTx/>
-              <a:latin typeface="Arial"/>
-            </a:endParaRPr>
-          </a:p>
-          <a:p>
-            <a:pPr marL="343080" indent="-343080" defTabSz="343080">
-              <a:lnSpc>
-                <a:spcPct val="100000"/>
-              </a:lnSpc>
-              <a:spcBef>
-                <a:spcPts val="479"/>
-              </a:spcBef>
-              <a:buClr>
-                <a:srgbClr val="000000"/>
-              </a:buClr>
-              <a:buFont typeface="Arial"/>
-              <a:buChar char="•"/>
-              <a:tabLst>
-                <a:tab algn="l" pos="0"/>
-              </a:tabLst>
-            </a:pPr>
-            <a:r>
-              <a:rPr b="0" lang="fr-FR" sz="2400" strike="noStrike" u="none">
-                <a:solidFill>
-                  <a:schemeClr val="dk1"/>
-                </a:solidFill>
-                <a:effectLst/>
-                <a:uFillTx/>
-                <a:latin typeface="Calibri"/>
-              </a:rPr>
               <a:t>Example: Predict sample composition from a scattering pattern.</a:t>
             </a:r>
-            <a:endParaRPr b="0" lang="fr-FR" sz="2400" strike="noStrike" u="none">
+            <a:endParaRPr b="0" lang="en-US" sz="2400" strike="noStrike" u="none">
               <a:solidFill>
                 <a:srgbClr val="000000"/>
               </a:solidFill>
@@ -7563,14 +12241,14 @@
       </p:grpSpPr>
       <p:sp>
         <p:nvSpPr>
-          <p:cNvPr id="55" name="Text 28"/>
+          <p:cNvPr id="65" name="Text 28"/>
           <p:cNvSpPr/>
           <p:nvPr/>
         </p:nvSpPr>
         <p:spPr>
           <a:xfrm>
             <a:off x="548640" y="384120"/>
-            <a:ext cx="9143280" cy="291960"/>
+            <a:ext cx="9142560" cy="291240"/>
           </a:xfrm>
           <a:prstGeom prst="rect">
             <a:avLst/>
@@ -7610,7 +12288,7 @@
               </a:rPr>
               <a:t>Realistic datasets</a:t>
             </a:r>
-            <a:endParaRPr b="0" lang="fr-FR" sz="1200" strike="noStrike" u="none">
+            <a:endParaRPr b="0" lang="en-US" sz="1200" strike="noStrike" u="none">
               <a:solidFill>
                 <a:srgbClr val="000000"/>
               </a:solidFill>
@@ -7623,14 +12301,14 @@
       </p:sp>
       <p:sp>
         <p:nvSpPr>
-          <p:cNvPr id="56" name="Text 29"/>
+          <p:cNvPr id="66" name="Text 29"/>
           <p:cNvSpPr/>
           <p:nvPr/>
         </p:nvSpPr>
         <p:spPr>
           <a:xfrm>
             <a:off x="548640" y="658440"/>
-            <a:ext cx="11063520" cy="822240"/>
+            <a:ext cx="11062800" cy="821520"/>
           </a:xfrm>
           <a:prstGeom prst="rect">
             <a:avLst/>
@@ -7676,7 +12354,7 @@
               </a:rPr>
               <a:t>Why Realistic AI Datasets?</a:t>
             </a:r>
-            <a:endParaRPr b="0" lang="fr-FR" sz="3000" strike="noStrike" u="none">
+            <a:endParaRPr b="0" lang="en-US" sz="3000" strike="noStrike" u="none">
               <a:solidFill>
                 <a:srgbClr val="000000"/>
               </a:solidFill>
@@ -7689,14 +12367,14 @@
       </p:sp>
       <p:sp>
         <p:nvSpPr>
-          <p:cNvPr id="57" name="Text 30"/>
+          <p:cNvPr id="67" name="Text 30"/>
           <p:cNvSpPr/>
           <p:nvPr/>
         </p:nvSpPr>
         <p:spPr>
           <a:xfrm>
             <a:off x="11185920" y="6446520"/>
-            <a:ext cx="456480" cy="273600"/>
+            <a:ext cx="455760" cy="272880"/>
           </a:xfrm>
           <a:prstGeom prst="rect">
             <a:avLst/>
@@ -7737,7 +12415,7 @@
               </a:rPr>
               <a:t>2</a:t>
             </a:r>
-            <a:endParaRPr b="0" lang="fr-FR" sz="900" strike="noStrike" u="none">
+            <a:endParaRPr b="0" lang="en-US" sz="900" strike="noStrike" u="none">
               <a:solidFill>
                 <a:srgbClr val="000000"/>
               </a:solidFill>
@@ -7750,14 +12428,14 @@
       </p:sp>
       <p:sp>
         <p:nvSpPr>
-          <p:cNvPr id="58" name=""/>
-          <p:cNvSpPr txBox="1"/>
+          <p:cNvPr id="68" name=""/>
+          <p:cNvSpPr/>
           <p:nvPr/>
         </p:nvSpPr>
         <p:spPr>
           <a:xfrm>
             <a:off x="540000" y="1800000"/>
-            <a:ext cx="10980000" cy="3100320"/>
+            <a:ext cx="10979280" cy="3160080"/>
           </a:xfrm>
           <a:prstGeom prst="rect">
             <a:avLst/>
@@ -7767,11 +12445,63 @@
             <a:noFill/>
           </a:ln>
         </p:spPr>
+        <p:style>
+          <a:lnRef idx="0"/>
+          <a:fillRef idx="0"/>
+          <a:effectRef idx="0"/>
+          <a:fontRef idx="minor"/>
+        </p:style>
         <p:txBody>
           <a:bodyPr lIns="90000" rIns="90000" tIns="45000" bIns="45000" anchor="t">
             <a:spAutoFit/>
           </a:bodyPr>
           <a:p>
+            <a:pPr defTabSz="343080">
+              <a:lnSpc>
+                <a:spcPct val="100000"/>
+              </a:lnSpc>
+              <a:spcBef>
+                <a:spcPts val="479"/>
+              </a:spcBef>
+              <a:tabLst>
+                <a:tab algn="l" pos="0"/>
+              </a:tabLst>
+            </a:pPr>
+            <a:r>
+              <a:rPr b="1" lang="fr-FR" sz="2400" strike="noStrike" u="none">
+                <a:solidFill>
+                  <a:srgbClr val="0000ff"/>
+                </a:solidFill>
+                <a:effectLst/>
+                <a:uFillTx/>
+                <a:latin typeface="Calibri"/>
+              </a:rPr>
+              <a:t>Surrogate Models</a:t>
+            </a:r>
+            <a:r>
+              <a:rPr b="0" lang="fr-FR" sz="2400" strike="noStrike" u="none">
+                <a:solidFill>
+                  <a:srgbClr val="0000ff"/>
+                </a:solidFill>
+                <a:effectLst/>
+                <a:uFillTx/>
+                <a:latin typeface="Calibri"/>
+              </a:rPr>
+              <a:t>:</a:t>
+            </a:r>
+            <a:br>
+              <a:rPr sz="2400"/>
+            </a:br>
+            <a:endParaRPr b="0" lang="en-US" sz="2400" strike="noStrike" u="none">
+              <a:solidFill>
+                <a:srgbClr val="000000"/>
+              </a:solidFill>
+              <a:effectLst/>
+              <a:uFillTx/>
+              <a:latin typeface="Arial"/>
+            </a:endParaRPr>
+          </a:p>
+          <a:p>
             <a:pPr marL="343080" indent="-343080" defTabSz="343080">
               <a:lnSpc>
                 <a:spcPct val="100000"/>
@@ -7791,26 +12521,26 @@
             <a:r>
               <a:rPr b="1" lang="fr-FR" sz="2400" strike="noStrike" u="none">
                 <a:solidFill>
-                  <a:srgbClr val="0000ff"/>
-                </a:solidFill>
-                <a:effectLst/>
-                <a:uFillTx/>
-                <a:latin typeface="Calibri"/>
-              </a:rPr>
-              <a:t>Surrogate Models</a:t>
+                  <a:schemeClr val="dk1"/>
+                </a:solidFill>
+                <a:effectLst/>
+                <a:uFillTx/>
+                <a:latin typeface="Calibri"/>
+              </a:rPr>
+              <a:t>Purpose</a:t>
             </a:r>
             <a:r>
               <a:rPr b="0" lang="fr-FR" sz="2400" strike="noStrike" u="none">
                 <a:solidFill>
-                  <a:srgbClr val="0000ff"/>
-                </a:solidFill>
-                <a:effectLst/>
-                <a:uFillTx/>
-                <a:latin typeface="Calibri"/>
-              </a:rPr>
-              <a:t>:</a:t>
-            </a:r>
-            <a:endParaRPr b="0" lang="fr-FR" sz="2400" strike="noStrike" u="none">
+                  <a:schemeClr val="dk1"/>
+                </a:solidFill>
+                <a:effectLst/>
+                <a:uFillTx/>
+                <a:latin typeface="Calibri"/>
+              </a:rPr>
+              <a:t>: Replace slow simulations with fast AI models.</a:t>
+            </a:r>
+            <a:endParaRPr b="0" lang="en-US" sz="2400" strike="noStrike" u="none">
               <a:solidFill>
                 <a:srgbClr val="000000"/>
               </a:solidFill>
@@ -7845,7 +12575,7 @@
                 <a:uFillTx/>
                 <a:latin typeface="Calibri"/>
               </a:rPr>
-              <a:t>Purpose</a:t>
+              <a:t>Pipeline</a:t>
             </a:r>
             <a:r>
               <a:rPr b="0" lang="fr-FR" sz="2400" strike="noStrike" u="none">
@@ -7856,9 +12586,58 @@
                 <a:uFillTx/>
                 <a:latin typeface="Calibri"/>
               </a:rPr>
-              <a:t>: Replace slow simulations with fast AI models.</a:t>
-            </a:r>
-            <a:endParaRPr b="0" lang="fr-FR" sz="2400" strike="noStrike" u="none">
+              <a:t>:</a:t>
+            </a:r>
+            <a:br>
+              <a:rPr sz="2400"/>
+            </a:br>
+            <a:r>
+              <a:rPr b="0" lang="fr-FR" sz="2400" strike="noStrike" u="none">
+                <a:solidFill>
+                  <a:schemeClr val="dk1"/>
+                </a:solidFill>
+                <a:effectLst/>
+                <a:uFillTx/>
+                <a:latin typeface="Calibri"/>
+              </a:rPr>
+              <a:t> </a:t>
+            </a:r>
+            <a:endParaRPr b="0" lang="en-US" sz="2400" strike="noStrike" u="none">
+              <a:solidFill>
+                <a:srgbClr val="000000"/>
+              </a:solidFill>
+              <a:effectLst/>
+              <a:uFillTx/>
+              <a:latin typeface="Arial"/>
+            </a:endParaRPr>
+          </a:p>
+          <a:p>
+            <a:pPr marL="685800" defTabSz="343080">
+              <a:lnSpc>
+                <a:spcPct val="100000"/>
+              </a:lnSpc>
+              <a:spcBef>
+                <a:spcPts val="420"/>
+              </a:spcBef>
+              <a:tabLst>
+                <a:tab algn="l" pos="0"/>
+              </a:tabLst>
+            </a:pPr>
+            <a:r>
+              <a:rPr b="1" lang="fr-FR" sz="2100" strike="noStrike" u="none">
+                <a:solidFill>
+                  <a:srgbClr val="ff00ff"/>
+                </a:solidFill>
+                <a:effectLst/>
+                <a:uFillTx/>
+                <a:latin typeface="Courier New"/>
+              </a:rPr>
+              <a:t>Parameters → [AI Model] → Virtual "Measurement" (faster)</a:t>
+            </a:r>
+            <a:br>
+              <a:rPr sz="2100"/>
+            </a:br>
+            <a:endParaRPr b="0" lang="en-US" sz="2100" strike="noStrike" u="none">
               <a:solidFill>
                 <a:srgbClr val="000000"/>
               </a:solidFill>
@@ -7893,7 +12672,7 @@
                 <a:uFillTx/>
                 <a:latin typeface="Calibri"/>
               </a:rPr>
-              <a:t>Pipeline</a:t>
+              <a:t>Use Case</a:t>
             </a:r>
             <a:r>
               <a:rPr b="0" lang="fr-FR" sz="2400" strike="noStrike" u="none">
@@ -7904,89 +12683,9 @@
                 <a:uFillTx/>
                 <a:latin typeface="Calibri"/>
               </a:rPr>
-              <a:t>:</a:t>
-            </a:r>
-            <a:endParaRPr b="0" lang="fr-FR" sz="2400" strike="noStrike" u="none">
-              <a:solidFill>
-                <a:srgbClr val="000000"/>
-              </a:solidFill>
-              <a:effectLst/>
-              <a:uFillTx/>
-              <a:latin typeface="Arial"/>
-            </a:endParaRPr>
-          </a:p>
-          <a:p>
-            <a:pPr marL="685800" defTabSz="343080">
-              <a:lnSpc>
-                <a:spcPct val="100000"/>
-              </a:lnSpc>
-              <a:spcBef>
-                <a:spcPts val="420"/>
-              </a:spcBef>
-              <a:tabLst>
-                <a:tab algn="l" pos="0"/>
-              </a:tabLst>
-            </a:pPr>
-            <a:r>
-              <a:rPr b="0" lang="fr-FR" sz="2100" strike="noStrike" u="none">
-                <a:solidFill>
-                  <a:schemeClr val="dk1"/>
-                </a:solidFill>
-                <a:effectLst/>
-                <a:uFillTx/>
-                <a:latin typeface="Courier New"/>
-              </a:rPr>
-              <a:t>Parameters → [AI Model] → Virtual "Measurement" (faster)</a:t>
-            </a:r>
-            <a:endParaRPr b="0" lang="fr-FR" sz="2100" strike="noStrike" u="none">
-              <a:solidFill>
-                <a:srgbClr val="000000"/>
-              </a:solidFill>
-              <a:effectLst/>
-              <a:uFillTx/>
-              <a:latin typeface="Arial"/>
-            </a:endParaRPr>
-          </a:p>
-          <a:p>
-            <a:pPr marL="343080" indent="-343080" defTabSz="343080">
-              <a:lnSpc>
-                <a:spcPct val="100000"/>
-              </a:lnSpc>
-              <a:spcBef>
-                <a:spcPts val="479"/>
-              </a:spcBef>
-              <a:buClr>
-                <a:srgbClr val="000000"/>
-              </a:buClr>
-              <a:buFont typeface="Arial"/>
-              <a:buChar char="•"/>
-              <a:tabLst>
-                <a:tab algn="l" pos="0"/>
-              </a:tabLst>
-            </a:pPr>
-            <a:r>
-              <a:rPr b="1" lang="fr-FR" sz="2400" strike="noStrike" u="none">
-                <a:solidFill>
-                  <a:schemeClr val="dk1"/>
-                </a:solidFill>
-                <a:effectLst/>
-                <a:uFillTx/>
-                <a:latin typeface="Calibri"/>
-              </a:rPr>
-              <a:t>Use Case</a:t>
-            </a:r>
-            <a:r>
-              <a:rPr b="0" lang="fr-FR" sz="2400" strike="noStrike" u="none">
-                <a:solidFill>
-                  <a:schemeClr val="dk1"/>
-                </a:solidFill>
-                <a:effectLst/>
-                <a:uFillTx/>
-                <a:latin typeface="Calibri"/>
-              </a:rPr>
-              <a:t>: Real-time optimization of beamline configurations.</a:t>
-            </a:r>
-            <a:endParaRPr b="0" lang="fr-FR" sz="2400" strike="noStrike" u="none">
+              <a:t>: Fast phase-space exploration.</a:t>
+            </a:r>
+            <a:endParaRPr b="0" lang="en-US" sz="2400" strike="noStrike" u="none">
               <a:solidFill>
                 <a:srgbClr val="000000"/>
               </a:solidFill>
@@ -8036,14 +12735,14 @@
       </p:grpSpPr>
       <p:sp>
         <p:nvSpPr>
-          <p:cNvPr id="59" name="Text 31"/>
+          <p:cNvPr id="69" name="Text 31"/>
           <p:cNvSpPr/>
           <p:nvPr/>
         </p:nvSpPr>
         <p:spPr>
           <a:xfrm>
             <a:off x="548640" y="384120"/>
-            <a:ext cx="9143280" cy="291960"/>
+            <a:ext cx="9142560" cy="291240"/>
           </a:xfrm>
           <a:prstGeom prst="rect">
             <a:avLst/>
@@ -8083,7 +12782,7 @@
               </a:rPr>
               <a:t>Realistic datasets</a:t>
             </a:r>
-            <a:endParaRPr b="0" lang="fr-FR" sz="1200" strike="noStrike" u="none">
+            <a:endParaRPr b="0" lang="en-US" sz="1200" strike="noStrike" u="none">
               <a:solidFill>
                 <a:srgbClr val="000000"/>
               </a:solidFill>
@@ -8096,14 +12795,14 @@
       </p:sp>
       <p:sp>
         <p:nvSpPr>
-          <p:cNvPr id="60" name="Text 32"/>
+          <p:cNvPr id="70" name="Text 32"/>
           <p:cNvSpPr/>
           <p:nvPr/>
         </p:nvSpPr>
         <p:spPr>
           <a:xfrm>
             <a:off x="548640" y="658440"/>
-            <a:ext cx="11063520" cy="822240"/>
+            <a:ext cx="11062800" cy="821520"/>
           </a:xfrm>
           <a:prstGeom prst="rect">
             <a:avLst/>
@@ -8149,7 +12848,7 @@
               </a:rPr>
               <a:t>Why Realistic AI Datasets?</a:t>
             </a:r>
-            <a:endParaRPr b="0" lang="fr-FR" sz="3000" strike="noStrike" u="none">
+            <a:endParaRPr b="0" lang="en-US" sz="3000" strike="noStrike" u="none">
               <a:solidFill>
                 <a:srgbClr val="000000"/>
               </a:solidFill>
@@ -8162,14 +12861,14 @@
       </p:sp>
       <p:sp>
         <p:nvSpPr>
-          <p:cNvPr id="61" name="Text 33"/>
+          <p:cNvPr id="71" name="Text 33"/>
           <p:cNvSpPr/>
           <p:nvPr/>
         </p:nvSpPr>
         <p:spPr>
           <a:xfrm>
             <a:off x="11185920" y="6446520"/>
-            <a:ext cx="456480" cy="273600"/>
+            <a:ext cx="455760" cy="272880"/>
           </a:xfrm>
           <a:prstGeom prst="rect">
             <a:avLst/>
@@ -8210,7 +12909,7 @@
               </a:rPr>
               <a:t>2</a:t>
             </a:r>
-            <a:endParaRPr b="0" lang="fr-FR" sz="900" strike="noStrike" u="none">
+            <a:endParaRPr b="0" lang="en-US" sz="900" strike="noStrike" u="none">
               <a:solidFill>
                 <a:srgbClr val="000000"/>
               </a:solidFill>
@@ -8223,14 +12922,14 @@
       </p:sp>
       <p:sp>
         <p:nvSpPr>
-          <p:cNvPr id="62" name=""/>
-          <p:cNvSpPr txBox="1"/>
+          <p:cNvPr id="72" name=""/>
+          <p:cNvSpPr/>
           <p:nvPr/>
         </p:nvSpPr>
         <p:spPr>
           <a:xfrm>
             <a:off x="540000" y="1800000"/>
-            <a:ext cx="10980000" cy="3100320"/>
+            <a:ext cx="10979280" cy="3160080"/>
           </a:xfrm>
           <a:prstGeom prst="rect">
             <a:avLst/>
@@ -8240,11 +12939,63 @@
             <a:noFill/>
           </a:ln>
         </p:spPr>
+        <p:style>
+          <a:lnRef idx="0"/>
+          <a:fillRef idx="0"/>
+          <a:effectRef idx="0"/>
+          <a:fontRef idx="minor"/>
+        </p:style>
         <p:txBody>
           <a:bodyPr lIns="90000" rIns="90000" tIns="45000" bIns="45000" anchor="t">
             <a:spAutoFit/>
           </a:bodyPr>
           <a:p>
+            <a:pPr defTabSz="343080">
+              <a:lnSpc>
+                <a:spcPct val="100000"/>
+              </a:lnSpc>
+              <a:spcBef>
+                <a:spcPts val="479"/>
+              </a:spcBef>
+              <a:tabLst>
+                <a:tab algn="l" pos="0"/>
+              </a:tabLst>
+            </a:pPr>
+            <a:r>
+              <a:rPr b="1" lang="fr-FR" sz="2400" strike="noStrike" u="none">
+                <a:solidFill>
+                  <a:srgbClr val="0000ff"/>
+                </a:solidFill>
+                <a:effectLst/>
+                <a:uFillTx/>
+                <a:latin typeface="Calibri"/>
+              </a:rPr>
+              <a:t>Model optimization</a:t>
+            </a:r>
+            <a:r>
+              <a:rPr b="0" lang="fr-FR" sz="2400" strike="noStrike" u="none">
+                <a:solidFill>
+                  <a:srgbClr val="0000ff"/>
+                </a:solidFill>
+                <a:effectLst/>
+                <a:uFillTx/>
+                <a:latin typeface="Calibri"/>
+              </a:rPr>
+              <a:t>:</a:t>
+            </a:r>
+            <a:br>
+              <a:rPr sz="2400"/>
+            </a:br>
+            <a:endParaRPr b="0" lang="en-US" sz="2400" strike="noStrike" u="none">
+              <a:solidFill>
+                <a:srgbClr val="000000"/>
+              </a:solidFill>
+              <a:effectLst/>
+              <a:uFillTx/>
+              <a:latin typeface="Arial"/>
+            </a:endParaRPr>
+          </a:p>
+          <a:p>
             <a:pPr marL="343080" indent="-343080" defTabSz="343080">
               <a:lnSpc>
                 <a:spcPct val="100000"/>
@@ -8264,26 +13015,26 @@
             <a:r>
               <a:rPr b="1" lang="fr-FR" sz="2400" strike="noStrike" u="none">
                 <a:solidFill>
-                  <a:srgbClr val="0000ff"/>
-                </a:solidFill>
-                <a:effectLst/>
-                <a:uFillTx/>
-                <a:latin typeface="Calibri"/>
-              </a:rPr>
-              <a:t>Model optimization</a:t>
+                  <a:schemeClr val="dk1"/>
+                </a:solidFill>
+                <a:effectLst/>
+                <a:uFillTx/>
+                <a:latin typeface="Calibri"/>
+              </a:rPr>
+              <a:t>Purpose</a:t>
             </a:r>
             <a:r>
               <a:rPr b="0" lang="fr-FR" sz="2400" strike="noStrike" u="none">
                 <a:solidFill>
-                  <a:srgbClr val="0000ff"/>
-                </a:solidFill>
-                <a:effectLst/>
-                <a:uFillTx/>
-                <a:latin typeface="Calibri"/>
-              </a:rPr>
-              <a:t>:</a:t>
-            </a:r>
-            <a:endParaRPr b="0" lang="fr-FR" sz="2400" strike="noStrike" u="none">
+                  <a:schemeClr val="dk1"/>
+                </a:solidFill>
+                <a:effectLst/>
+                <a:uFillTx/>
+                <a:latin typeface="Calibri"/>
+              </a:rPr>
+              <a:t>: Find best parameters to get min/max signal.</a:t>
+            </a:r>
+            <a:endParaRPr b="0" lang="en-US" sz="2400" strike="noStrike" u="none">
               <a:solidFill>
                 <a:srgbClr val="000000"/>
               </a:solidFill>
@@ -8318,7 +13069,7 @@
                 <a:uFillTx/>
                 <a:latin typeface="Calibri"/>
               </a:rPr>
-              <a:t>Purpose</a:t>
+              <a:t>Pipeline</a:t>
             </a:r>
             <a:r>
               <a:rPr b="0" lang="fr-FR" sz="2400" strike="noStrike" u="none">
@@ -8329,9 +13080,58 @@
                 <a:uFillTx/>
                 <a:latin typeface="Calibri"/>
               </a:rPr>
-              <a:t>: Find best parameters to get min/max signal.</a:t>
-            </a:r>
-            <a:endParaRPr b="0" lang="fr-FR" sz="2400" strike="noStrike" u="none">
+              <a:t>:</a:t>
+            </a:r>
+            <a:br>
+              <a:rPr sz="2400"/>
+            </a:br>
+            <a:r>
+              <a:rPr b="0" lang="fr-FR" sz="2400" strike="noStrike" u="none">
+                <a:solidFill>
+                  <a:schemeClr val="dk1"/>
+                </a:solidFill>
+                <a:effectLst/>
+                <a:uFillTx/>
+                <a:latin typeface="Calibri"/>
+              </a:rPr>
+              <a:t> </a:t>
+            </a:r>
+            <a:endParaRPr b="0" lang="en-US" sz="2400" strike="noStrike" u="none">
+              <a:solidFill>
+                <a:srgbClr val="000000"/>
+              </a:solidFill>
+              <a:effectLst/>
+              <a:uFillTx/>
+              <a:latin typeface="Arial"/>
+            </a:endParaRPr>
+          </a:p>
+          <a:p>
+            <a:pPr marL="685800" defTabSz="343080">
+              <a:lnSpc>
+                <a:spcPct val="100000"/>
+              </a:lnSpc>
+              <a:spcBef>
+                <a:spcPts val="420"/>
+              </a:spcBef>
+              <a:tabLst>
+                <a:tab algn="l" pos="0"/>
+              </a:tabLst>
+            </a:pPr>
+            <a:r>
+              <a:rPr b="1" lang="fr-FR" sz="2100" strike="noStrike" u="none">
+                <a:solidFill>
+                  <a:srgbClr val="ff00ff"/>
+                </a:solidFill>
+                <a:effectLst/>
+                <a:uFillTx/>
+                <a:latin typeface="Courier New"/>
+              </a:rPr>
+              <a:t>Parameters → [Optimizer] → Best Parameters</a:t>
+            </a:r>
+            <a:br>
+              <a:rPr sz="2100"/>
+            </a:br>
+            <a:endParaRPr b="0" lang="en-US" sz="2100" strike="noStrike" u="none">
               <a:solidFill>
                 <a:srgbClr val="000000"/>
               </a:solidFill>
@@ -8366,7 +13166,7 @@
                 <a:uFillTx/>
                 <a:latin typeface="Calibri"/>
               </a:rPr>
-              <a:t>Pipeline</a:t>
+              <a:t>Use Case</a:t>
             </a:r>
             <a:r>
               <a:rPr b="0" lang="fr-FR" sz="2400" strike="noStrike" u="none">
@@ -8377,89 +13177,9 @@
                 <a:uFillTx/>
                 <a:latin typeface="Calibri"/>
               </a:rPr>
-              <a:t>:</a:t>
-            </a:r>
-            <a:endParaRPr b="0" lang="fr-FR" sz="2400" strike="noStrike" u="none">
-              <a:solidFill>
-                <a:srgbClr val="000000"/>
-              </a:solidFill>
-              <a:effectLst/>
-              <a:uFillTx/>
-              <a:latin typeface="Arial"/>
-            </a:endParaRPr>
-          </a:p>
-          <a:p>
-            <a:pPr marL="685800" defTabSz="343080">
-              <a:lnSpc>
-                <a:spcPct val="100000"/>
-              </a:lnSpc>
-              <a:spcBef>
-                <a:spcPts val="420"/>
-              </a:spcBef>
-              <a:tabLst>
-                <a:tab algn="l" pos="0"/>
-              </a:tabLst>
-            </a:pPr>
-            <a:r>
-              <a:rPr b="0" lang="fr-FR" sz="2100" strike="noStrike" u="none">
-                <a:solidFill>
-                  <a:schemeClr val="dk1"/>
-                </a:solidFill>
-                <a:effectLst/>
-                <a:uFillTx/>
-                <a:latin typeface="Courier New"/>
-              </a:rPr>
-              <a:t>Parameters → [AI Model] → Virtual "Measurement" (faster)</a:t>
-            </a:r>
-            <a:endParaRPr b="0" lang="fr-FR" sz="2100" strike="noStrike" u="none">
-              <a:solidFill>
-                <a:srgbClr val="000000"/>
-              </a:solidFill>
-              <a:effectLst/>
-              <a:uFillTx/>
-              <a:latin typeface="Arial"/>
-            </a:endParaRPr>
-          </a:p>
-          <a:p>
-            <a:pPr marL="343080" indent="-343080" defTabSz="343080">
-              <a:lnSpc>
-                <a:spcPct val="100000"/>
-              </a:lnSpc>
-              <a:spcBef>
-                <a:spcPts val="479"/>
-              </a:spcBef>
-              <a:buClr>
-                <a:srgbClr val="000000"/>
-              </a:buClr>
-              <a:buFont typeface="Arial"/>
-              <a:buChar char="•"/>
-              <a:tabLst>
-                <a:tab algn="l" pos="0"/>
-              </a:tabLst>
-            </a:pPr>
-            <a:r>
-              <a:rPr b="1" lang="fr-FR" sz="2400" strike="noStrike" u="none">
-                <a:solidFill>
-                  <a:schemeClr val="dk1"/>
-                </a:solidFill>
-                <a:effectLst/>
-                <a:uFillTx/>
-                <a:latin typeface="Calibri"/>
-              </a:rPr>
-              <a:t>Use Case</a:t>
-            </a:r>
-            <a:r>
-              <a:rPr b="0" lang="fr-FR" sz="2400" strike="noStrike" u="none">
-                <a:solidFill>
-                  <a:schemeClr val="dk1"/>
-                </a:solidFill>
-                <a:effectLst/>
-                <a:uFillTx/>
-                <a:latin typeface="Calibri"/>
-              </a:rPr>
-              <a:t>: Real-time optimization of beamline configurations.</a:t>
-            </a:r>
-            <a:endParaRPr b="0" lang="fr-FR" sz="2400" strike="noStrike" u="none">
+              <a:t>: Optimization of beamline configurations.</a:t>
+            </a:r>
+            <a:endParaRPr b="0" lang="en-US" sz="2400" strike="noStrike" u="none">
               <a:solidFill>
                 <a:srgbClr val="000000"/>
               </a:solidFill>
@@ -8655,7 +13375,7 @@
 </a:theme>
 </file>
 
-<file path=ppt/theme/theme2.xml><?xml version="1.0" encoding="utf-8"?>
+<file path=ppt/theme/theme4.xml><?xml version="1.0" encoding="utf-8"?>
 <a:theme xmlns:a="http://schemas.openxmlformats.org/drawingml/2006/main" xmlns:r="http://schemas.openxmlformats.org/officeDocument/2006/relationships" name="Office Theme">
   <a:themeElements>
     <a:clrScheme name="LibreOffice">
